--- a/poster/STSA_midterm_poster.pptx
+++ b/poster/STSA_midterm_poster.pptx
@@ -256,7 +256,7 @@
             </c:numRef>
           </c:val>
         </c:ser>
-        <c:gapWidth val="60"/>
+        <c:gapWidth val="80"/>
         <c:axId val="-2068027336"/>
         <c:axId val="-2113994440"/>
       </c:barChart>
@@ -267,32 +267,6 @@
         </c:scaling>
         <c:delete val="0"/>
         <c:axPos val="b"/>
-        <c:title>
-          <c:tx>
-            <c:rich>
-              <a:bodyPr/>
-              <a:lstStyle/>
-              <a:p>
-                <a:pPr>
-                  <a:defRPr/>
-                </a:pPr>
-                <a:r>
-                  <a:rPr sz="1100" b="0" i="0">
-                    <a:solidFill>
-                      <a:srgbClr val="222222"/>
-                    </a:solidFill>
-                    <a:latin typeface="Arial"/>
-                    <a:ea typeface="Arial"/>
-                    <a:cs typeface="Arial"/>
-                  </a:rPr>
-                  <a:t>Rounds reached</a:t>
-                </a:r>
-              </a:p>
-            </c:rich>
-          </c:tx>
-          <c:layout/>
-          <c:overlay val="0"/>
-        </c:title>
         <c:majorTickMark val="out"/>
         <c:minorTickMark val="none"/>
         <c:tickLblPos val="nextTo"/>
@@ -320,32 +294,6 @@
         <c:delete val="0"/>
         <c:axPos val="l"/>
         <c:majorGridlines/>
-        <c:title>
-          <c:tx>
-            <c:rich>
-              <a:bodyPr/>
-              <a:lstStyle/>
-              <a:p>
-                <a:pPr>
-                  <a:defRPr/>
-                </a:pPr>
-                <a:r>
-                  <a:rPr sz="1100" b="0" i="0">
-                    <a:solidFill>
-                      <a:srgbClr val="222222"/>
-                    </a:solidFill>
-                    <a:latin typeface="Arial"/>
-                    <a:ea typeface="Arial"/>
-                    <a:cs typeface="Arial"/>
-                  </a:rPr>
-                  <a:t>ms / 25 rounds</a:t>
-                </a:r>
-              </a:p>
-            </c:rich>
-          </c:tx>
-          <c:layout/>
-          <c:overlay val="0"/>
-        </c:title>
         <c:majorTickMark val="out"/>
         <c:minorTickMark val="none"/>
         <c:tickLblPos val="nextTo"/>
@@ -354,7 +302,7 @@
           <a:lstStyle/>
           <a:p>
             <a:pPr>
-              <a:defRPr sz="1100">
+              <a:defRPr sz="1000">
                 <a:latin typeface="Arial"/>
               </a:defRPr>
             </a:pPr>
@@ -364,6 +312,20 @@
         <c:crosses val="autoZero"/>
       </c:valAx>
     </c:plotArea>
+    <c:legend>
+      <c:overlay val="0"/>
+      <c:txPr>
+        <a:bodyPr/>
+        <a:lstStyle/>
+        <a:p>
+          <a:pPr>
+            <a:defRPr sz="1100">
+              <a:latin typeface="Arial"/>
+            </a:defRPr>
+          </a:pPr>
+        </a:p>
+      </c:txPr>
+    </c:legend>
     <c:dispBlanksAs val="gap"/>
   </c:chart>
   <c:txPr>
@@ -3414,8 +3376,8 @@
         </p:nvSpPr>
         <p:spPr>
           <a:xfrm>
-            <a:off x="146304" y="109728"/>
-            <a:ext cx="9308592" cy="1115568"/>
+            <a:off x="164592" y="109728"/>
+            <a:ext cx="9272016" cy="1261872"/>
           </a:xfrm>
           <a:prstGeom prst="rect">
             <a:avLst/>
@@ -3458,8 +3420,8 @@
         </p:nvSpPr>
         <p:spPr>
           <a:xfrm>
-            <a:off x="256032" y="164592"/>
-            <a:ext cx="7452360" cy="713232"/>
+            <a:off x="274320" y="164592"/>
+            <a:ext cx="7360920" cy="713232"/>
           </a:xfrm>
           <a:prstGeom prst="rect">
             <a:avLst/>
@@ -3467,24 +3429,24 @@
           <a:noFill/>
         </p:spPr>
         <p:txBody>
-          <a:bodyPr wrap="square" lIns="0" rIns="0" tIns="18288" bIns="18288" anchor="t">
+          <a:bodyPr wrap="square" lIns="0" rIns="0" tIns="27432" bIns="18288" anchor="t">
             <a:noAutofit/>
           </a:bodyPr>
           <a:lstStyle/>
           <a:p>
             <a:pPr algn="l">
               <a:lnSpc>
-                <a:spcPct val="95000"/>
+                <a:spcPct val="112000"/>
               </a:lnSpc>
               <a:spcBef>
                 <a:spcPts val="0"/>
               </a:spcBef>
               <a:spcAft>
-                <a:spcPts val="0"/>
+                <a:spcPts val="200"/>
               </a:spcAft>
             </a:pPr>
             <a:r>
-              <a:rPr sz="2600" b="1" i="0">
+              <a:rPr sz="2400" b="1" i="0">
                 <a:solidFill>
                   <a:srgbClr val="000000"/>
                 </a:solidFill>
@@ -3498,7 +3460,7 @@
           <a:p>
             <a:pPr algn="l">
               <a:lnSpc>
-                <a:spcPct val="95000"/>
+                <a:spcPct val="112000"/>
               </a:lnSpc>
               <a:spcBef>
                 <a:spcPts val="0"/>
@@ -3508,7 +3470,7 @@
               </a:spcAft>
             </a:pPr>
             <a:r>
-              <a:rPr sz="2600" b="1" i="0">
+              <a:rPr sz="2400" b="1" i="0">
                 <a:solidFill>
                   <a:srgbClr val="000000"/>
                 </a:solidFill>
@@ -3529,8 +3491,8 @@
         </p:nvSpPr>
         <p:spPr>
           <a:xfrm>
-            <a:off x="256032" y="841248"/>
-            <a:ext cx="7452360" cy="292608"/>
+            <a:off x="274320" y="932688"/>
+            <a:ext cx="7360920" cy="329184"/>
           </a:xfrm>
           <a:prstGeom prst="rect">
             <a:avLst/>
@@ -3538,14 +3500,14 @@
           <a:noFill/>
         </p:spPr>
         <p:txBody>
-          <a:bodyPr wrap="square" lIns="0" rIns="0" tIns="18288" bIns="18288" anchor="t">
+          <a:bodyPr wrap="square" lIns="0" rIns="0" tIns="27432" bIns="18288" anchor="t">
             <a:noAutofit/>
           </a:bodyPr>
           <a:lstStyle/>
           <a:p>
             <a:pPr algn="l">
               <a:lnSpc>
-                <a:spcPct val="95000"/>
+                <a:spcPct val="112000"/>
               </a:lnSpc>
               <a:spcBef>
                 <a:spcPts val="0"/>
@@ -3555,7 +3517,7 @@
               </a:spcAft>
             </a:pPr>
             <a:r>
-              <a:rPr sz="1600" b="0" i="0">
+              <a:rPr sz="1500" b="0" i="0">
                 <a:solidFill>
                   <a:srgbClr val="000000"/>
                 </a:solidFill>
@@ -3563,7 +3525,7 @@
                 <a:ea typeface="Arial"/>
                 <a:cs typeface="Arial"/>
               </a:rPr>
-              <a:t>s1310193 Kazane Hamao          Supervisor: Giovanni Viglietta</a:t>
+              <a:t>s1310193 Kazane Hamao      Supervisor: Giovanni Viglietta</a:t>
             </a:r>
           </a:p>
         </p:txBody>
@@ -3576,8 +3538,8 @@
         </p:nvSpPr>
         <p:spPr>
           <a:xfrm>
-            <a:off x="7818120" y="219456"/>
-            <a:ext cx="1481328" cy="896112"/>
+            <a:off x="7772400" y="256032"/>
+            <a:ext cx="1499616" cy="969264"/>
           </a:xfrm>
           <a:prstGeom prst="rect">
             <a:avLst/>
@@ -3622,8 +3584,8 @@
         </p:nvSpPr>
         <p:spPr>
           <a:xfrm>
-            <a:off x="7818120" y="420624"/>
-            <a:ext cx="1481328" cy="530352"/>
+            <a:off x="7772400" y="438912"/>
+            <a:ext cx="1499616" cy="603504"/>
           </a:xfrm>
           <a:prstGeom prst="rect">
             <a:avLst/>
@@ -3631,24 +3593,24 @@
           <a:noFill/>
         </p:spPr>
         <p:txBody>
-          <a:bodyPr wrap="square" lIns="18288" rIns="18288" tIns="18288" bIns="18288" anchor="ctr">
+          <a:bodyPr wrap="square" lIns="18288" rIns="18288" tIns="27432" bIns="18288" anchor="ctr">
             <a:noAutofit/>
           </a:bodyPr>
           <a:lstStyle/>
           <a:p>
             <a:pPr algn="ctr">
               <a:lnSpc>
-                <a:spcPct val="95000"/>
+                <a:spcPct val="112000"/>
               </a:lnSpc>
               <a:spcBef>
                 <a:spcPts val="0"/>
               </a:spcBef>
               <a:spcAft>
-                <a:spcPts val="0"/>
+                <a:spcPts val="200"/>
               </a:spcAft>
             </a:pPr>
             <a:r>
-              <a:rPr sz="1200" b="1" i="0">
+              <a:rPr sz="1300" b="1" i="0">
                 <a:solidFill>
                   <a:srgbClr val="395E89"/>
                 </a:solidFill>
@@ -3662,7 +3624,7 @@
           <a:p>
             <a:pPr algn="ctr">
               <a:lnSpc>
-                <a:spcPct val="95000"/>
+                <a:spcPct val="112000"/>
               </a:lnSpc>
               <a:spcBef>
                 <a:spcPts val="0"/>
@@ -3672,7 +3634,7 @@
               </a:spcAft>
             </a:pPr>
             <a:r>
-              <a:rPr sz="1200" b="0" i="0">
+              <a:rPr sz="1300" b="0" i="0">
                 <a:solidFill>
                   <a:srgbClr val="395E89"/>
                 </a:solidFill>
@@ -3693,13 +3655,13 @@
         </p:nvCxnSpPr>
         <p:spPr>
           <a:xfrm>
-            <a:off x="4773168" y="1353312"/>
-            <a:ext cx="0" cy="9144000"/>
+            <a:off x="4773168" y="1499616"/>
+            <a:ext cx="0" cy="8814816"/>
           </a:xfrm>
           <a:prstGeom prst="line">
             <a:avLst/>
           </a:prstGeom>
-          <a:ln w="31750">
+          <a:ln w="28575">
             <a:solidFill>
               <a:srgbClr val="4F81BD"/>
             </a:solidFill>
@@ -3728,8 +3690,8 @@
         </p:nvSpPr>
         <p:spPr>
           <a:xfrm>
-            <a:off x="201168" y="1335024"/>
-            <a:ext cx="4407408" cy="292608"/>
+            <a:off x="219456" y="1499616"/>
+            <a:ext cx="4370832" cy="292608"/>
           </a:xfrm>
           <a:prstGeom prst="rect">
             <a:avLst/>
@@ -3737,14 +3699,14 @@
           <a:noFill/>
         </p:spPr>
         <p:txBody>
-          <a:bodyPr wrap="square" lIns="18288" rIns="18288" tIns="18288" bIns="18288" anchor="t">
+          <a:bodyPr wrap="square" lIns="0" rIns="0" tIns="27432" bIns="18288" anchor="t">
             <a:noAutofit/>
           </a:bodyPr>
           <a:lstStyle/>
           <a:p>
             <a:pPr algn="l">
               <a:lnSpc>
-                <a:spcPct val="95000"/>
+                <a:spcPct val="112000"/>
               </a:lnSpc>
               <a:spcBef>
                 <a:spcPts val="0"/>
@@ -3754,7 +3716,7 @@
               </a:spcAft>
             </a:pPr>
             <a:r>
-              <a:rPr sz="2000" b="1" i="0">
+              <a:rPr sz="1800" b="1" i="0">
                 <a:solidFill>
                   <a:srgbClr val="000000"/>
                 </a:solidFill>
@@ -3775,13 +3737,13 @@
         </p:nvCxnSpPr>
         <p:spPr>
           <a:xfrm>
-            <a:off x="201168" y="1627632"/>
-            <a:ext cx="4407408" cy="0"/>
+            <a:off x="219456" y="1792224"/>
+            <a:ext cx="4370832" cy="0"/>
           </a:xfrm>
           <a:prstGeom prst="line">
             <a:avLst/>
           </a:prstGeom>
-          <a:ln w="15875">
+          <a:ln w="14604">
             <a:solidFill>
               <a:srgbClr val="000000"/>
             </a:solidFill>
@@ -3810,8 +3772,8 @@
         </p:nvSpPr>
         <p:spPr>
           <a:xfrm>
-            <a:off x="201168" y="1664208"/>
-            <a:ext cx="4443984" cy="2331720"/>
+            <a:off x="219456" y="1837943"/>
+            <a:ext cx="4370832" cy="1642872"/>
           </a:xfrm>
           <a:prstGeom prst="rect">
             <a:avLst/>
@@ -3819,24 +3781,24 @@
           <a:noFill/>
         </p:spPr>
         <p:txBody>
-          <a:bodyPr wrap="square" lIns="36576" rIns="36576" tIns="18288" bIns="18288" anchor="t">
+          <a:bodyPr wrap="square" lIns="45720" rIns="45720" tIns="27432" bIns="18288" anchor="t">
             <a:noAutofit/>
           </a:bodyPr>
           <a:lstStyle/>
           <a:p>
             <a:pPr algn="l">
               <a:lnSpc>
-                <a:spcPct val="95000"/>
+                <a:spcPct val="112000"/>
               </a:lnSpc>
               <a:spcBef>
                 <a:spcPts val="0"/>
               </a:spcBef>
               <a:spcAft>
-                <a:spcPts val="600"/>
+                <a:spcPts val="100"/>
               </a:spcAft>
             </a:pPr>
             <a:r>
-              <a:rPr sz="1600" b="0" i="0">
+              <a:rPr sz="1500" b="0" i="0">
                 <a:solidFill>
                   <a:srgbClr val="222222"/>
                 </a:solidFill>
@@ -3844,23 +3806,23 @@
                 <a:ea typeface="Arial"/>
                 <a:cs typeface="Arial"/>
               </a:rPr>
-              <a:t>An anonymous network gives agents no unique IDs. Every agent runs the same program and can only broadcast to its current neighbors. In a dynamic network the links may change at every synchronous round [1], [3].</a:t>
+              <a:t>•  No IDs. Every agent runs the same program.</a:t>
             </a:r>
           </a:p>
           <a:p>
             <a:pPr algn="l">
               <a:lnSpc>
-                <a:spcPct val="95000"/>
+                <a:spcPct val="112000"/>
               </a:lnSpc>
               <a:spcBef>
                 <a:spcPts val="0"/>
               </a:spcBef>
               <a:spcAft>
-                <a:spcPts val="600"/>
+                <a:spcPts val="100"/>
               </a:spcAft>
             </a:pPr>
             <a:r>
-              <a:rPr sz="1600" b="0" i="0">
+              <a:rPr sz="1500" b="0" i="0">
                 <a:solidFill>
                   <a:srgbClr val="222222"/>
                 </a:solidFill>
@@ -3868,23 +3830,23 @@
                 <a:ea typeface="Arial"/>
                 <a:cs typeface="Arial"/>
               </a:rPr>
-              <a:t>Agents stay indistinguishable until they receive different messages. A history tree records that process: level Lₜ is one node per group that is still indistinguishable at round t, and a(v) is the number of agents in the group (its anonymity) [1], [2].</a:t>
+              <a:t>•  Broadcast only. Links can change each round.</a:t>
             </a:r>
           </a:p>
           <a:p>
             <a:pPr algn="l">
               <a:lnSpc>
-                <a:spcPct val="95000"/>
+                <a:spcPct val="112000"/>
               </a:lnSpc>
               <a:spcBef>
                 <a:spcPts val="0"/>
               </a:spcBef>
               <a:spcAft>
-                <a:spcPts val="600"/>
+                <a:spcPts val="100"/>
               </a:spcAft>
             </a:pPr>
             <a:r>
-              <a:rPr sz="1600" b="0" i="0">
+              <a:rPr sz="1500" b="0" i="0">
                 <a:solidFill>
                   <a:srgbClr val="222222"/>
                 </a:solidFill>
@@ -3892,23 +3854,23 @@
                 <a:ea typeface="Arial"/>
                 <a:cs typeface="Arial"/>
               </a:rPr>
-              <a:t>With one leader, the tree is enough to compute the network size n. The count can settle by round 2n−2, and an algorithm can also stop, with a proof, by round 3n−2 [1].</a:t>
+              <a:t>•  History tree: one node per group at round t.</a:t>
             </a:r>
           </a:p>
           <a:p>
             <a:pPr algn="l">
               <a:lnSpc>
-                <a:spcPct val="95000"/>
+                <a:spcPct val="112000"/>
               </a:lnSpc>
               <a:spcBef>
                 <a:spcPts val="0"/>
               </a:spcBef>
               <a:spcAft>
-                <a:spcPts val="0"/>
+                <a:spcPts val="100"/>
               </a:spcAft>
             </a:pPr>
             <a:r>
-              <a:rPr sz="1600" b="0" i="0">
+              <a:rPr sz="1500" b="0" i="0">
                 <a:solidFill>
                   <a:srgbClr val="222222"/>
                 </a:solidFill>
@@ -3916,7 +3878,79 @@
                 <a:ea typeface="Arial"/>
                 <a:cs typeface="Arial"/>
               </a:rPr>
-              <a:t>This project does not change those bounds. It builds a simulator that shows the tree and the two algorithms, and that stays responsive when the user adds many rounds.</a:t>
+              <a:t>•  a(v) is how many agents share that node.</a:t>
+            </a:r>
+          </a:p>
+          <a:p>
+            <a:pPr algn="l">
+              <a:lnSpc>
+                <a:spcPct val="112000"/>
+              </a:lnSpc>
+              <a:spcBef>
+                <a:spcPts val="0"/>
+              </a:spcBef>
+              <a:spcAft>
+                <a:spcPts val="100"/>
+              </a:spcAft>
+            </a:pPr>
+            <a:r>
+              <a:rPr sz="1500" b="0" i="0">
+                <a:solidFill>
+                  <a:srgbClr val="222222"/>
+                </a:solidFill>
+                <a:latin typeface="Arial"/>
+                <a:ea typeface="Arial"/>
+                <a:cs typeface="Arial"/>
+              </a:rPr>
+              <a:t>•  One leader: n settles by 2n−2 [1], [2].</a:t>
+            </a:r>
+          </a:p>
+          <a:p>
+            <a:pPr algn="l">
+              <a:lnSpc>
+                <a:spcPct val="112000"/>
+              </a:lnSpc>
+              <a:spcBef>
+                <a:spcPts val="0"/>
+              </a:spcBef>
+              <a:spcAft>
+                <a:spcPts val="100"/>
+              </a:spcAft>
+            </a:pPr>
+            <a:r>
+              <a:rPr sz="1500" b="0" i="0">
+                <a:solidFill>
+                  <a:srgbClr val="222222"/>
+                </a:solidFill>
+                <a:latin typeface="Arial"/>
+                <a:ea typeface="Arial"/>
+                <a:cs typeface="Arial"/>
+              </a:rPr>
+              <a:t>•  A proof of n takes until round 3n−2 [1].</a:t>
+            </a:r>
+          </a:p>
+          <a:p>
+            <a:pPr algn="l">
+              <a:lnSpc>
+                <a:spcPct val="112000"/>
+              </a:lnSpc>
+              <a:spcBef>
+                <a:spcPts val="0"/>
+              </a:spcBef>
+              <a:spcAft>
+                <a:spcPts val="0"/>
+              </a:spcAft>
+            </a:pPr>
+            <a:r>
+              <a:rPr sz="1500" b="0" i="0">
+                <a:solidFill>
+                  <a:srgbClr val="222222"/>
+                </a:solidFill>
+                <a:latin typeface="Arial"/>
+                <a:ea typeface="Arial"/>
+                <a:cs typeface="Arial"/>
+              </a:rPr>
+              <a:t>•  This work draws that tree and stays fast.</a:t>
             </a:r>
           </a:p>
         </p:txBody>
@@ -3929,8 +3963,8 @@
         </p:nvSpPr>
         <p:spPr>
           <a:xfrm>
-            <a:off x="201168" y="4041648"/>
-            <a:ext cx="4425696" cy="1444752"/>
+            <a:off x="219456" y="3553968"/>
+            <a:ext cx="4370832" cy="1258316"/>
           </a:xfrm>
           <a:prstGeom prst="rect">
             <a:avLst/>
@@ -3975,8 +4009,8 @@
         </p:nvSpPr>
         <p:spPr>
           <a:xfrm>
-            <a:off x="256032" y="4078224"/>
-            <a:ext cx="4315968" cy="1371600"/>
+            <a:off x="274320" y="3572256"/>
+            <a:ext cx="4261104" cy="1221740"/>
           </a:xfrm>
           <a:prstGeom prst="rect">
             <a:avLst/>
@@ -3984,14 +4018,14 @@
           <a:noFill/>
         </p:spPr>
         <p:txBody>
-          <a:bodyPr wrap="square" lIns="36576" rIns="36576" tIns="18288" bIns="18288" anchor="t">
+          <a:bodyPr wrap="square" lIns="27432" rIns="27432" tIns="27432" bIns="18288" anchor="t">
             <a:noAutofit/>
           </a:bodyPr>
           <a:lstStyle/>
           <a:p>
             <a:pPr algn="l">
               <a:lnSpc>
-                <a:spcPct val="95000"/>
+                <a:spcPct val="112000"/>
               </a:lnSpc>
               <a:spcBef>
                 <a:spcPts val="0"/>
@@ -4001,7 +4035,7 @@
               </a:spcAft>
             </a:pPr>
             <a:r>
-              <a:rPr sz="1600" b="1" i="0">
+              <a:rPr sz="1500" b="1" i="0">
                 <a:solidFill>
                   <a:srgbClr val="1F497D"/>
                 </a:solidFill>
@@ -4015,7 +4049,7 @@
           <a:p>
             <a:pPr algn="l">
               <a:lnSpc>
-                <a:spcPct val="95000"/>
+                <a:spcPct val="112000"/>
               </a:lnSpc>
               <a:spcBef>
                 <a:spcPts val="0"/>
@@ -4025,7 +4059,7 @@
               </a:spcAft>
             </a:pPr>
             <a:r>
-              <a:rPr sz="1600" b="0" i="0">
+              <a:rPr sz="1500" b="0" i="0">
                 <a:solidFill>
                   <a:srgbClr val="222222"/>
                 </a:solidFill>
@@ -4033,13 +4067,13 @@
                 <a:ea typeface="Arial"/>
                 <a:cs typeface="Arial"/>
               </a:rPr>
-              <a:t>•  Black edge — a class splits into smaller classes.</a:t>
+              <a:t>•  Black edge — a class splits.</a:t>
             </a:r>
           </a:p>
           <a:p>
             <a:pPr algn="l">
               <a:lnSpc>
-                <a:spcPct val="95000"/>
+                <a:spcPct val="112000"/>
               </a:lnSpc>
               <a:spcBef>
                 <a:spcPts val="0"/>
@@ -4049,7 +4083,7 @@
               </a:spcAft>
             </a:pPr>
             <a:r>
-              <a:rPr sz="1600" b="0" i="0">
+              <a:rPr sz="1500" b="0" i="0">
                 <a:solidFill>
                   <a:srgbClr val="222222"/>
                 </a:solidFill>
@@ -4057,13 +4091,13 @@
                 <a:ea typeface="Arial"/>
                 <a:cs typeface="Arial"/>
               </a:rPr>
-              <a:t>•  Red edge — messages of that round, with multiplicity.</a:t>
+              <a:t>•  Red edge — messages of that round.</a:t>
             </a:r>
           </a:p>
           <a:p>
             <a:pPr algn="l">
               <a:lnSpc>
-                <a:spcPct val="95000"/>
+                <a:spcPct val="112000"/>
               </a:lnSpc>
               <a:spcBef>
                 <a:spcPts val="0"/>
@@ -4073,7 +4107,7 @@
               </a:spcAft>
             </a:pPr>
             <a:r>
-              <a:rPr sz="1600" b="0" i="0">
+              <a:rPr sz="1500" b="0" i="0">
                 <a:solidFill>
                   <a:srgbClr val="222222"/>
                 </a:solidFill>
@@ -4081,13 +4115,13 @@
                 <a:ea typeface="Arial"/>
                 <a:cs typeface="Arial"/>
               </a:rPr>
-              <a:t>•  Vista — the finite piece of the tree one agent can build.</a:t>
+              <a:t>•  Vista — the part one agent can build.</a:t>
             </a:r>
           </a:p>
           <a:p>
             <a:pPr algn="l">
               <a:lnSpc>
-                <a:spcPct val="95000"/>
+                <a:spcPct val="112000"/>
               </a:lnSpc>
               <a:spcBef>
                 <a:spcPts val="0"/>
@@ -4097,7 +4131,7 @@
               </a:spcAft>
             </a:pPr>
             <a:r>
-              <a:rPr sz="1600" b="0" i="0">
+              <a:rPr sz="1500" b="0" i="0">
                 <a:solidFill>
                   <a:srgbClr val="222222"/>
                 </a:solidFill>
@@ -4105,7 +4139,7 @@
                 <a:ea typeface="Arial"/>
                 <a:cs typeface="Arial"/>
               </a:rPr>
-              <a:t>•  Anonymity 1 — that agent is uniquely identifiable.</a:t>
+              <a:t>•  Anonymity 1 — the agent is unique.</a:t>
             </a:r>
           </a:p>
         </p:txBody>
@@ -4118,8 +4152,8 @@
         </p:nvSpPr>
         <p:spPr>
           <a:xfrm>
-            <a:off x="201168" y="5596128"/>
-            <a:ext cx="4407408" cy="292608"/>
+            <a:off x="219456" y="4903724"/>
+            <a:ext cx="4370832" cy="292608"/>
           </a:xfrm>
           <a:prstGeom prst="rect">
             <a:avLst/>
@@ -4127,14 +4161,14 @@
           <a:noFill/>
         </p:spPr>
         <p:txBody>
-          <a:bodyPr wrap="square" lIns="18288" rIns="18288" tIns="18288" bIns="18288" anchor="t">
+          <a:bodyPr wrap="square" lIns="0" rIns="0" tIns="27432" bIns="18288" anchor="t">
             <a:noAutofit/>
           </a:bodyPr>
           <a:lstStyle/>
           <a:p>
             <a:pPr algn="l">
               <a:lnSpc>
-                <a:spcPct val="95000"/>
+                <a:spcPct val="112000"/>
               </a:lnSpc>
               <a:spcBef>
                 <a:spcPts val="0"/>
@@ -4144,7 +4178,7 @@
               </a:spcAft>
             </a:pPr>
             <a:r>
-              <a:rPr sz="2000" b="1" i="0">
+              <a:rPr sz="1800" b="1" i="0">
                 <a:solidFill>
                   <a:srgbClr val="000000"/>
                 </a:solidFill>
@@ -4165,13 +4199,13 @@
         </p:nvCxnSpPr>
         <p:spPr>
           <a:xfrm>
-            <a:off x="201168" y="5888736"/>
-            <a:ext cx="4407408" cy="0"/>
+            <a:off x="219456" y="5196332"/>
+            <a:ext cx="4370832" cy="0"/>
           </a:xfrm>
           <a:prstGeom prst="line">
             <a:avLst/>
           </a:prstGeom>
-          <a:ln w="15875">
+          <a:ln w="14604">
             <a:solidFill>
               <a:srgbClr val="000000"/>
             </a:solidFill>
@@ -4200,8 +4234,8 @@
         </p:nvSpPr>
         <p:spPr>
           <a:xfrm>
-            <a:off x="201168" y="5925312"/>
-            <a:ext cx="4443984" cy="2697480"/>
+            <a:off x="219456" y="5242052"/>
+            <a:ext cx="4370832" cy="3296920"/>
           </a:xfrm>
           <a:prstGeom prst="rect">
             <a:avLst/>
@@ -4209,14 +4243,38 @@
           <a:noFill/>
         </p:spPr>
         <p:txBody>
-          <a:bodyPr wrap="square" lIns="36576" rIns="36576" tIns="18288" bIns="18288" anchor="t">
+          <a:bodyPr wrap="square" lIns="45720" rIns="45720" tIns="27432" bIns="18288" anchor="t">
             <a:noAutofit/>
           </a:bodyPr>
           <a:lstStyle/>
           <a:p>
             <a:pPr algn="l">
               <a:lnSpc>
-                <a:spcPct val="95000"/>
+                <a:spcPct val="112000"/>
+              </a:lnSpc>
+              <a:spcBef>
+                <a:spcPts val="0"/>
+              </a:spcBef>
+              <a:spcAft>
+                <a:spcPts val="200"/>
+              </a:spcAft>
+            </a:pPr>
+            <a:r>
+              <a:rPr sz="1500" b="1" i="0">
+                <a:solidFill>
+                  <a:srgbClr val="1F497D"/>
+                </a:solidFill>
+                <a:latin typeface="Arial"/>
+                <a:ea typeface="Arial"/>
+                <a:cs typeface="Arial"/>
+              </a:rPr>
+              <a:t>2.1 Model — same setting as [1].</a:t>
+            </a:r>
+          </a:p>
+          <a:p>
+            <a:pPr algn="l">
+              <a:lnSpc>
+                <a:spcPct val="112000"/>
               </a:lnSpc>
               <a:spcBef>
                 <a:spcPts val="0"/>
@@ -4226,31 +4284,31 @@
               </a:spcAft>
             </a:pPr>
             <a:r>
-              <a:rPr sz="1600" b="1" i="0">
-                <a:solidFill>
-                  <a:srgbClr val="1F497D"/>
+              <a:rPr sz="1500" b="0" i="0">
+                <a:solidFill>
+                  <a:srgbClr val="222222"/>
                 </a:solidFill>
                 <a:latin typeface="Arial"/>
                 <a:ea typeface="Arial"/>
                 <a:cs typeface="Arial"/>
               </a:rPr>
-              <a:t>2.1 Model.</a:t>
+              <a:t>•  Undirected dynamic graph, one leader.</a:t>
             </a:r>
           </a:p>
           <a:p>
             <a:pPr algn="l">
               <a:lnSpc>
-                <a:spcPct val="95000"/>
+                <a:spcPct val="112000"/>
               </a:lnSpc>
               <a:spcBef>
                 <a:spcPts val="0"/>
               </a:spcBef>
               <a:spcAft>
-                <a:spcPts val="500"/>
+                <a:spcPts val="400"/>
               </a:spcAft>
             </a:pPr>
             <a:r>
-              <a:rPr sz="1600" b="0" i="0">
+              <a:rPr sz="1500" b="0" i="0">
                 <a:solidFill>
                   <a:srgbClr val="222222"/>
                 </a:solidFill>
@@ -4258,13 +4316,37 @@
                 <a:ea typeface="Arial"/>
                 <a:cs typeface="Arial"/>
               </a:rPr>
-              <a:t>Same setting as [1]: an undirected dynamic multigraph, one leader (input 0), and no port labels. Each agent builds a vista and merges it with the vistas it receives.</a:t>
+              <a:t>•  Leader input is 0. No port labels.</a:t>
             </a:r>
           </a:p>
           <a:p>
             <a:pPr algn="l">
               <a:lnSpc>
-                <a:spcPct val="95000"/>
+                <a:spcPct val="112000"/>
+              </a:lnSpc>
+              <a:spcBef>
+                <a:spcPts val="0"/>
+              </a:spcBef>
+              <a:spcAft>
+                <a:spcPts val="200"/>
+              </a:spcAft>
+            </a:pPr>
+            <a:r>
+              <a:rPr sz="1500" b="1" i="0">
+                <a:solidFill>
+                  <a:srgbClr val="1F497D"/>
+                </a:solidFill>
+                <a:latin typeface="Arial"/>
+                <a:ea typeface="Arial"/>
+                <a:cs typeface="Arial"/>
+              </a:rPr>
+              <a:t>2.2 Program.</a:t>
+            </a:r>
+          </a:p>
+          <a:p>
+            <a:pPr algn="l">
+              <a:lnSpc>
+                <a:spcPct val="112000"/>
               </a:lnSpc>
               <a:spcBef>
                 <a:spcPts val="0"/>
@@ -4274,45 +4356,21 @@
               </a:spcAft>
             </a:pPr>
             <a:r>
-              <a:rPr sz="1600" b="1" i="0">
-                <a:solidFill>
-                  <a:srgbClr val="1F497D"/>
+              <a:rPr sz="1500" b="0" i="0">
+                <a:solidFill>
+                  <a:srgbClr val="222222"/>
                 </a:solidFill>
                 <a:latin typeface="Arial"/>
                 <a:ea typeface="Arial"/>
                 <a:cs typeface="Arial"/>
               </a:rPr>
-              <a:t>2.2 The program.</a:t>
+              <a:t>•  C code, compiled to WebAssembly.</a:t>
             </a:r>
           </a:p>
           <a:p>
             <a:pPr algn="l">
               <a:lnSpc>
-                <a:spcPct val="95000"/>
-              </a:lnSpc>
-              <a:spcBef>
-                <a:spcPts val="0"/>
-              </a:spcBef>
-              <a:spcAft>
-                <a:spcPts val="300"/>
-              </a:spcAft>
-            </a:pPr>
-            <a:r>
-              <a:rPr sz="1600" b="0" i="0">
-                <a:solidFill>
-                  <a:srgbClr val="222222"/>
-                </a:solidFill>
-                <a:latin typeface="Arial"/>
-                <a:ea typeface="Arial"/>
-                <a:cs typeface="Arial"/>
-              </a:rPr>
-              <a:t>The network, the history tree, and both counting algorithms are written in C and compiled to WebAssembly. Left panel: agents and the links of the current round. Right panel: the history tree, colored by the algorithm’s guess.</a:t>
-            </a:r>
-          </a:p>
-          <a:p>
-            <a:pPr algn="l">
-              <a:lnSpc>
-                <a:spcPct val="95000"/>
+                <a:spcPct val="112000"/>
               </a:lnSpc>
               <a:spcBef>
                 <a:spcPts val="0"/>
@@ -4322,7 +4380,7 @@
               </a:spcAft>
             </a:pPr>
             <a:r>
-              <a:rPr sz="1600" b="0" i="0">
+              <a:rPr sz="1500" b="0" i="0">
                 <a:solidFill>
                   <a:srgbClr val="222222"/>
                 </a:solidFill>
@@ -4330,13 +4388,13 @@
                 <a:ea typeface="Arial"/>
                 <a:cs typeface="Arial"/>
               </a:rPr>
-              <a:t>Sample networks, including known hard cases, load from the page.</a:t>
+              <a:t>•  Left: network. Right: colored tree.</a:t>
             </a:r>
           </a:p>
           <a:p>
             <a:pPr algn="l">
               <a:lnSpc>
-                <a:spcPct val="95000"/>
+                <a:spcPct val="112000"/>
               </a:lnSpc>
               <a:spcBef>
                 <a:spcPts val="0"/>
@@ -4346,7 +4404,7 @@
               </a:spcAft>
             </a:pPr>
             <a:r>
-              <a:rPr sz="1500" b="1" i="0">
+              <a:rPr sz="1200" b="1" i="0">
                 <a:solidFill>
                   <a:srgbClr val="1F497D"/>
                 </a:solidFill>
@@ -4360,7 +4418,31 @@
           <a:p>
             <a:pPr algn="l">
               <a:lnSpc>
-                <a:spcPct val="95000"/>
+                <a:spcPct val="112000"/>
+              </a:lnSpc>
+              <a:spcBef>
+                <a:spcPts val="0"/>
+              </a:spcBef>
+              <a:spcAft>
+                <a:spcPts val="200"/>
+              </a:spcAft>
+            </a:pPr>
+            <a:r>
+              <a:rPr sz="1500" b="1" i="0">
+                <a:solidFill>
+                  <a:srgbClr val="1F497D"/>
+                </a:solidFill>
+                <a:latin typeface="Arial"/>
+                <a:ea typeface="Arial"/>
+                <a:cs typeface="Arial"/>
+              </a:rPr>
+              <a:t>2.3 Speed.</a:t>
+            </a:r>
+          </a:p>
+          <a:p>
+            <a:pPr algn="l">
+              <a:lnSpc>
+                <a:spcPct val="112000"/>
               </a:lnSpc>
               <a:spcBef>
                 <a:spcPts val="0"/>
@@ -4370,21 +4452,21 @@
               </a:spcAft>
             </a:pPr>
             <a:r>
-              <a:rPr sz="1600" b="1" i="0">
-                <a:solidFill>
-                  <a:srgbClr val="1F497D"/>
+              <a:rPr sz="1500" b="0" i="0">
+                <a:solidFill>
+                  <a:srgbClr val="222222"/>
                 </a:solidFill>
                 <a:latin typeface="Arial"/>
                 <a:ea typeface="Arial"/>
                 <a:cs typeface="Arial"/>
               </a:rPr>
-              <a:t>2.3 Making long runs usable.</a:t>
+              <a:t>•  Last-round append: O(R n²) → O(n²).</a:t>
             </a:r>
           </a:p>
           <a:p>
             <a:pPr algn="l">
               <a:lnSpc>
-                <a:spcPct val="95000"/>
+                <a:spcPct val="112000"/>
               </a:lnSpc>
               <a:spcBef>
                 <a:spcPts val="0"/>
@@ -4394,7 +4476,7 @@
               </a:spcAft>
             </a:pPr>
             <a:r>
-              <a:rPr sz="1600" b="0" i="0">
+              <a:rPr sz="1500" b="0" i="0">
                 <a:solidFill>
                   <a:srgbClr val="222222"/>
                 </a:solidFill>
@@ -4402,13 +4484,13 @@
                 <a:ea typeface="Arial"/>
                 <a:cs typeface="Arial"/>
               </a:rPr>
-              <a:t>•  Append the last round from a snapshot: O(R n²) → O(n²).</a:t>
+              <a:t>•  Merged tree grows by one level only.</a:t>
             </a:r>
           </a:p>
           <a:p>
             <a:pPr algn="l">
               <a:lnSpc>
-                <a:spcPct val="95000"/>
+                <a:spcPct val="112000"/>
               </a:lnSpc>
               <a:spcBef>
                 <a:spcPts val="0"/>
@@ -4418,7 +4500,7 @@
               </a:spcAft>
             </a:pPr>
             <a:r>
-              <a:rPr sz="1600" b="0" i="0">
+              <a:rPr sz="1500" b="0" i="0">
                 <a:solidFill>
                   <a:srgbClr val="222222"/>
                 </a:solidFill>
@@ -4426,13 +4508,13 @@
                 <a:ea typeface="Arial"/>
                 <a:cs typeface="Arial"/>
               </a:rPr>
-              <a:t>•  Grow the merged tree by one level: O(R n³) → O(n²).</a:t>
+              <a:t>•  A middle edit replays only the suffix.</a:t>
             </a:r>
           </a:p>
           <a:p>
             <a:pPr algn="l">
               <a:lnSpc>
-                <a:spcPct val="95000"/>
+                <a:spcPct val="112000"/>
               </a:lnSpc>
               <a:spcBef>
                 <a:spcPts val="0"/>
@@ -4442,7 +4524,7 @@
               </a:spcAft>
             </a:pPr>
             <a:r>
-              <a:rPr sz="1600" b="0" i="0">
+              <a:rPr sz="1500" b="0" i="0">
                 <a:solidFill>
                   <a:srgbClr val="222222"/>
                 </a:solidFill>
@@ -4450,23 +4532,23 @@
                 <a:ea typeface="Arial"/>
                 <a:cs typeface="Arial"/>
               </a:rPr>
-              <a:t>•  A middle edit restores a checkpoint and replays only the suffix.</a:t>
+              <a:t>•  Hash-map merge skips identical trees.</a:t>
             </a:r>
           </a:p>
           <a:p>
             <a:pPr algn="l">
               <a:lnSpc>
-                <a:spcPct val="95000"/>
+                <a:spcPct val="112000"/>
               </a:lnSpc>
               <a:spcBef>
                 <a:spcPts val="0"/>
               </a:spcBef>
               <a:spcAft>
-                <a:spcPts val="100"/>
+                <a:spcPts val="0"/>
               </a:spcAft>
             </a:pPr>
             <a:r>
-              <a:rPr sz="1600" b="0" i="0">
+              <a:rPr sz="1500" b="0" i="0">
                 <a:solidFill>
                   <a:srgbClr val="222222"/>
                 </a:solidFill>
@@ -4474,13 +4556,13 @@
                 <a:ea typeface="Arial"/>
                 <a:cs typeface="Arial"/>
               </a:rPr>
-              <a:t>•  Merge uses a hash map, and skips agents with the same tree hash.</a:t>
+              <a:t>•  Recursion crashed near 2,000 rounds;</a:t>
             </a:r>
           </a:p>
           <a:p>
             <a:pPr algn="l">
               <a:lnSpc>
-                <a:spcPct val="95000"/>
+                <a:spcPct val="112000"/>
               </a:lnSpc>
               <a:spcBef>
                 <a:spcPts val="0"/>
@@ -4490,7 +4572,7 @@
               </a:spcAft>
             </a:pPr>
             <a:r>
-              <a:rPr sz="1600" b="0" i="0">
+              <a:rPr sz="1500" b="0" i="0">
                 <a:solidFill>
                   <a:srgbClr val="222222"/>
                 </a:solidFill>
@@ -4498,7 +4580,7 @@
                 <a:ea typeface="Arial"/>
                 <a:cs typeface="Arial"/>
               </a:rPr>
-              <a:t>•  A recursive walk crashed near 2,000 rounds; it is now a loop.</a:t>
+              <a:t>   that walk is now a loop.</a:t>
             </a:r>
           </a:p>
         </p:txBody>
@@ -4511,8 +4593,8 @@
         </p:nvSpPr>
         <p:spPr>
           <a:xfrm>
-            <a:off x="201168" y="8613648"/>
-            <a:ext cx="4425696" cy="1847088"/>
+            <a:off x="219456" y="8612124"/>
+            <a:ext cx="4370832" cy="1702307"/>
           </a:xfrm>
           <a:prstGeom prst="rect">
             <a:avLst/>
@@ -4549,16 +4631,574 @@
           </a:p>
         </p:txBody>
       </p:sp>
+      <p:sp>
+        <p:nvSpPr>
+          <p:cNvPr id="18" name="Rectangle 17"/>
+          <p:cNvSpPr/>
+          <p:nvPr/>
+        </p:nvSpPr>
+        <p:spPr>
+          <a:xfrm>
+            <a:off x="1572768" y="8685276"/>
+            <a:ext cx="1600200" cy="310896"/>
+          </a:xfrm>
+          <a:prstGeom prst="rect">
+            <a:avLst/>
+          </a:prstGeom>
+          <a:solidFill>
+            <a:srgbClr val="E7EEF7"/>
+          </a:solidFill>
+          <a:ln w="14604">
+            <a:solidFill>
+              <a:srgbClr val="1F497D"/>
+            </a:solidFill>
+          </a:ln>
+          <a:effectLst/>
+        </p:spPr>
+        <p:style>
+          <a:lnRef idx="1">
+            <a:schemeClr val="accent1"/>
+          </a:lnRef>
+          <a:fillRef idx="3">
+            <a:schemeClr val="accent1"/>
+          </a:fillRef>
+          <a:effectRef idx="2">
+            <a:schemeClr val="accent1"/>
+          </a:effectRef>
+          <a:fontRef idx="minor">
+            <a:schemeClr val="lt1"/>
+          </a:fontRef>
+        </p:style>
+        <p:txBody>
+          <a:bodyPr rtlCol="0" anchor="ctr"/>
+          <a:lstStyle/>
+          <a:p>
+            <a:pPr algn="ctr"/>
+          </a:p>
+        </p:txBody>
+      </p:sp>
+      <p:sp>
+        <p:nvSpPr>
+          <p:cNvPr id="19" name="TextBox 18"/>
+          <p:cNvSpPr txBox="1"/>
+          <p:nvPr/>
+        </p:nvSpPr>
+        <p:spPr>
+          <a:xfrm>
+            <a:off x="1572768" y="8685276"/>
+            <a:ext cx="1600200" cy="310896"/>
+          </a:xfrm>
+          <a:prstGeom prst="rect">
+            <a:avLst/>
+          </a:prstGeom>
+          <a:noFill/>
+        </p:spPr>
+        <p:txBody>
+          <a:bodyPr wrap="square" lIns="18288" rIns="18288" tIns="27432" bIns="18288" anchor="ctr">
+            <a:noAutofit/>
+          </a:bodyPr>
+          <a:lstStyle/>
+          <a:p>
+            <a:pPr algn="ctr">
+              <a:lnSpc>
+                <a:spcPct val="112000"/>
+              </a:lnSpc>
+              <a:spcBef>
+                <a:spcPts val="0"/>
+              </a:spcBef>
+              <a:spcAft>
+                <a:spcPts val="0"/>
+              </a:spcAft>
+            </a:pPr>
+            <a:r>
+              <a:rPr sz="1200" b="1" i="0">
+                <a:solidFill>
+                  <a:srgbClr val="000000"/>
+                </a:solidFill>
+                <a:latin typeface="Arial"/>
+                <a:ea typeface="Arial"/>
+                <a:cs typeface="Arial"/>
+              </a:rPr>
+              <a:t>r    all agents</a:t>
+            </a:r>
+          </a:p>
+        </p:txBody>
+      </p:sp>
+      <p:sp>
+        <p:nvSpPr>
+          <p:cNvPr id="20" name="Rectangle 19"/>
+          <p:cNvSpPr/>
+          <p:nvPr/>
+        </p:nvSpPr>
+        <p:spPr>
+          <a:xfrm>
+            <a:off x="365760" y="9037137"/>
+            <a:ext cx="1691640" cy="310896"/>
+          </a:xfrm>
+          <a:prstGeom prst="rect">
+            <a:avLst/>
+          </a:prstGeom>
+          <a:solidFill>
+            <a:srgbClr val="E7EEF7"/>
+          </a:solidFill>
+          <a:ln w="14604">
+            <a:solidFill>
+              <a:srgbClr val="1F497D"/>
+            </a:solidFill>
+          </a:ln>
+          <a:effectLst/>
+        </p:spPr>
+        <p:style>
+          <a:lnRef idx="1">
+            <a:schemeClr val="accent1"/>
+          </a:lnRef>
+          <a:fillRef idx="3">
+            <a:schemeClr val="accent1"/>
+          </a:fillRef>
+          <a:effectRef idx="2">
+            <a:schemeClr val="accent1"/>
+          </a:effectRef>
+          <a:fontRef idx="minor">
+            <a:schemeClr val="lt1"/>
+          </a:fontRef>
+        </p:style>
+        <p:txBody>
+          <a:bodyPr rtlCol="0" anchor="ctr"/>
+          <a:lstStyle/>
+          <a:p>
+            <a:pPr algn="ctr"/>
+          </a:p>
+        </p:txBody>
+      </p:sp>
+      <p:sp>
+        <p:nvSpPr>
+          <p:cNvPr id="21" name="TextBox 20"/>
+          <p:cNvSpPr txBox="1"/>
+          <p:nvPr/>
+        </p:nvSpPr>
+        <p:spPr>
+          <a:xfrm>
+            <a:off x="365760" y="9037137"/>
+            <a:ext cx="1691640" cy="310896"/>
+          </a:xfrm>
+          <a:prstGeom prst="rect">
+            <a:avLst/>
+          </a:prstGeom>
+          <a:noFill/>
+        </p:spPr>
+        <p:txBody>
+          <a:bodyPr wrap="square" lIns="18288" rIns="18288" tIns="27432" bIns="18288" anchor="ctr">
+            <a:noAutofit/>
+          </a:bodyPr>
+          <a:lstStyle/>
+          <a:p>
+            <a:pPr algn="ctr">
+              <a:lnSpc>
+                <a:spcPct val="112000"/>
+              </a:lnSpc>
+              <a:spcBef>
+                <a:spcPts val="0"/>
+              </a:spcBef>
+              <a:spcAft>
+                <a:spcPts val="0"/>
+              </a:spcAft>
+            </a:pPr>
+            <a:r>
+              <a:rPr sz="1200" b="1" i="0">
+                <a:solidFill>
+                  <a:srgbClr val="000000"/>
+                </a:solidFill>
+                <a:latin typeface="Arial"/>
+                <a:ea typeface="Arial"/>
+                <a:cs typeface="Arial"/>
+              </a:rPr>
+              <a:t>leader    a = 1</a:t>
+            </a:r>
+          </a:p>
+        </p:txBody>
+      </p:sp>
+      <p:sp>
+        <p:nvSpPr>
+          <p:cNvPr id="22" name="Rectangle 21"/>
+          <p:cNvSpPr/>
+          <p:nvPr/>
+        </p:nvSpPr>
+        <p:spPr>
+          <a:xfrm>
+            <a:off x="2697480" y="9037137"/>
+            <a:ext cx="1737360" cy="310896"/>
+          </a:xfrm>
+          <a:prstGeom prst="rect">
+            <a:avLst/>
+          </a:prstGeom>
+          <a:solidFill>
+            <a:srgbClr val="E7EEF7"/>
+          </a:solidFill>
+          <a:ln w="14604">
+            <a:solidFill>
+              <a:srgbClr val="1F497D"/>
+            </a:solidFill>
+          </a:ln>
+          <a:effectLst/>
+        </p:spPr>
+        <p:style>
+          <a:lnRef idx="1">
+            <a:schemeClr val="accent1"/>
+          </a:lnRef>
+          <a:fillRef idx="3">
+            <a:schemeClr val="accent1"/>
+          </a:fillRef>
+          <a:effectRef idx="2">
+            <a:schemeClr val="accent1"/>
+          </a:effectRef>
+          <a:fontRef idx="minor">
+            <a:schemeClr val="lt1"/>
+          </a:fontRef>
+        </p:style>
+        <p:txBody>
+          <a:bodyPr rtlCol="0" anchor="ctr"/>
+          <a:lstStyle/>
+          <a:p>
+            <a:pPr algn="ctr"/>
+          </a:p>
+        </p:txBody>
+      </p:sp>
+      <p:sp>
+        <p:nvSpPr>
+          <p:cNvPr id="23" name="TextBox 22"/>
+          <p:cNvSpPr txBox="1"/>
+          <p:nvPr/>
+        </p:nvSpPr>
+        <p:spPr>
+          <a:xfrm>
+            <a:off x="2697480" y="9037137"/>
+            <a:ext cx="1737360" cy="310896"/>
+          </a:xfrm>
+          <a:prstGeom prst="rect">
+            <a:avLst/>
+          </a:prstGeom>
+          <a:noFill/>
+        </p:spPr>
+        <p:txBody>
+          <a:bodyPr wrap="square" lIns="18288" rIns="18288" tIns="27432" bIns="18288" anchor="ctr">
+            <a:noAutofit/>
+          </a:bodyPr>
+          <a:lstStyle/>
+          <a:p>
+            <a:pPr algn="ctr">
+              <a:lnSpc>
+                <a:spcPct val="112000"/>
+              </a:lnSpc>
+              <a:spcBef>
+                <a:spcPts val="0"/>
+              </a:spcBef>
+              <a:spcAft>
+                <a:spcPts val="0"/>
+              </a:spcAft>
+            </a:pPr>
+            <a:r>
+              <a:rPr sz="1200" b="1" i="0">
+                <a:solidFill>
+                  <a:srgbClr val="000000"/>
+                </a:solidFill>
+                <a:latin typeface="Arial"/>
+                <a:ea typeface="Arial"/>
+                <a:cs typeface="Arial"/>
+              </a:rPr>
+              <a:t>others   a = n−1</a:t>
+            </a:r>
+          </a:p>
+        </p:txBody>
+      </p:sp>
+      <p:sp>
+        <p:nvSpPr>
+          <p:cNvPr id="24" name="Rectangle 23"/>
+          <p:cNvSpPr/>
+          <p:nvPr/>
+        </p:nvSpPr>
+        <p:spPr>
+          <a:xfrm>
+            <a:off x="566928" y="9418319"/>
+            <a:ext cx="1280160" cy="310896"/>
+          </a:xfrm>
+          <a:prstGeom prst="rect">
+            <a:avLst/>
+          </a:prstGeom>
+          <a:solidFill>
+            <a:srgbClr val="C6EFCE"/>
+          </a:solidFill>
+          <a:ln w="14604">
+            <a:solidFill>
+              <a:srgbClr val="1F497D"/>
+            </a:solidFill>
+          </a:ln>
+          <a:effectLst/>
+        </p:spPr>
+        <p:style>
+          <a:lnRef idx="1">
+            <a:schemeClr val="accent1"/>
+          </a:lnRef>
+          <a:fillRef idx="3">
+            <a:schemeClr val="accent1"/>
+          </a:fillRef>
+          <a:effectRef idx="2">
+            <a:schemeClr val="accent1"/>
+          </a:effectRef>
+          <a:fontRef idx="minor">
+            <a:schemeClr val="lt1"/>
+          </a:fontRef>
+        </p:style>
+        <p:txBody>
+          <a:bodyPr rtlCol="0" anchor="ctr"/>
+          <a:lstStyle/>
+          <a:p>
+            <a:pPr algn="ctr"/>
+          </a:p>
+        </p:txBody>
+      </p:sp>
+      <p:sp>
+        <p:nvSpPr>
+          <p:cNvPr id="25" name="TextBox 24"/>
+          <p:cNvSpPr txBox="1"/>
+          <p:nvPr/>
+        </p:nvSpPr>
+        <p:spPr>
+          <a:xfrm>
+            <a:off x="566928" y="9418319"/>
+            <a:ext cx="1280160" cy="310896"/>
+          </a:xfrm>
+          <a:prstGeom prst="rect">
+            <a:avLst/>
+          </a:prstGeom>
+          <a:noFill/>
+        </p:spPr>
+        <p:txBody>
+          <a:bodyPr wrap="square" lIns="18288" rIns="18288" tIns="27432" bIns="18288" anchor="ctr">
+            <a:noAutofit/>
+          </a:bodyPr>
+          <a:lstStyle/>
+          <a:p>
+            <a:pPr algn="ctr">
+              <a:lnSpc>
+                <a:spcPct val="112000"/>
+              </a:lnSpc>
+              <a:spcBef>
+                <a:spcPts val="0"/>
+              </a:spcBef>
+              <a:spcAft>
+                <a:spcPts val="0"/>
+              </a:spcAft>
+            </a:pPr>
+            <a:r>
+              <a:rPr sz="1200" b="1" i="0">
+                <a:solidFill>
+                  <a:srgbClr val="000000"/>
+                </a:solidFill>
+                <a:latin typeface="Arial"/>
+                <a:ea typeface="Arial"/>
+                <a:cs typeface="Arial"/>
+              </a:rPr>
+              <a:t>leader</a:t>
+            </a:r>
+          </a:p>
+        </p:txBody>
+      </p:sp>
+      <p:sp>
+        <p:nvSpPr>
+          <p:cNvPr id="26" name="Rectangle 25"/>
+          <p:cNvSpPr/>
+          <p:nvPr/>
+        </p:nvSpPr>
+        <p:spPr>
+          <a:xfrm>
+            <a:off x="2606040" y="9418319"/>
+            <a:ext cx="822960" cy="310896"/>
+          </a:xfrm>
+          <a:prstGeom prst="rect">
+            <a:avLst/>
+          </a:prstGeom>
+          <a:solidFill>
+            <a:srgbClr val="FFF2CC"/>
+          </a:solidFill>
+          <a:ln w="14604">
+            <a:solidFill>
+              <a:srgbClr val="1F497D"/>
+            </a:solidFill>
+          </a:ln>
+          <a:effectLst/>
+        </p:spPr>
+        <p:style>
+          <a:lnRef idx="1">
+            <a:schemeClr val="accent1"/>
+          </a:lnRef>
+          <a:fillRef idx="3">
+            <a:schemeClr val="accent1"/>
+          </a:fillRef>
+          <a:effectRef idx="2">
+            <a:schemeClr val="accent1"/>
+          </a:effectRef>
+          <a:fontRef idx="minor">
+            <a:schemeClr val="lt1"/>
+          </a:fontRef>
+        </p:style>
+        <p:txBody>
+          <a:bodyPr rtlCol="0" anchor="ctr"/>
+          <a:lstStyle/>
+          <a:p>
+            <a:pPr algn="ctr"/>
+          </a:p>
+        </p:txBody>
+      </p:sp>
+      <p:sp>
+        <p:nvSpPr>
+          <p:cNvPr id="27" name="TextBox 26"/>
+          <p:cNvSpPr txBox="1"/>
+          <p:nvPr/>
+        </p:nvSpPr>
+        <p:spPr>
+          <a:xfrm>
+            <a:off x="2606040" y="9418319"/>
+            <a:ext cx="822960" cy="310896"/>
+          </a:xfrm>
+          <a:prstGeom prst="rect">
+            <a:avLst/>
+          </a:prstGeom>
+          <a:noFill/>
+        </p:spPr>
+        <p:txBody>
+          <a:bodyPr wrap="square" lIns="18288" rIns="18288" tIns="27432" bIns="18288" anchor="ctr">
+            <a:noAutofit/>
+          </a:bodyPr>
+          <a:lstStyle/>
+          <a:p>
+            <a:pPr algn="ctr">
+              <a:lnSpc>
+                <a:spcPct val="112000"/>
+              </a:lnSpc>
+              <a:spcBef>
+                <a:spcPts val="0"/>
+              </a:spcBef>
+              <a:spcAft>
+                <a:spcPts val="0"/>
+              </a:spcAft>
+            </a:pPr>
+            <a:r>
+              <a:rPr sz="1200" b="1" i="0">
+                <a:solidFill>
+                  <a:srgbClr val="000000"/>
+                </a:solidFill>
+                <a:latin typeface="Arial"/>
+                <a:ea typeface="Arial"/>
+                <a:cs typeface="Arial"/>
+              </a:rPr>
+              <a:t>A</a:t>
+            </a:r>
+          </a:p>
+        </p:txBody>
+      </p:sp>
+      <p:sp>
+        <p:nvSpPr>
+          <p:cNvPr id="28" name="Rectangle 27"/>
+          <p:cNvSpPr/>
+          <p:nvPr/>
+        </p:nvSpPr>
+        <p:spPr>
+          <a:xfrm>
+            <a:off x="3566160" y="9418319"/>
+            <a:ext cx="822960" cy="310896"/>
+          </a:xfrm>
+          <a:prstGeom prst="rect">
+            <a:avLst/>
+          </a:prstGeom>
+          <a:solidFill>
+            <a:srgbClr val="FFF2CC"/>
+          </a:solidFill>
+          <a:ln w="14604">
+            <a:solidFill>
+              <a:srgbClr val="1F497D"/>
+            </a:solidFill>
+          </a:ln>
+          <a:effectLst/>
+        </p:spPr>
+        <p:style>
+          <a:lnRef idx="1">
+            <a:schemeClr val="accent1"/>
+          </a:lnRef>
+          <a:fillRef idx="3">
+            <a:schemeClr val="accent1"/>
+          </a:fillRef>
+          <a:effectRef idx="2">
+            <a:schemeClr val="accent1"/>
+          </a:effectRef>
+          <a:fontRef idx="minor">
+            <a:schemeClr val="lt1"/>
+          </a:fontRef>
+        </p:style>
+        <p:txBody>
+          <a:bodyPr rtlCol="0" anchor="ctr"/>
+          <a:lstStyle/>
+          <a:p>
+            <a:pPr algn="ctr"/>
+          </a:p>
+        </p:txBody>
+      </p:sp>
+      <p:sp>
+        <p:nvSpPr>
+          <p:cNvPr id="29" name="TextBox 28"/>
+          <p:cNvSpPr txBox="1"/>
+          <p:nvPr/>
+        </p:nvSpPr>
+        <p:spPr>
+          <a:xfrm>
+            <a:off x="3566160" y="9418319"/>
+            <a:ext cx="822960" cy="310896"/>
+          </a:xfrm>
+          <a:prstGeom prst="rect">
+            <a:avLst/>
+          </a:prstGeom>
+          <a:noFill/>
+        </p:spPr>
+        <p:txBody>
+          <a:bodyPr wrap="square" lIns="18288" rIns="18288" tIns="27432" bIns="18288" anchor="ctr">
+            <a:noAutofit/>
+          </a:bodyPr>
+          <a:lstStyle/>
+          <a:p>
+            <a:pPr algn="ctr">
+              <a:lnSpc>
+                <a:spcPct val="112000"/>
+              </a:lnSpc>
+              <a:spcBef>
+                <a:spcPts val="0"/>
+              </a:spcBef>
+              <a:spcAft>
+                <a:spcPts val="0"/>
+              </a:spcAft>
+            </a:pPr>
+            <a:r>
+              <a:rPr sz="1200" b="1" i="0">
+                <a:solidFill>
+                  <a:srgbClr val="000000"/>
+                </a:solidFill>
+                <a:latin typeface="Arial"/>
+                <a:ea typeface="Arial"/>
+                <a:cs typeface="Arial"/>
+              </a:rPr>
+              <a:t>B</a:t>
+            </a:r>
+          </a:p>
+        </p:txBody>
+      </p:sp>
       <p:cxnSp>
         <p:nvCxnSpPr>
-          <p:cNvPr id="18" name="Connector 17"/>
+          <p:cNvPr id="30" name="Connector 29"/>
           <p:cNvCxnSpPr/>
           <p:nvPr/>
         </p:nvCxnSpPr>
         <p:spPr>
-          <a:xfrm flipH="1">
-            <a:off x="1051560" y="8997696"/>
-            <a:ext cx="1280160" cy="164592"/>
+          <a:xfrm>
+            <a:off x="2377440" y="9014460"/>
+            <a:ext cx="0" cy="2194"/>
           </a:xfrm>
           <a:prstGeom prst="line">
             <a:avLst/>
@@ -4586,14 +5226,14 @@
       </p:cxnSp>
       <p:cxnSp>
         <p:nvCxnSpPr>
-          <p:cNvPr id="19" name="Connector 18"/>
+          <p:cNvPr id="31" name="Connector 30"/>
           <p:cNvCxnSpPr/>
           <p:nvPr/>
         </p:nvCxnSpPr>
         <p:spPr>
           <a:xfrm>
-            <a:off x="2468880" y="8997696"/>
-            <a:ext cx="1143000" cy="164592"/>
+            <a:off x="1207008" y="9016654"/>
+            <a:ext cx="1170432" cy="0"/>
           </a:xfrm>
           <a:prstGeom prst="line">
             <a:avLst/>
@@ -4621,14 +5261,14 @@
       </p:cxnSp>
       <p:cxnSp>
         <p:nvCxnSpPr>
-          <p:cNvPr id="20" name="Connector 19"/>
+          <p:cNvPr id="32" name="Connector 31"/>
           <p:cNvCxnSpPr/>
           <p:nvPr/>
         </p:nvCxnSpPr>
         <p:spPr>
           <a:xfrm>
-            <a:off x="1051560" y="9436608"/>
-            <a:ext cx="0" cy="164592"/>
+            <a:off x="1207008" y="9016654"/>
+            <a:ext cx="0" cy="2195"/>
           </a:xfrm>
           <a:prstGeom prst="line">
             <a:avLst/>
@@ -4656,14 +5296,14 @@
       </p:cxnSp>
       <p:cxnSp>
         <p:nvCxnSpPr>
-          <p:cNvPr id="21" name="Connector 20"/>
+          <p:cNvPr id="33" name="Connector 32"/>
           <p:cNvCxnSpPr/>
           <p:nvPr/>
         </p:nvCxnSpPr>
         <p:spPr>
           <a:xfrm flipH="1">
-            <a:off x="2880360" y="9436608"/>
-            <a:ext cx="502920" cy="164592"/>
+            <a:off x="2377440" y="9016654"/>
+            <a:ext cx="1188720" cy="0"/>
           </a:xfrm>
           <a:prstGeom prst="line">
             <a:avLst/>
@@ -4691,14 +5331,14 @@
       </p:cxnSp>
       <p:cxnSp>
         <p:nvCxnSpPr>
-          <p:cNvPr id="22" name="Connector 21"/>
+          <p:cNvPr id="34" name="Connector 33"/>
           <p:cNvCxnSpPr/>
           <p:nvPr/>
         </p:nvCxnSpPr>
         <p:spPr>
           <a:xfrm>
-            <a:off x="3840480" y="9436608"/>
-            <a:ext cx="0" cy="164592"/>
+            <a:off x="3566160" y="9016654"/>
+            <a:ext cx="0" cy="2195"/>
           </a:xfrm>
           <a:prstGeom prst="line">
             <a:avLst/>
@@ -4726,14 +5366,224 @@
       </p:cxnSp>
       <p:cxnSp>
         <p:nvCxnSpPr>
-          <p:cNvPr id="23" name="Connector 22"/>
+          <p:cNvPr id="35" name="Connector 34"/>
           <p:cNvCxnSpPr/>
           <p:nvPr/>
         </p:nvCxnSpPr>
         <p:spPr>
           <a:xfrm>
-            <a:off x="1737360" y="9308592"/>
-            <a:ext cx="411480" cy="0"/>
+            <a:off x="1207008" y="9366321"/>
+            <a:ext cx="0" cy="33711"/>
+          </a:xfrm>
+          <a:prstGeom prst="line">
+            <a:avLst/>
+          </a:prstGeom>
+          <a:ln w="15875">
+            <a:solidFill>
+              <a:srgbClr val="000000"/>
+            </a:solidFill>
+          </a:ln>
+        </p:spPr>
+        <p:style>
+          <a:lnRef idx="2">
+            <a:schemeClr val="accent1"/>
+          </a:lnRef>
+          <a:fillRef idx="0">
+            <a:schemeClr val="accent1"/>
+          </a:fillRef>
+          <a:effectRef idx="1">
+            <a:schemeClr val="accent1"/>
+          </a:effectRef>
+          <a:fontRef idx="minor">
+            <a:schemeClr val="tx1"/>
+          </a:fontRef>
+        </p:style>
+      </p:cxnSp>
+      <p:cxnSp>
+        <p:nvCxnSpPr>
+          <p:cNvPr id="36" name="Connector 35"/>
+          <p:cNvCxnSpPr/>
+          <p:nvPr/>
+        </p:nvCxnSpPr>
+        <p:spPr>
+          <a:xfrm>
+            <a:off x="3566160" y="9366321"/>
+            <a:ext cx="0" cy="16855"/>
+          </a:xfrm>
+          <a:prstGeom prst="line">
+            <a:avLst/>
+          </a:prstGeom>
+          <a:ln w="15875">
+            <a:solidFill>
+              <a:srgbClr val="000000"/>
+            </a:solidFill>
+          </a:ln>
+        </p:spPr>
+        <p:style>
+          <a:lnRef idx="2">
+            <a:schemeClr val="accent1"/>
+          </a:lnRef>
+          <a:fillRef idx="0">
+            <a:schemeClr val="accent1"/>
+          </a:fillRef>
+          <a:effectRef idx="1">
+            <a:schemeClr val="accent1"/>
+          </a:effectRef>
+          <a:fontRef idx="minor">
+            <a:schemeClr val="tx1"/>
+          </a:fontRef>
+        </p:style>
+      </p:cxnSp>
+      <p:cxnSp>
+        <p:nvCxnSpPr>
+          <p:cNvPr id="37" name="Connector 36"/>
+          <p:cNvCxnSpPr/>
+          <p:nvPr/>
+        </p:nvCxnSpPr>
+        <p:spPr>
+          <a:xfrm>
+            <a:off x="3017520" y="9383176"/>
+            <a:ext cx="548640" cy="0"/>
+          </a:xfrm>
+          <a:prstGeom prst="line">
+            <a:avLst/>
+          </a:prstGeom>
+          <a:ln w="15875">
+            <a:solidFill>
+              <a:srgbClr val="000000"/>
+            </a:solidFill>
+          </a:ln>
+        </p:spPr>
+        <p:style>
+          <a:lnRef idx="2">
+            <a:schemeClr val="accent1"/>
+          </a:lnRef>
+          <a:fillRef idx="0">
+            <a:schemeClr val="accent1"/>
+          </a:fillRef>
+          <a:effectRef idx="1">
+            <a:schemeClr val="accent1"/>
+          </a:effectRef>
+          <a:fontRef idx="minor">
+            <a:schemeClr val="tx1"/>
+          </a:fontRef>
+        </p:style>
+      </p:cxnSp>
+      <p:cxnSp>
+        <p:nvCxnSpPr>
+          <p:cNvPr id="38" name="Connector 37"/>
+          <p:cNvCxnSpPr/>
+          <p:nvPr/>
+        </p:nvCxnSpPr>
+        <p:spPr>
+          <a:xfrm>
+            <a:off x="3017520" y="9383176"/>
+            <a:ext cx="0" cy="16856"/>
+          </a:xfrm>
+          <a:prstGeom prst="line">
+            <a:avLst/>
+          </a:prstGeom>
+          <a:ln w="15875">
+            <a:solidFill>
+              <a:srgbClr val="000000"/>
+            </a:solidFill>
+          </a:ln>
+        </p:spPr>
+        <p:style>
+          <a:lnRef idx="2">
+            <a:schemeClr val="accent1"/>
+          </a:lnRef>
+          <a:fillRef idx="0">
+            <a:schemeClr val="accent1"/>
+          </a:fillRef>
+          <a:effectRef idx="1">
+            <a:schemeClr val="accent1"/>
+          </a:effectRef>
+          <a:fontRef idx="minor">
+            <a:schemeClr val="tx1"/>
+          </a:fontRef>
+        </p:style>
+      </p:cxnSp>
+      <p:cxnSp>
+        <p:nvCxnSpPr>
+          <p:cNvPr id="39" name="Connector 38"/>
+          <p:cNvCxnSpPr/>
+          <p:nvPr/>
+        </p:nvCxnSpPr>
+        <p:spPr>
+          <a:xfrm flipH="1">
+            <a:off x="3566160" y="9383176"/>
+            <a:ext cx="411479" cy="0"/>
+          </a:xfrm>
+          <a:prstGeom prst="line">
+            <a:avLst/>
+          </a:prstGeom>
+          <a:ln w="15875">
+            <a:solidFill>
+              <a:srgbClr val="000000"/>
+            </a:solidFill>
+          </a:ln>
+        </p:spPr>
+        <p:style>
+          <a:lnRef idx="2">
+            <a:schemeClr val="accent1"/>
+          </a:lnRef>
+          <a:fillRef idx="0">
+            <a:schemeClr val="accent1"/>
+          </a:fillRef>
+          <a:effectRef idx="1">
+            <a:schemeClr val="accent1"/>
+          </a:effectRef>
+          <a:fontRef idx="minor">
+            <a:schemeClr val="tx1"/>
+          </a:fontRef>
+        </p:style>
+      </p:cxnSp>
+      <p:cxnSp>
+        <p:nvCxnSpPr>
+          <p:cNvPr id="40" name="Connector 39"/>
+          <p:cNvCxnSpPr/>
+          <p:nvPr/>
+        </p:nvCxnSpPr>
+        <p:spPr>
+          <a:xfrm>
+            <a:off x="3977639" y="9383176"/>
+            <a:ext cx="0" cy="16856"/>
+          </a:xfrm>
+          <a:prstGeom prst="line">
+            <a:avLst/>
+          </a:prstGeom>
+          <a:ln w="15875">
+            <a:solidFill>
+              <a:srgbClr val="000000"/>
+            </a:solidFill>
+          </a:ln>
+        </p:spPr>
+        <p:style>
+          <a:lnRef idx="2">
+            <a:schemeClr val="accent1"/>
+          </a:lnRef>
+          <a:fillRef idx="0">
+            <a:schemeClr val="accent1"/>
+          </a:fillRef>
+          <a:effectRef idx="1">
+            <a:schemeClr val="accent1"/>
+          </a:effectRef>
+          <a:fontRef idx="minor">
+            <a:schemeClr val="tx1"/>
+          </a:fontRef>
+        </p:style>
+      </p:cxnSp>
+      <p:cxnSp>
+        <p:nvCxnSpPr>
+          <p:cNvPr id="41" name="Connector 40"/>
+          <p:cNvCxnSpPr/>
+          <p:nvPr/>
+        </p:nvCxnSpPr>
+        <p:spPr>
+          <a:xfrm>
+            <a:off x="2057400" y="9192585"/>
+            <a:ext cx="210312" cy="0"/>
           </a:xfrm>
           <a:prstGeom prst="line">
             <a:avLst/>
@@ -4761,14 +5611,14 @@
       </p:cxnSp>
       <p:cxnSp>
         <p:nvCxnSpPr>
-          <p:cNvPr id="24" name="Connector 23"/>
+          <p:cNvPr id="42" name="Connector 41"/>
           <p:cNvCxnSpPr/>
           <p:nvPr/>
         </p:nvCxnSpPr>
         <p:spPr>
           <a:xfrm>
-            <a:off x="2148840" y="9308592"/>
-            <a:ext cx="0" cy="402336"/>
+            <a:off x="2267712" y="9192585"/>
+            <a:ext cx="0" cy="381182"/>
           </a:xfrm>
           <a:prstGeom prst="line">
             <a:avLst/>
@@ -4796,14 +5646,14 @@
       </p:cxnSp>
       <p:cxnSp>
         <p:nvCxnSpPr>
-          <p:cNvPr id="25" name="Connector 24"/>
+          <p:cNvPr id="43" name="Connector 42"/>
           <p:cNvCxnSpPr/>
           <p:nvPr/>
         </p:nvCxnSpPr>
         <p:spPr>
           <a:xfrm>
-            <a:off x="2148840" y="9710928"/>
-            <a:ext cx="338328" cy="0"/>
+            <a:off x="2267712" y="9573767"/>
+            <a:ext cx="219456" cy="0"/>
           </a:xfrm>
           <a:prstGeom prst="line">
             <a:avLst/>
@@ -4831,14 +5681,14 @@
       </p:cxnSp>
       <p:sp>
         <p:nvSpPr>
-          <p:cNvPr id="26" name="TextBox 25"/>
+          <p:cNvPr id="44" name="TextBox 43"/>
           <p:cNvSpPr txBox="1"/>
           <p:nvPr/>
         </p:nvSpPr>
         <p:spPr>
           <a:xfrm>
-            <a:off x="1755648" y="9326880"/>
-            <a:ext cx="502920" cy="201168"/>
+            <a:off x="292608" y="9784080"/>
+            <a:ext cx="4224528" cy="493775"/>
           </a:xfrm>
           <a:prstGeom prst="rect">
             <a:avLst/>
@@ -4846,14 +5696,14 @@
           <a:noFill/>
         </p:spPr>
         <p:txBody>
-          <a:bodyPr wrap="square" lIns="0" rIns="0" tIns="18288" bIns="18288" anchor="t">
+          <a:bodyPr wrap="square" lIns="18288" rIns="18288" tIns="27432" bIns="18288" anchor="t">
             <a:noAutofit/>
           </a:bodyPr>
           <a:lstStyle/>
           <a:p>
             <a:pPr algn="l">
               <a:lnSpc>
-                <a:spcPct val="95000"/>
+                <a:spcPct val="112000"/>
               </a:lnSpc>
               <a:spcBef>
                 <a:spcPts val="0"/>
@@ -4863,75 +5713,29 @@
               </a:spcAft>
             </a:pPr>
             <a:r>
-              <a:rPr sz="1100" b="1" i="0">
-                <a:solidFill>
-                  <a:srgbClr val="C0504D"/>
+              <a:rPr sz="1300" b="0" i="1">
+                <a:solidFill>
+                  <a:srgbClr val="395E89"/>
                 </a:solidFill>
                 <a:latin typeface="Arial"/>
                 <a:ea typeface="Arial"/>
                 <a:cs typeface="Arial"/>
               </a:rPr>
-              <a:t>red</a:t>
-            </a:r>
-          </a:p>
-        </p:txBody>
-      </p:sp>
-      <p:sp>
-        <p:nvSpPr>
-          <p:cNvPr id="27" name="Rectangle 26"/>
-          <p:cNvSpPr/>
+              <a:t>Fig. 2. Black edges split classes. The red edge is a message.</a:t>
+            </a:r>
+          </a:p>
+        </p:txBody>
+      </p:sp>
+      <p:sp>
+        <p:nvSpPr>
+          <p:cNvPr id="45" name="TextBox 44"/>
+          <p:cNvSpPr txBox="1"/>
           <p:nvPr/>
         </p:nvSpPr>
         <p:spPr>
           <a:xfrm>
-            <a:off x="1627632" y="8705088"/>
-            <a:ext cx="1554480" cy="292608"/>
-          </a:xfrm>
-          <a:prstGeom prst="rect">
-            <a:avLst/>
-          </a:prstGeom>
-          <a:solidFill>
-            <a:srgbClr val="E7EEF7"/>
-          </a:solidFill>
-          <a:ln w="12700">
-            <a:solidFill>
-              <a:srgbClr val="1F497D"/>
-            </a:solidFill>
-          </a:ln>
-          <a:effectLst/>
-        </p:spPr>
-        <p:style>
-          <a:lnRef idx="1">
-            <a:schemeClr val="accent1"/>
-          </a:lnRef>
-          <a:fillRef idx="3">
-            <a:schemeClr val="accent1"/>
-          </a:fillRef>
-          <a:effectRef idx="2">
-            <a:schemeClr val="accent1"/>
-          </a:effectRef>
-          <a:fontRef idx="minor">
-            <a:schemeClr val="lt1"/>
-          </a:fontRef>
-        </p:style>
-        <p:txBody>
-          <a:bodyPr rtlCol="0" anchor="ctr"/>
-          <a:lstStyle/>
-          <a:p>
-            <a:pPr algn="ctr"/>
-          </a:p>
-        </p:txBody>
-      </p:sp>
-      <p:sp>
-        <p:nvSpPr>
-          <p:cNvPr id="28" name="TextBox 27"/>
-          <p:cNvSpPr txBox="1"/>
-          <p:nvPr/>
-        </p:nvSpPr>
-        <p:spPr>
-          <a:xfrm>
-            <a:off x="1627632" y="8705088"/>
-            <a:ext cx="1554480" cy="292608"/>
+            <a:off x="4937760" y="1499616"/>
+            <a:ext cx="4462272" cy="292608"/>
           </a:xfrm>
           <a:prstGeom prst="rect">
             <a:avLst/>
@@ -4939,14 +5743,14 @@
           <a:noFill/>
         </p:spPr>
         <p:txBody>
-          <a:bodyPr wrap="square" lIns="18288" rIns="18288" tIns="18288" bIns="18288" anchor="ctr">
+          <a:bodyPr wrap="square" lIns="0" rIns="0" tIns="27432" bIns="18288" anchor="t">
             <a:noAutofit/>
           </a:bodyPr>
           <a:lstStyle/>
           <a:p>
-            <a:pPr algn="ctr">
+            <a:pPr algn="l">
               <a:lnSpc>
-                <a:spcPct val="95000"/>
+                <a:spcPct val="112000"/>
               </a:lnSpc>
               <a:spcBef>
                 <a:spcPts val="0"/>
@@ -4956,566 +5760,7 @@
               </a:spcAft>
             </a:pPr>
             <a:r>
-              <a:rPr sz="1200" b="1" i="0">
-                <a:solidFill>
-                  <a:srgbClr val="000000"/>
-                </a:solidFill>
-                <a:latin typeface="Arial"/>
-                <a:ea typeface="Arial"/>
-                <a:cs typeface="Arial"/>
-              </a:rPr>
-              <a:t>r   all agents</a:t>
-            </a:r>
-          </a:p>
-        </p:txBody>
-      </p:sp>
-      <p:sp>
-        <p:nvSpPr>
-          <p:cNvPr id="29" name="Rectangle 28"/>
-          <p:cNvSpPr/>
-          <p:nvPr/>
-        </p:nvSpPr>
-        <p:spPr>
-          <a:xfrm>
-            <a:off x="347472" y="9162288"/>
-            <a:ext cx="1417320" cy="292608"/>
-          </a:xfrm>
-          <a:prstGeom prst="rect">
-            <a:avLst/>
-          </a:prstGeom>
-          <a:solidFill>
-            <a:srgbClr val="E7EEF7"/>
-          </a:solidFill>
-          <a:ln w="12700">
-            <a:solidFill>
-              <a:srgbClr val="1F497D"/>
-            </a:solidFill>
-          </a:ln>
-          <a:effectLst/>
-        </p:spPr>
-        <p:style>
-          <a:lnRef idx="1">
-            <a:schemeClr val="accent1"/>
-          </a:lnRef>
-          <a:fillRef idx="3">
-            <a:schemeClr val="accent1"/>
-          </a:fillRef>
-          <a:effectRef idx="2">
-            <a:schemeClr val="accent1"/>
-          </a:effectRef>
-          <a:fontRef idx="minor">
-            <a:schemeClr val="lt1"/>
-          </a:fontRef>
-        </p:style>
-        <p:txBody>
-          <a:bodyPr rtlCol="0" anchor="ctr"/>
-          <a:lstStyle/>
-          <a:p>
-            <a:pPr algn="ctr"/>
-          </a:p>
-        </p:txBody>
-      </p:sp>
-      <p:sp>
-        <p:nvSpPr>
-          <p:cNvPr id="30" name="TextBox 29"/>
-          <p:cNvSpPr txBox="1"/>
-          <p:nvPr/>
-        </p:nvSpPr>
-        <p:spPr>
-          <a:xfrm>
-            <a:off x="347472" y="9162288"/>
-            <a:ext cx="1417320" cy="292608"/>
-          </a:xfrm>
-          <a:prstGeom prst="rect">
-            <a:avLst/>
-          </a:prstGeom>
-          <a:noFill/>
-        </p:spPr>
-        <p:txBody>
-          <a:bodyPr wrap="square" lIns="18288" rIns="18288" tIns="18288" bIns="18288" anchor="ctr">
-            <a:noAutofit/>
-          </a:bodyPr>
-          <a:lstStyle/>
-          <a:p>
-            <a:pPr algn="ctr">
-              <a:lnSpc>
-                <a:spcPct val="95000"/>
-              </a:lnSpc>
-              <a:spcBef>
-                <a:spcPts val="0"/>
-              </a:spcBef>
-              <a:spcAft>
-                <a:spcPts val="0"/>
-              </a:spcAft>
-            </a:pPr>
-            <a:r>
-              <a:rPr sz="1200" b="1" i="0">
-                <a:solidFill>
-                  <a:srgbClr val="000000"/>
-                </a:solidFill>
-                <a:latin typeface="Arial"/>
-                <a:ea typeface="Arial"/>
-                <a:cs typeface="Arial"/>
-              </a:rPr>
-              <a:t>leader   a = 1</a:t>
-            </a:r>
-          </a:p>
-        </p:txBody>
-      </p:sp>
-      <p:sp>
-        <p:nvSpPr>
-          <p:cNvPr id="31" name="Rectangle 30"/>
-          <p:cNvSpPr/>
-          <p:nvPr/>
-        </p:nvSpPr>
-        <p:spPr>
-          <a:xfrm>
-            <a:off x="2834640" y="9162288"/>
-            <a:ext cx="1554480" cy="292608"/>
-          </a:xfrm>
-          <a:prstGeom prst="rect">
-            <a:avLst/>
-          </a:prstGeom>
-          <a:solidFill>
-            <a:srgbClr val="E7EEF7"/>
-          </a:solidFill>
-          <a:ln w="12700">
-            <a:solidFill>
-              <a:srgbClr val="1F497D"/>
-            </a:solidFill>
-          </a:ln>
-          <a:effectLst/>
-        </p:spPr>
-        <p:style>
-          <a:lnRef idx="1">
-            <a:schemeClr val="accent1"/>
-          </a:lnRef>
-          <a:fillRef idx="3">
-            <a:schemeClr val="accent1"/>
-          </a:fillRef>
-          <a:effectRef idx="2">
-            <a:schemeClr val="accent1"/>
-          </a:effectRef>
-          <a:fontRef idx="minor">
-            <a:schemeClr val="lt1"/>
-          </a:fontRef>
-        </p:style>
-        <p:txBody>
-          <a:bodyPr rtlCol="0" anchor="ctr"/>
-          <a:lstStyle/>
-          <a:p>
-            <a:pPr algn="ctr"/>
-          </a:p>
-        </p:txBody>
-      </p:sp>
-      <p:sp>
-        <p:nvSpPr>
-          <p:cNvPr id="32" name="TextBox 31"/>
-          <p:cNvSpPr txBox="1"/>
-          <p:nvPr/>
-        </p:nvSpPr>
-        <p:spPr>
-          <a:xfrm>
-            <a:off x="2834640" y="9162288"/>
-            <a:ext cx="1554480" cy="292608"/>
-          </a:xfrm>
-          <a:prstGeom prst="rect">
-            <a:avLst/>
-          </a:prstGeom>
-          <a:noFill/>
-        </p:spPr>
-        <p:txBody>
-          <a:bodyPr wrap="square" lIns="18288" rIns="18288" tIns="18288" bIns="18288" anchor="ctr">
-            <a:noAutofit/>
-          </a:bodyPr>
-          <a:lstStyle/>
-          <a:p>
-            <a:pPr algn="ctr">
-              <a:lnSpc>
-                <a:spcPct val="95000"/>
-              </a:lnSpc>
-              <a:spcBef>
-                <a:spcPts val="0"/>
-              </a:spcBef>
-              <a:spcAft>
-                <a:spcPts val="0"/>
-              </a:spcAft>
-            </a:pPr>
-            <a:r>
-              <a:rPr sz="1200" b="1" i="0">
-                <a:solidFill>
-                  <a:srgbClr val="000000"/>
-                </a:solidFill>
-                <a:latin typeface="Arial"/>
-                <a:ea typeface="Arial"/>
-                <a:cs typeface="Arial"/>
-              </a:rPr>
-              <a:t>others  a = n−1</a:t>
-            </a:r>
-          </a:p>
-        </p:txBody>
-      </p:sp>
-      <p:sp>
-        <p:nvSpPr>
-          <p:cNvPr id="33" name="Rectangle 32"/>
-          <p:cNvSpPr/>
-          <p:nvPr/>
-        </p:nvSpPr>
-        <p:spPr>
-          <a:xfrm>
-            <a:off x="457200" y="9601200"/>
-            <a:ext cx="1188720" cy="274320"/>
-          </a:xfrm>
-          <a:prstGeom prst="rect">
-            <a:avLst/>
-          </a:prstGeom>
-          <a:solidFill>
-            <a:srgbClr val="C6EFCE"/>
-          </a:solidFill>
-          <a:ln w="12700">
-            <a:solidFill>
-              <a:srgbClr val="1F497D"/>
-            </a:solidFill>
-          </a:ln>
-          <a:effectLst/>
-        </p:spPr>
-        <p:style>
-          <a:lnRef idx="1">
-            <a:schemeClr val="accent1"/>
-          </a:lnRef>
-          <a:fillRef idx="3">
-            <a:schemeClr val="accent1"/>
-          </a:fillRef>
-          <a:effectRef idx="2">
-            <a:schemeClr val="accent1"/>
-          </a:effectRef>
-          <a:fontRef idx="minor">
-            <a:schemeClr val="lt1"/>
-          </a:fontRef>
-        </p:style>
-        <p:txBody>
-          <a:bodyPr rtlCol="0" anchor="ctr"/>
-          <a:lstStyle/>
-          <a:p>
-            <a:pPr algn="ctr"/>
-          </a:p>
-        </p:txBody>
-      </p:sp>
-      <p:sp>
-        <p:nvSpPr>
-          <p:cNvPr id="34" name="TextBox 33"/>
-          <p:cNvSpPr txBox="1"/>
-          <p:nvPr/>
-        </p:nvSpPr>
-        <p:spPr>
-          <a:xfrm>
-            <a:off x="457200" y="9601200"/>
-            <a:ext cx="1188720" cy="274320"/>
-          </a:xfrm>
-          <a:prstGeom prst="rect">
-            <a:avLst/>
-          </a:prstGeom>
-          <a:noFill/>
-        </p:spPr>
-        <p:txBody>
-          <a:bodyPr wrap="square" lIns="18288" rIns="18288" tIns="18288" bIns="18288" anchor="ctr">
-            <a:noAutofit/>
-          </a:bodyPr>
-          <a:lstStyle/>
-          <a:p>
-            <a:pPr algn="ctr">
-              <a:lnSpc>
-                <a:spcPct val="95000"/>
-              </a:lnSpc>
-              <a:spcBef>
-                <a:spcPts val="0"/>
-              </a:spcBef>
-              <a:spcAft>
-                <a:spcPts val="0"/>
-              </a:spcAft>
-            </a:pPr>
-            <a:r>
-              <a:rPr sz="1200" b="1" i="0">
-                <a:solidFill>
-                  <a:srgbClr val="000000"/>
-                </a:solidFill>
-                <a:latin typeface="Arial"/>
-                <a:ea typeface="Arial"/>
-                <a:cs typeface="Arial"/>
-              </a:rPr>
-              <a:t>leader</a:t>
-            </a:r>
-          </a:p>
-        </p:txBody>
-      </p:sp>
-      <p:sp>
-        <p:nvSpPr>
-          <p:cNvPr id="35" name="Rectangle 34"/>
-          <p:cNvSpPr/>
-          <p:nvPr/>
-        </p:nvSpPr>
-        <p:spPr>
-          <a:xfrm>
-            <a:off x="2487168" y="9601200"/>
-            <a:ext cx="777240" cy="274320"/>
-          </a:xfrm>
-          <a:prstGeom prst="rect">
-            <a:avLst/>
-          </a:prstGeom>
-          <a:solidFill>
-            <a:srgbClr val="FFF2CC"/>
-          </a:solidFill>
-          <a:ln w="12700">
-            <a:solidFill>
-              <a:srgbClr val="1F497D"/>
-            </a:solidFill>
-          </a:ln>
-          <a:effectLst/>
-        </p:spPr>
-        <p:style>
-          <a:lnRef idx="1">
-            <a:schemeClr val="accent1"/>
-          </a:lnRef>
-          <a:fillRef idx="3">
-            <a:schemeClr val="accent1"/>
-          </a:fillRef>
-          <a:effectRef idx="2">
-            <a:schemeClr val="accent1"/>
-          </a:effectRef>
-          <a:fontRef idx="minor">
-            <a:schemeClr val="lt1"/>
-          </a:fontRef>
-        </p:style>
-        <p:txBody>
-          <a:bodyPr rtlCol="0" anchor="ctr"/>
-          <a:lstStyle/>
-          <a:p>
-            <a:pPr algn="ctr"/>
-          </a:p>
-        </p:txBody>
-      </p:sp>
-      <p:sp>
-        <p:nvSpPr>
-          <p:cNvPr id="36" name="TextBox 35"/>
-          <p:cNvSpPr txBox="1"/>
-          <p:nvPr/>
-        </p:nvSpPr>
-        <p:spPr>
-          <a:xfrm>
-            <a:off x="2487168" y="9601200"/>
-            <a:ext cx="777240" cy="274320"/>
-          </a:xfrm>
-          <a:prstGeom prst="rect">
-            <a:avLst/>
-          </a:prstGeom>
-          <a:noFill/>
-        </p:spPr>
-        <p:txBody>
-          <a:bodyPr wrap="square" lIns="18288" rIns="18288" tIns="18288" bIns="18288" anchor="ctr">
-            <a:noAutofit/>
-          </a:bodyPr>
-          <a:lstStyle/>
-          <a:p>
-            <a:pPr algn="ctr">
-              <a:lnSpc>
-                <a:spcPct val="95000"/>
-              </a:lnSpc>
-              <a:spcBef>
-                <a:spcPts val="0"/>
-              </a:spcBef>
-              <a:spcAft>
-                <a:spcPts val="0"/>
-              </a:spcAft>
-            </a:pPr>
-            <a:r>
-              <a:rPr sz="1200" b="1" i="0">
-                <a:solidFill>
-                  <a:srgbClr val="000000"/>
-                </a:solidFill>
-                <a:latin typeface="Arial"/>
-                <a:ea typeface="Arial"/>
-                <a:cs typeface="Arial"/>
-              </a:rPr>
-              <a:t>A</a:t>
-            </a:r>
-          </a:p>
-        </p:txBody>
-      </p:sp>
-      <p:sp>
-        <p:nvSpPr>
-          <p:cNvPr id="37" name="Rectangle 36"/>
-          <p:cNvSpPr/>
-          <p:nvPr/>
-        </p:nvSpPr>
-        <p:spPr>
-          <a:xfrm>
-            <a:off x="3456432" y="9601200"/>
-            <a:ext cx="777240" cy="274320"/>
-          </a:xfrm>
-          <a:prstGeom prst="rect">
-            <a:avLst/>
-          </a:prstGeom>
-          <a:solidFill>
-            <a:srgbClr val="FFF2CC"/>
-          </a:solidFill>
-          <a:ln w="12700">
-            <a:solidFill>
-              <a:srgbClr val="1F497D"/>
-            </a:solidFill>
-          </a:ln>
-          <a:effectLst/>
-        </p:spPr>
-        <p:style>
-          <a:lnRef idx="1">
-            <a:schemeClr val="accent1"/>
-          </a:lnRef>
-          <a:fillRef idx="3">
-            <a:schemeClr val="accent1"/>
-          </a:fillRef>
-          <a:effectRef idx="2">
-            <a:schemeClr val="accent1"/>
-          </a:effectRef>
-          <a:fontRef idx="minor">
-            <a:schemeClr val="lt1"/>
-          </a:fontRef>
-        </p:style>
-        <p:txBody>
-          <a:bodyPr rtlCol="0" anchor="ctr"/>
-          <a:lstStyle/>
-          <a:p>
-            <a:pPr algn="ctr"/>
-          </a:p>
-        </p:txBody>
-      </p:sp>
-      <p:sp>
-        <p:nvSpPr>
-          <p:cNvPr id="38" name="TextBox 37"/>
-          <p:cNvSpPr txBox="1"/>
-          <p:nvPr/>
-        </p:nvSpPr>
-        <p:spPr>
-          <a:xfrm>
-            <a:off x="3456432" y="9601200"/>
-            <a:ext cx="777240" cy="274320"/>
-          </a:xfrm>
-          <a:prstGeom prst="rect">
-            <a:avLst/>
-          </a:prstGeom>
-          <a:noFill/>
-        </p:spPr>
-        <p:txBody>
-          <a:bodyPr wrap="square" lIns="18288" rIns="18288" tIns="18288" bIns="18288" anchor="ctr">
-            <a:noAutofit/>
-          </a:bodyPr>
-          <a:lstStyle/>
-          <a:p>
-            <a:pPr algn="ctr">
-              <a:lnSpc>
-                <a:spcPct val="95000"/>
-              </a:lnSpc>
-              <a:spcBef>
-                <a:spcPts val="0"/>
-              </a:spcBef>
-              <a:spcAft>
-                <a:spcPts val="0"/>
-              </a:spcAft>
-            </a:pPr>
-            <a:r>
-              <a:rPr sz="1200" b="1" i="0">
-                <a:solidFill>
-                  <a:srgbClr val="000000"/>
-                </a:solidFill>
-                <a:latin typeface="Arial"/>
-                <a:ea typeface="Arial"/>
-                <a:cs typeface="Arial"/>
-              </a:rPr>
-              <a:t>B</a:t>
-            </a:r>
-          </a:p>
-        </p:txBody>
-      </p:sp>
-      <p:sp>
-        <p:nvSpPr>
-          <p:cNvPr id="39" name="TextBox 38"/>
-          <p:cNvSpPr txBox="1"/>
-          <p:nvPr/>
-        </p:nvSpPr>
-        <p:spPr>
-          <a:xfrm>
-            <a:off x="274320" y="9930384"/>
-            <a:ext cx="4279392" cy="475488"/>
-          </a:xfrm>
-          <a:prstGeom prst="rect">
-            <a:avLst/>
-          </a:prstGeom>
-          <a:noFill/>
-        </p:spPr>
-        <p:txBody>
-          <a:bodyPr wrap="square" lIns="18288" rIns="18288" tIns="18288" bIns="18288" anchor="t">
-            <a:noAutofit/>
-          </a:bodyPr>
-          <a:lstStyle/>
-          <a:p>
-            <a:pPr algn="l">
-              <a:lnSpc>
-                <a:spcPct val="95000"/>
-              </a:lnSpc>
-              <a:spcBef>
-                <a:spcPts val="0"/>
-              </a:spcBef>
-              <a:spcAft>
-                <a:spcPts val="0"/>
-              </a:spcAft>
-            </a:pPr>
-            <a:r>
-              <a:rPr sz="1400" b="0" i="1">
-                <a:solidFill>
-                  <a:srgbClr val="395E89"/>
-                </a:solidFill>
-                <a:latin typeface="Arial"/>
-                <a:ea typeface="Arial"/>
-                <a:cs typeface="Arial"/>
-              </a:rPr>
-              <a:t>Fig. 2. Black edges split classes over rounds. The red edge is a message.</a:t>
-            </a:r>
-          </a:p>
-        </p:txBody>
-      </p:sp>
-      <p:sp>
-        <p:nvSpPr>
-          <p:cNvPr id="40" name="TextBox 39"/>
-          <p:cNvSpPr txBox="1"/>
-          <p:nvPr/>
-        </p:nvSpPr>
-        <p:spPr>
-          <a:xfrm>
-            <a:off x="4937760" y="1335024"/>
-            <a:ext cx="4480560" cy="292608"/>
-          </a:xfrm>
-          <a:prstGeom prst="rect">
-            <a:avLst/>
-          </a:prstGeom>
-          <a:noFill/>
-        </p:spPr>
-        <p:txBody>
-          <a:bodyPr wrap="square" lIns="18288" rIns="18288" tIns="18288" bIns="18288" anchor="t">
-            <a:noAutofit/>
-          </a:bodyPr>
-          <a:lstStyle/>
-          <a:p>
-            <a:pPr algn="l">
-              <a:lnSpc>
-                <a:spcPct val="95000"/>
-              </a:lnSpc>
-              <a:spcBef>
-                <a:spcPts val="0"/>
-              </a:spcBef>
-              <a:spcAft>
-                <a:spcPts val="0"/>
-              </a:spcAft>
-            </a:pPr>
-            <a:r>
-              <a:rPr sz="2000" b="1" i="0">
+              <a:rPr sz="1800" b="1" i="0">
                 <a:solidFill>
                   <a:srgbClr val="000000"/>
                 </a:solidFill>
@@ -5530,19 +5775,19 @@
       </p:sp>
       <p:cxnSp>
         <p:nvCxnSpPr>
-          <p:cNvPr id="41" name="Connector 40"/>
+          <p:cNvPr id="46" name="Connector 45"/>
           <p:cNvCxnSpPr/>
           <p:nvPr/>
         </p:nvCxnSpPr>
         <p:spPr>
           <a:xfrm>
-            <a:off x="4937760" y="1627632"/>
-            <a:ext cx="4480560" cy="0"/>
+            <a:off x="4937760" y="1792224"/>
+            <a:ext cx="4462272" cy="0"/>
           </a:xfrm>
           <a:prstGeom prst="line">
             <a:avLst/>
           </a:prstGeom>
-          <a:ln w="15875">
+          <a:ln w="14604">
             <a:solidFill>
               <a:srgbClr val="000000"/>
             </a:solidFill>
@@ -5565,14 +5810,14 @@
       </p:cxnSp>
       <p:sp>
         <p:nvSpPr>
-          <p:cNvPr id="42" name="TextBox 41"/>
+          <p:cNvPr id="47" name="TextBox 46"/>
           <p:cNvSpPr txBox="1"/>
           <p:nvPr/>
         </p:nvSpPr>
         <p:spPr>
           <a:xfrm>
-            <a:off x="4937760" y="1645920"/>
-            <a:ext cx="4498848" cy="1627632"/>
+            <a:off x="4937760" y="1837943"/>
+            <a:ext cx="4462272" cy="2094992"/>
           </a:xfrm>
           <a:prstGeom prst="rect">
             <a:avLst/>
@@ -5580,24 +5825,24 @@
           <a:noFill/>
         </p:spPr>
         <p:txBody>
-          <a:bodyPr wrap="square" lIns="36576" rIns="36576" tIns="18288" bIns="18288" anchor="t">
+          <a:bodyPr wrap="square" lIns="45720" rIns="45720" tIns="27432" bIns="18288" anchor="t">
             <a:noAutofit/>
           </a:bodyPr>
           <a:lstStyle/>
           <a:p>
             <a:pPr algn="l">
               <a:lnSpc>
-                <a:spcPct val="95000"/>
+                <a:spcPct val="112000"/>
               </a:lnSpc>
               <a:spcBef>
                 <a:spcPts val="0"/>
               </a:spcBef>
               <a:spcAft>
-                <a:spcPts val="300"/>
+                <a:spcPts val="200"/>
               </a:spcAft>
             </a:pPr>
             <a:r>
-              <a:rPr sz="1600" b="0" i="0">
+              <a:rPr sz="1500" b="0" i="0">
                 <a:solidFill>
                   <a:srgbClr val="222222"/>
                 </a:solidFill>
@@ -5605,13 +5850,13 @@
                 <a:ea typeface="Arial"/>
                 <a:cs typeface="Arial"/>
               </a:rPr>
-              <a:t>Tutorial network, 6 agents. Same PC and browser. “Optimized” is this version; “previous” is the older build.</a:t>
+              <a:t>Tutorial network, 6 agents, same machine.</a:t>
             </a:r>
           </a:p>
           <a:p>
             <a:pPr algn="l">
               <a:lnSpc>
-                <a:spcPct val="95000"/>
+                <a:spcPct val="112000"/>
               </a:lnSpc>
               <a:spcBef>
                 <a:spcPts val="0"/>
@@ -5621,7 +5866,7 @@
               </a:spcAft>
             </a:pPr>
             <a:r>
-              <a:rPr sz="1600" b="0" i="0">
+              <a:rPr sz="1500" b="0" i="0">
                 <a:solidFill>
                   <a:srgbClr val="222222"/>
                 </a:solidFill>
@@ -5629,13 +5874,13 @@
                 <a:ea typeface="Arial"/>
                 <a:cs typeface="Arial"/>
               </a:rPr>
-              <a:t>•  Append rounds 1→250: 1.30 s vs 16.2 s (about 12×). After 200 rounds: 6.5 ms/click vs 156 ms/click.</a:t>
+              <a:t>•  Append 1→250: 1.30 s vs 16.2 s (~12×).</a:t>
             </a:r>
           </a:p>
           <a:p>
             <a:pPr algn="l">
               <a:lnSpc>
-                <a:spcPct val="95000"/>
+                <a:spcPct val="112000"/>
               </a:lnSpc>
               <a:spcBef>
                 <a:spcPts val="0"/>
@@ -5645,7 +5890,7 @@
               </a:spcAft>
             </a:pPr>
             <a:r>
-              <a:rPr sz="1600" b="0" i="0">
+              <a:rPr sz="1500" b="0" i="0">
                 <a:solidFill>
                   <a:srgbClr val="222222"/>
                 </a:solidFill>
@@ -5653,13 +5898,37 @@
                 <a:ea typeface="Arial"/>
                 <a:cs typeface="Arial"/>
               </a:rPr>
-              <a:t>•  Insert near round 1, up to 250 rounds: 2.53 s vs 16.9 s.</a:t>
+              <a:t>•  After 200 rounds: 6.5 ms vs 156 ms.</a:t>
             </a:r>
           </a:p>
           <a:p>
             <a:pPr algn="l">
               <a:lnSpc>
-                <a:spcPct val="95000"/>
+                <a:spcPct val="112000"/>
+              </a:lnSpc>
+              <a:spcBef>
+                <a:spcPts val="0"/>
+              </a:spcBef>
+              <a:spcAft>
+                <a:spcPts val="0"/>
+              </a:spcAft>
+            </a:pPr>
+            <a:r>
+              <a:rPr sz="1500" b="0" i="0">
+                <a:solidFill>
+                  <a:srgbClr val="222222"/>
+                </a:solidFill>
+                <a:latin typeface="Arial"/>
+                <a:ea typeface="Arial"/>
+                <a:cs typeface="Arial"/>
+              </a:rPr>
+              <a:t>•  Insert near the start, to 250 rounds:</a:t>
+            </a:r>
+          </a:p>
+          <a:p>
+            <a:pPr algn="l">
+              <a:lnSpc>
+                <a:spcPct val="112000"/>
               </a:lnSpc>
               <a:spcBef>
                 <a:spcPts val="0"/>
@@ -5669,7 +5938,7 @@
               </a:spcAft>
             </a:pPr>
             <a:r>
-              <a:rPr sz="1600" b="0" i="0">
+              <a:rPr sz="1500" b="0" i="0">
                 <a:solidFill>
                   <a:srgbClr val="222222"/>
                 </a:solidFill>
@@ -5677,23 +5946,23 @@
                 <a:ea typeface="Arial"/>
                 <a:cs typeface="Arial"/>
               </a:rPr>
-              <a:t>•  Append is still under 1 s/click at 5,000 rounds (~224 ms). Insert from round 1 passes 1 s/click near 3,250 rounds.</a:t>
+              <a:t>   2.53 s vs 16.9 s.</a:t>
             </a:r>
           </a:p>
           <a:p>
             <a:pPr algn="l">
               <a:lnSpc>
-                <a:spcPct val="95000"/>
+                <a:spcPct val="112000"/>
               </a:lnSpc>
               <a:spcBef>
                 <a:spcPts val="0"/>
               </a:spcBef>
               <a:spcAft>
-                <a:spcPts val="0"/>
+                <a:spcPts val="100"/>
               </a:spcAft>
             </a:pPr>
             <a:r>
-              <a:rPr sz="1600" b="0" i="0">
+              <a:rPr sz="1500" b="0" i="0">
                 <a:solidFill>
                   <a:srgbClr val="222222"/>
                 </a:solidFill>
@@ -5701,22 +5970,94 @@
                 <a:ea typeface="Arial"/>
                 <a:cs typeface="Arial"/>
               </a:rPr>
-              <a:t>•  A deep insert no longer crashes (it used to, near 2,000 rounds). A suffix of 1,199 rounds still takes ~12.5 s.</a:t>
+              <a:t>•  Append at 5,000 rounds: still ~224 ms.</a:t>
+            </a:r>
+          </a:p>
+          <a:p>
+            <a:pPr algn="l">
+              <a:lnSpc>
+                <a:spcPct val="112000"/>
+              </a:lnSpc>
+              <a:spcBef>
+                <a:spcPts val="0"/>
+              </a:spcBef>
+              <a:spcAft>
+                <a:spcPts val="100"/>
+              </a:spcAft>
+            </a:pPr>
+            <a:r>
+              <a:rPr sz="1500" b="0" i="0">
+                <a:solidFill>
+                  <a:srgbClr val="222222"/>
+                </a:solidFill>
+                <a:latin typeface="Arial"/>
+                <a:ea typeface="Arial"/>
+                <a:cs typeface="Arial"/>
+              </a:rPr>
+              <a:t>•  Insert hits 1 s/click near 3,250 rounds.</a:t>
+            </a:r>
+          </a:p>
+          <a:p>
+            <a:pPr algn="l">
+              <a:lnSpc>
+                <a:spcPct val="112000"/>
+              </a:lnSpc>
+              <a:spcBef>
+                <a:spcPts val="0"/>
+              </a:spcBef>
+              <a:spcAft>
+                <a:spcPts val="100"/>
+              </a:spcAft>
+            </a:pPr>
+            <a:r>
+              <a:rPr sz="1500" b="0" i="0">
+                <a:solidFill>
+                  <a:srgbClr val="222222"/>
+                </a:solidFill>
+                <a:latin typeface="Arial"/>
+                <a:ea typeface="Arial"/>
+                <a:cs typeface="Arial"/>
+              </a:rPr>
+              <a:t>•  Deep insert no longer crashes.</a:t>
+            </a:r>
+          </a:p>
+          <a:p>
+            <a:pPr algn="l">
+              <a:lnSpc>
+                <a:spcPct val="112000"/>
+              </a:lnSpc>
+              <a:spcBef>
+                <a:spcPts val="0"/>
+              </a:spcBef>
+              <a:spcAft>
+                <a:spcPts val="0"/>
+              </a:spcAft>
+            </a:pPr>
+            <a:r>
+              <a:rPr sz="1500" b="0" i="0">
+                <a:solidFill>
+                  <a:srgbClr val="222222"/>
+                </a:solidFill>
+                <a:latin typeface="Arial"/>
+                <a:ea typeface="Arial"/>
+                <a:cs typeface="Arial"/>
+              </a:rPr>
+              <a:t>•  A 1,199-round suffix still takes ~12.5 s.</a:t>
             </a:r>
           </a:p>
         </p:txBody>
       </p:sp>
       <p:graphicFrame>
         <p:nvGraphicFramePr>
-          <p:cNvPr id="43" name="Chart 42"/>
+          <p:cNvPr id="48" name="Chart 47"/>
           <p:cNvGraphicFramePr>
             <a:graphicFrameLocks noGrp="1"/>
           </p:cNvGraphicFramePr>
           <p:nvPr/>
         </p:nvGraphicFramePr>
         <p:xfrm>
-          <a:off x="4937760" y="3310128"/>
-          <a:ext cx="4498848" cy="1874519"/>
+          <a:off x="4937760" y="3969512"/>
+          <a:ext cx="4462272" cy="1261872"/>
         </p:xfrm>
         <a:graphic>
           <a:graphicData uri="http://schemas.openxmlformats.org/drawingml/2006/chart">
@@ -5726,102 +6067,14 @@
       </p:graphicFrame>
       <p:sp>
         <p:nvSpPr>
-          <p:cNvPr id="44" name="Rectangle 43"/>
-          <p:cNvSpPr/>
+          <p:cNvPr id="49" name="TextBox 48"/>
+          <p:cNvSpPr txBox="1"/>
           <p:nvPr/>
         </p:nvSpPr>
         <p:spPr>
           <a:xfrm>
-            <a:off x="5010912" y="5193792"/>
-            <a:ext cx="164592" cy="109728"/>
-          </a:xfrm>
-          <a:prstGeom prst="rect">
-            <a:avLst/>
-          </a:prstGeom>
-          <a:solidFill>
-            <a:srgbClr val="4F81BD"/>
-          </a:solidFill>
-          <a:ln>
-            <a:noFill/>
-          </a:ln>
-          <a:effectLst/>
-        </p:spPr>
-        <p:style>
-          <a:lnRef idx="1">
-            <a:schemeClr val="accent1"/>
-          </a:lnRef>
-          <a:fillRef idx="3">
-            <a:schemeClr val="accent1"/>
-          </a:fillRef>
-          <a:effectRef idx="2">
-            <a:schemeClr val="accent1"/>
-          </a:effectRef>
-          <a:fontRef idx="minor">
-            <a:schemeClr val="lt1"/>
-          </a:fontRef>
-        </p:style>
-        <p:txBody>
-          <a:bodyPr rtlCol="0" anchor="ctr"/>
-          <a:lstStyle/>
-          <a:p>
-            <a:pPr algn="ctr"/>
-          </a:p>
-        </p:txBody>
-      </p:sp>
-      <p:sp>
-        <p:nvSpPr>
-          <p:cNvPr id="45" name="Rectangle 44"/>
-          <p:cNvSpPr/>
-          <p:nvPr/>
-        </p:nvSpPr>
-        <p:spPr>
-          <a:xfrm>
-            <a:off x="6537960" y="5193792"/>
-            <a:ext cx="164592" cy="109728"/>
-          </a:xfrm>
-          <a:prstGeom prst="rect">
-            <a:avLst/>
-          </a:prstGeom>
-          <a:solidFill>
-            <a:srgbClr val="C0504D"/>
-          </a:solidFill>
-          <a:ln>
-            <a:noFill/>
-          </a:ln>
-          <a:effectLst/>
-        </p:spPr>
-        <p:style>
-          <a:lnRef idx="1">
-            <a:schemeClr val="accent1"/>
-          </a:lnRef>
-          <a:fillRef idx="3">
-            <a:schemeClr val="accent1"/>
-          </a:fillRef>
-          <a:effectRef idx="2">
-            <a:schemeClr val="accent1"/>
-          </a:effectRef>
-          <a:fontRef idx="minor">
-            <a:schemeClr val="lt1"/>
-          </a:fontRef>
-        </p:style>
-        <p:txBody>
-          <a:bodyPr rtlCol="0" anchor="ctr"/>
-          <a:lstStyle/>
-          <a:p>
-            <a:pPr algn="ctr"/>
-          </a:p>
-        </p:txBody>
-      </p:sp>
-      <p:sp>
-        <p:nvSpPr>
-          <p:cNvPr id="46" name="TextBox 45"/>
-          <p:cNvSpPr txBox="1"/>
-          <p:nvPr/>
-        </p:nvSpPr>
-        <p:spPr>
-          <a:xfrm>
-            <a:off x="5193792" y="5138928"/>
-            <a:ext cx="1280160" cy="201168"/>
+            <a:off x="4937760" y="5258816"/>
+            <a:ext cx="4462272" cy="442976"/>
           </a:xfrm>
           <a:prstGeom prst="rect">
             <a:avLst/>
@@ -5829,14 +6082,14 @@
           <a:noFill/>
         </p:spPr>
         <p:txBody>
-          <a:bodyPr wrap="square" lIns="0" rIns="0" tIns="18288" bIns="18288" anchor="t">
+          <a:bodyPr wrap="square" lIns="45720" rIns="45720" tIns="27432" bIns="18288" anchor="t">
             <a:noAutofit/>
           </a:bodyPr>
           <a:lstStyle/>
           <a:p>
             <a:pPr algn="l">
               <a:lnSpc>
-                <a:spcPct val="95000"/>
+                <a:spcPct val="112000"/>
               </a:lnSpc>
               <a:spcBef>
                 <a:spcPts val="0"/>
@@ -5846,124 +6099,30 @@
               </a:spcAft>
             </a:pPr>
             <a:r>
-              <a:rPr sz="1200" b="1" i="0">
-                <a:solidFill>
-                  <a:srgbClr val="1F497D"/>
+              <a:rPr sz="1300" b="0" i="1">
+                <a:solidFill>
+                  <a:srgbClr val="395E89"/>
                 </a:solidFill>
                 <a:latin typeface="Arial"/>
                 <a:ea typeface="Arial"/>
                 <a:cs typeface="Arial"/>
               </a:rPr>
-              <a:t>Optimized</a:t>
-            </a:r>
-          </a:p>
-        </p:txBody>
-      </p:sp>
-      <p:sp>
-        <p:nvSpPr>
-          <p:cNvPr id="47" name="TextBox 46"/>
-          <p:cNvSpPr txBox="1"/>
-          <p:nvPr/>
-        </p:nvSpPr>
-        <p:spPr>
-          <a:xfrm>
-            <a:off x="6720840" y="5138928"/>
-            <a:ext cx="1280160" cy="201168"/>
-          </a:xfrm>
-          <a:prstGeom prst="rect">
-            <a:avLst/>
-          </a:prstGeom>
-          <a:noFill/>
-        </p:spPr>
-        <p:txBody>
-          <a:bodyPr wrap="square" lIns="0" rIns="0" tIns="18288" bIns="18288" anchor="t">
-            <a:noAutofit/>
-          </a:bodyPr>
-          <a:lstStyle/>
-          <a:p>
-            <a:pPr algn="l">
-              <a:lnSpc>
-                <a:spcPct val="95000"/>
-              </a:lnSpc>
-              <a:spcBef>
-                <a:spcPts val="0"/>
-              </a:spcBef>
-              <a:spcAft>
-                <a:spcPts val="0"/>
-              </a:spcAft>
-            </a:pPr>
-            <a:r>
-              <a:rPr sz="1200" b="1" i="0">
-                <a:solidFill>
-                  <a:srgbClr val="C0504D"/>
-                </a:solidFill>
-                <a:latin typeface="Arial"/>
-                <a:ea typeface="Arial"/>
-                <a:cs typeface="Arial"/>
-              </a:rPr>
-              <a:t>Previous</a:t>
-            </a:r>
-          </a:p>
-        </p:txBody>
-      </p:sp>
-      <p:sp>
-        <p:nvSpPr>
-          <p:cNvPr id="48" name="TextBox 47"/>
-          <p:cNvSpPr txBox="1"/>
-          <p:nvPr/>
-        </p:nvSpPr>
-        <p:spPr>
-          <a:xfrm>
-            <a:off x="4937760" y="5340096"/>
-            <a:ext cx="4498848" cy="420624"/>
-          </a:xfrm>
-          <a:prstGeom prst="rect">
-            <a:avLst/>
-          </a:prstGeom>
-          <a:noFill/>
-        </p:spPr>
-        <p:txBody>
-          <a:bodyPr wrap="square" lIns="18288" rIns="18288" tIns="18288" bIns="18288" anchor="t">
-            <a:noAutofit/>
-          </a:bodyPr>
-          <a:lstStyle/>
-          <a:p>
-            <a:pPr algn="l">
-              <a:lnSpc>
-                <a:spcPct val="95000"/>
-              </a:lnSpc>
-              <a:spcBef>
-                <a:spcPts val="0"/>
-              </a:spcBef>
-              <a:spcAft>
-                <a:spcPts val="0"/>
-              </a:spcAft>
-            </a:pPr>
-            <a:r>
-              <a:rPr sz="1300" b="0" i="1">
-                <a:solidFill>
-                  <a:srgbClr val="395E89"/>
-                </a:solidFill>
-                <a:latin typeface="Arial"/>
-                <a:ea typeface="Arial"/>
-                <a:cs typeface="Arial"/>
-              </a:rPr>
-              <a:t>Fig. 1. Milliseconds per 25 appended rounds. Optimized stays at 104–164 ms; the previous build grows past 4,000 ms.</a:t>
+              <a:t>Fig. 1. ms per 25 rounds. Blue stays under 170; red grows past 4,000.</a:t>
             </a:r>
           </a:p>
         </p:txBody>
       </p:sp>
       <p:graphicFrame>
         <p:nvGraphicFramePr>
-          <p:cNvPr id="49" name="Table 48"/>
+          <p:cNvPr id="50" name="Table 49"/>
           <p:cNvGraphicFramePr>
             <a:graphicFrameLocks noGrp="1"/>
           </p:cNvGraphicFramePr>
           <p:nvPr/>
         </p:nvGraphicFramePr>
         <p:xfrm>
-          <a:off x="4937760" y="5779008"/>
-          <a:ext cx="4498848" cy="1481328"/>
+          <a:off x="4937760" y="5756656"/>
+          <a:ext cx="4462272" cy="1298445"/>
         </p:xfrm>
         <a:graphic>
           <a:graphicData uri="http://schemas.openxmlformats.org/drawingml/2006/table">
@@ -5972,26 +6131,23 @@
                 <a:tableStyleId>{5C22544A-7EE6-4342-B048-85BDC9FD1C3A}</a:tableStyleId>
               </a:tblPr>
               <a:tblGrid>
-                <a:gridCol w="1417320"/>
-                <a:gridCol w="1536192"/>
-                <a:gridCol w="1545336"/>
+                <a:gridCol w="1325880"/>
+                <a:gridCol w="1554480"/>
+                <a:gridCol w="1581912"/>
               </a:tblGrid>
-              <a:tr h="296265">
+              <a:tr h="259689">
                 <a:tc>
                   <a:txBody>
-                    <a:bodyPr wrap="square" lIns="36576" rIns="36576" tIns="27432" bIns="27432"/>
+                    <a:bodyPr wrap="square" lIns="45720" rIns="45720" tIns="18288" bIns="18288"/>
                     <a:lstStyle/>
                     <a:p>
                       <a:pPr algn="ctr">
-                        <a:spcBef>
-                          <a:spcPts val="0"/>
-                        </a:spcBef>
-                        <a:spcAft>
-                          <a:spcPts val="0"/>
-                        </a:spcAft>
+                        <a:lnSpc>
+                          <a:spcPct val="100000"/>
+                        </a:lnSpc>
                       </a:pPr>
                       <a:r>
-                        <a:rPr sz="1300" b="1" i="0">
+                        <a:rPr sz="1200" b="1" i="0">
                           <a:solidFill>
                             <a:srgbClr val="FFFFFF"/>
                           </a:solidFill>
@@ -6007,47 +6163,40 @@
                     <a:solidFill>
                       <a:srgbClr val="1F497D"/>
                     </a:solidFill>
-                    <a:lnL w="9525" cap="flat" cmpd="sng">
+                    <a:lnL w="9525">
                       <a:solidFill>
                         <a:srgbClr val="395E89"/>
                       </a:solidFill>
-                      <a:prstDash val="solid"/>
                     </a:lnL>
-                    <a:lnR w="9525" cap="flat" cmpd="sng">
+                    <a:lnR w="9525">
                       <a:solidFill>
                         <a:srgbClr val="395E89"/>
                       </a:solidFill>
-                      <a:prstDash val="solid"/>
                     </a:lnR>
-                    <a:lnT w="9525" cap="flat" cmpd="sng">
+                    <a:lnT w="9525">
                       <a:solidFill>
                         <a:srgbClr val="395E89"/>
                       </a:solidFill>
-                      <a:prstDash val="solid"/>
                     </a:lnT>
-                    <a:lnB w="9525" cap="flat" cmpd="sng">
+                    <a:lnB w="9525">
                       <a:solidFill>
                         <a:srgbClr val="395E89"/>
                       </a:solidFill>
-                      <a:prstDash val="solid"/>
                     </a:lnB>
                   </a:tcPr>
                 </a:tc>
                 <a:tc>
                   <a:txBody>
-                    <a:bodyPr wrap="square" lIns="36576" rIns="36576" tIns="27432" bIns="27432"/>
+                    <a:bodyPr wrap="square" lIns="45720" rIns="45720" tIns="18288" bIns="18288"/>
                     <a:lstStyle/>
                     <a:p>
                       <a:pPr algn="ctr">
-                        <a:spcBef>
-                          <a:spcPts val="0"/>
-                        </a:spcBef>
-                        <a:spcAft>
-                          <a:spcPts val="0"/>
-                        </a:spcAft>
+                        <a:lnSpc>
+                          <a:spcPct val="100000"/>
+                        </a:lnSpc>
                       </a:pPr>
                       <a:r>
-                        <a:rPr sz="1300" b="1" i="0">
+                        <a:rPr sz="1200" b="1" i="0">
                           <a:solidFill>
                             <a:srgbClr val="FFFFFF"/>
                           </a:solidFill>
@@ -6063,47 +6212,40 @@
                     <a:solidFill>
                       <a:srgbClr val="1F497D"/>
                     </a:solidFill>
-                    <a:lnL w="9525" cap="flat" cmpd="sng">
+                    <a:lnL w="9525">
                       <a:solidFill>
                         <a:srgbClr val="395E89"/>
                       </a:solidFill>
-                      <a:prstDash val="solid"/>
                     </a:lnL>
-                    <a:lnR w="9525" cap="flat" cmpd="sng">
+                    <a:lnR w="9525">
                       <a:solidFill>
                         <a:srgbClr val="395E89"/>
                       </a:solidFill>
-                      <a:prstDash val="solid"/>
                     </a:lnR>
-                    <a:lnT w="9525" cap="flat" cmpd="sng">
+                    <a:lnT w="9525">
                       <a:solidFill>
                         <a:srgbClr val="395E89"/>
                       </a:solidFill>
-                      <a:prstDash val="solid"/>
                     </a:lnT>
-                    <a:lnB w="9525" cap="flat" cmpd="sng">
+                    <a:lnB w="9525">
                       <a:solidFill>
                         <a:srgbClr val="395E89"/>
                       </a:solidFill>
-                      <a:prstDash val="solid"/>
                     </a:lnB>
                   </a:tcPr>
                 </a:tc>
                 <a:tc>
                   <a:txBody>
-                    <a:bodyPr wrap="square" lIns="36576" rIns="36576" tIns="27432" bIns="27432"/>
+                    <a:bodyPr wrap="square" lIns="45720" rIns="45720" tIns="18288" bIns="18288"/>
                     <a:lstStyle/>
                     <a:p>
                       <a:pPr algn="ctr">
-                        <a:spcBef>
-                          <a:spcPts val="0"/>
-                        </a:spcBef>
-                        <a:spcAft>
-                          <a:spcPts val="0"/>
-                        </a:spcAft>
+                        <a:lnSpc>
+                          <a:spcPct val="100000"/>
+                        </a:lnSpc>
                       </a:pPr>
                       <a:r>
-                        <a:rPr sz="1300" b="1" i="0">
+                        <a:rPr sz="1200" b="1" i="0">
                           <a:solidFill>
                             <a:srgbClr val="FFFFFF"/>
                           </a:solidFill>
@@ -6119,46 +6261,39 @@
                     <a:solidFill>
                       <a:srgbClr val="1F497D"/>
                     </a:solidFill>
-                    <a:lnL w="9525" cap="flat" cmpd="sng">
+                    <a:lnL w="9525">
                       <a:solidFill>
                         <a:srgbClr val="395E89"/>
                       </a:solidFill>
-                      <a:prstDash val="solid"/>
                     </a:lnL>
-                    <a:lnR w="9525" cap="flat" cmpd="sng">
+                    <a:lnR w="9525">
                       <a:solidFill>
                         <a:srgbClr val="395E89"/>
                       </a:solidFill>
-                      <a:prstDash val="solid"/>
                     </a:lnR>
-                    <a:lnT w="9525" cap="flat" cmpd="sng">
+                    <a:lnT w="9525">
                       <a:solidFill>
                         <a:srgbClr val="395E89"/>
                       </a:solidFill>
-                      <a:prstDash val="solid"/>
                     </a:lnT>
-                    <a:lnB w="9525" cap="flat" cmpd="sng">
+                    <a:lnB w="9525">
                       <a:solidFill>
                         <a:srgbClr val="395E89"/>
                       </a:solidFill>
-                      <a:prstDash val="solid"/>
                     </a:lnB>
                   </a:tcPr>
                 </a:tc>
               </a:tr>
-              <a:tr h="296265">
+              <a:tr h="259689">
                 <a:tc>
                   <a:txBody>
-                    <a:bodyPr wrap="square" lIns="36576" rIns="36576" tIns="27432" bIns="27432"/>
+                    <a:bodyPr wrap="square" lIns="45720" rIns="45720" tIns="18288" bIns="18288"/>
                     <a:lstStyle/>
                     <a:p>
                       <a:pPr algn="l">
-                        <a:spcBef>
-                          <a:spcPts val="0"/>
-                        </a:spcBef>
-                        <a:spcAft>
-                          <a:spcPts val="0"/>
-                        </a:spcAft>
+                        <a:lnSpc>
+                          <a:spcPct val="100000"/>
+                        </a:lnSpc>
                       </a:pPr>
                       <a:r>
                         <a:rPr sz="1200" b="1" i="0">
@@ -6177,44 +6312,37 @@
                     <a:solidFill>
                       <a:srgbClr val="F3F6FA"/>
                     </a:solidFill>
-                    <a:lnL w="9525" cap="flat" cmpd="sng">
+                    <a:lnL w="9525">
                       <a:solidFill>
                         <a:srgbClr val="395E89"/>
                       </a:solidFill>
-                      <a:prstDash val="solid"/>
                     </a:lnL>
-                    <a:lnR w="9525" cap="flat" cmpd="sng">
+                    <a:lnR w="9525">
                       <a:solidFill>
                         <a:srgbClr val="395E89"/>
                       </a:solidFill>
-                      <a:prstDash val="solid"/>
                     </a:lnR>
-                    <a:lnT w="9525" cap="flat" cmpd="sng">
+                    <a:lnT w="9525">
                       <a:solidFill>
                         <a:srgbClr val="395E89"/>
                       </a:solidFill>
-                      <a:prstDash val="solid"/>
                     </a:lnT>
-                    <a:lnB w="9525" cap="flat" cmpd="sng">
+                    <a:lnB w="9525">
                       <a:solidFill>
                         <a:srgbClr val="395E89"/>
                       </a:solidFill>
-                      <a:prstDash val="solid"/>
                     </a:lnB>
                   </a:tcPr>
                 </a:tc>
                 <a:tc>
                   <a:txBody>
-                    <a:bodyPr wrap="square" lIns="36576" rIns="36576" tIns="27432" bIns="27432"/>
+                    <a:bodyPr wrap="square" lIns="45720" rIns="45720" tIns="18288" bIns="18288"/>
                     <a:lstStyle/>
                     <a:p>
                       <a:pPr algn="ctr">
-                        <a:spcBef>
-                          <a:spcPts val="0"/>
-                        </a:spcBef>
-                        <a:spcAft>
-                          <a:spcPts val="0"/>
-                        </a:spcAft>
+                        <a:lnSpc>
+                          <a:spcPct val="100000"/>
+                        </a:lnSpc>
                       </a:pPr>
                       <a:r>
                         <a:rPr sz="1200" b="0" i="0">
@@ -6233,44 +6361,37 @@
                     <a:solidFill>
                       <a:srgbClr val="F3F6FA"/>
                     </a:solidFill>
-                    <a:lnL w="9525" cap="flat" cmpd="sng">
+                    <a:lnL w="9525">
                       <a:solidFill>
                         <a:srgbClr val="395E89"/>
                       </a:solidFill>
-                      <a:prstDash val="solid"/>
                     </a:lnL>
-                    <a:lnR w="9525" cap="flat" cmpd="sng">
+                    <a:lnR w="9525">
                       <a:solidFill>
                         <a:srgbClr val="395E89"/>
                       </a:solidFill>
-                      <a:prstDash val="solid"/>
                     </a:lnR>
-                    <a:lnT w="9525" cap="flat" cmpd="sng">
+                    <a:lnT w="9525">
                       <a:solidFill>
                         <a:srgbClr val="395E89"/>
                       </a:solidFill>
-                      <a:prstDash val="solid"/>
                     </a:lnT>
-                    <a:lnB w="9525" cap="flat" cmpd="sng">
+                    <a:lnB w="9525">
                       <a:solidFill>
                         <a:srgbClr val="395E89"/>
                       </a:solidFill>
-                      <a:prstDash val="solid"/>
                     </a:lnB>
                   </a:tcPr>
                 </a:tc>
                 <a:tc>
                   <a:txBody>
-                    <a:bodyPr wrap="square" lIns="36576" rIns="36576" tIns="27432" bIns="27432"/>
+                    <a:bodyPr wrap="square" lIns="45720" rIns="45720" tIns="18288" bIns="18288"/>
                     <a:lstStyle/>
                     <a:p>
                       <a:pPr algn="ctr">
-                        <a:spcBef>
-                          <a:spcPts val="0"/>
-                        </a:spcBef>
-                        <a:spcAft>
-                          <a:spcPts val="0"/>
-                        </a:spcAft>
+                        <a:lnSpc>
+                          <a:spcPct val="100000"/>
+                        </a:lnSpc>
                       </a:pPr>
                       <a:r>
                         <a:rPr sz="1200" b="0" i="0">
@@ -6289,46 +6410,39 @@
                     <a:solidFill>
                       <a:srgbClr val="F3F6FA"/>
                     </a:solidFill>
-                    <a:lnL w="9525" cap="flat" cmpd="sng">
+                    <a:lnL w="9525">
                       <a:solidFill>
                         <a:srgbClr val="395E89"/>
                       </a:solidFill>
-                      <a:prstDash val="solid"/>
                     </a:lnL>
-                    <a:lnR w="9525" cap="flat" cmpd="sng">
+                    <a:lnR w="9525">
                       <a:solidFill>
                         <a:srgbClr val="395E89"/>
                       </a:solidFill>
-                      <a:prstDash val="solid"/>
                     </a:lnR>
-                    <a:lnT w="9525" cap="flat" cmpd="sng">
+                    <a:lnT w="9525">
                       <a:solidFill>
                         <a:srgbClr val="395E89"/>
                       </a:solidFill>
-                      <a:prstDash val="solid"/>
                     </a:lnT>
-                    <a:lnB w="9525" cap="flat" cmpd="sng">
+                    <a:lnB w="9525">
                       <a:solidFill>
                         <a:srgbClr val="395E89"/>
                       </a:solidFill>
-                      <a:prstDash val="solid"/>
                     </a:lnB>
                   </a:tcPr>
                 </a:tc>
               </a:tr>
-              <a:tr h="296265">
+              <a:tr h="259689">
                 <a:tc>
                   <a:txBody>
-                    <a:bodyPr wrap="square" lIns="36576" rIns="36576" tIns="27432" bIns="27432"/>
+                    <a:bodyPr wrap="square" lIns="45720" rIns="45720" tIns="18288" bIns="18288"/>
                     <a:lstStyle/>
                     <a:p>
                       <a:pPr algn="l">
-                        <a:spcBef>
-                          <a:spcPts val="0"/>
-                        </a:spcBef>
-                        <a:spcAft>
-                          <a:spcPts val="0"/>
-                        </a:spcAft>
+                        <a:lnSpc>
+                          <a:spcPct val="100000"/>
+                        </a:lnSpc>
                       </a:pPr>
                       <a:r>
                         <a:rPr sz="1200" b="1" i="0">
@@ -6347,44 +6461,37 @@
                     <a:solidFill>
                       <a:srgbClr val="FFFFFF"/>
                     </a:solidFill>
-                    <a:lnL w="9525" cap="flat" cmpd="sng">
+                    <a:lnL w="9525">
                       <a:solidFill>
                         <a:srgbClr val="395E89"/>
                       </a:solidFill>
-                      <a:prstDash val="solid"/>
                     </a:lnL>
-                    <a:lnR w="9525" cap="flat" cmpd="sng">
+                    <a:lnR w="9525">
                       <a:solidFill>
                         <a:srgbClr val="395E89"/>
                       </a:solidFill>
-                      <a:prstDash val="solid"/>
                     </a:lnR>
-                    <a:lnT w="9525" cap="flat" cmpd="sng">
+                    <a:lnT w="9525">
                       <a:solidFill>
                         <a:srgbClr val="395E89"/>
                       </a:solidFill>
-                      <a:prstDash val="solid"/>
                     </a:lnT>
-                    <a:lnB w="9525" cap="flat" cmpd="sng">
+                    <a:lnB w="9525">
                       <a:solidFill>
                         <a:srgbClr val="395E89"/>
                       </a:solidFill>
-                      <a:prstDash val="solid"/>
                     </a:lnB>
                   </a:tcPr>
                 </a:tc>
                 <a:tc>
                   <a:txBody>
-                    <a:bodyPr wrap="square" lIns="36576" rIns="36576" tIns="27432" bIns="27432"/>
+                    <a:bodyPr wrap="square" lIns="45720" rIns="45720" tIns="18288" bIns="18288"/>
                     <a:lstStyle/>
                     <a:p>
                       <a:pPr algn="ctr">
-                        <a:spcBef>
-                          <a:spcPts val="0"/>
-                        </a:spcBef>
-                        <a:spcAft>
-                          <a:spcPts val="0"/>
-                        </a:spcAft>
+                        <a:lnSpc>
+                          <a:spcPct val="100000"/>
+                        </a:lnSpc>
                       </a:pPr>
                       <a:r>
                         <a:rPr sz="1200" b="0" i="0">
@@ -6403,44 +6510,37 @@
                     <a:solidFill>
                       <a:srgbClr val="FFFFFF"/>
                     </a:solidFill>
-                    <a:lnL w="9525" cap="flat" cmpd="sng">
+                    <a:lnL w="9525">
                       <a:solidFill>
                         <a:srgbClr val="395E89"/>
                       </a:solidFill>
-                      <a:prstDash val="solid"/>
                     </a:lnL>
-                    <a:lnR w="9525" cap="flat" cmpd="sng">
+                    <a:lnR w="9525">
                       <a:solidFill>
                         <a:srgbClr val="395E89"/>
                       </a:solidFill>
-                      <a:prstDash val="solid"/>
                     </a:lnR>
-                    <a:lnT w="9525" cap="flat" cmpd="sng">
+                    <a:lnT w="9525">
                       <a:solidFill>
                         <a:srgbClr val="395E89"/>
                       </a:solidFill>
-                      <a:prstDash val="solid"/>
                     </a:lnT>
-                    <a:lnB w="9525" cap="flat" cmpd="sng">
+                    <a:lnB w="9525">
                       <a:solidFill>
                         <a:srgbClr val="395E89"/>
                       </a:solidFill>
-                      <a:prstDash val="solid"/>
                     </a:lnB>
                   </a:tcPr>
                 </a:tc>
                 <a:tc>
                   <a:txBody>
-                    <a:bodyPr wrap="square" lIns="36576" rIns="36576" tIns="27432" bIns="27432"/>
+                    <a:bodyPr wrap="square" lIns="45720" rIns="45720" tIns="18288" bIns="18288"/>
                     <a:lstStyle/>
                     <a:p>
                       <a:pPr algn="ctr">
-                        <a:spcBef>
-                          <a:spcPts val="0"/>
-                        </a:spcBef>
-                        <a:spcAft>
-                          <a:spcPts val="0"/>
-                        </a:spcAft>
+                        <a:lnSpc>
+                          <a:spcPct val="100000"/>
+                        </a:lnSpc>
                       </a:pPr>
                       <a:r>
                         <a:rPr sz="1200" b="0" i="0">
@@ -6459,46 +6559,39 @@
                     <a:solidFill>
                       <a:srgbClr val="FFFFFF"/>
                     </a:solidFill>
-                    <a:lnL w="9525" cap="flat" cmpd="sng">
+                    <a:lnL w="9525">
                       <a:solidFill>
                         <a:srgbClr val="395E89"/>
                       </a:solidFill>
-                      <a:prstDash val="solid"/>
                     </a:lnL>
-                    <a:lnR w="9525" cap="flat" cmpd="sng">
+                    <a:lnR w="9525">
                       <a:solidFill>
                         <a:srgbClr val="395E89"/>
                       </a:solidFill>
-                      <a:prstDash val="solid"/>
                     </a:lnR>
-                    <a:lnT w="9525" cap="flat" cmpd="sng">
+                    <a:lnT w="9525">
                       <a:solidFill>
                         <a:srgbClr val="395E89"/>
                       </a:solidFill>
-                      <a:prstDash val="solid"/>
                     </a:lnT>
-                    <a:lnB w="9525" cap="flat" cmpd="sng">
+                    <a:lnB w="9525">
                       <a:solidFill>
                         <a:srgbClr val="395E89"/>
                       </a:solidFill>
-                      <a:prstDash val="solid"/>
                     </a:lnB>
                   </a:tcPr>
                 </a:tc>
               </a:tr>
-              <a:tr h="296265">
+              <a:tr h="259689">
                 <a:tc>
                   <a:txBody>
-                    <a:bodyPr wrap="square" lIns="36576" rIns="36576" tIns="27432" bIns="27432"/>
+                    <a:bodyPr wrap="square" lIns="45720" rIns="45720" tIns="18288" bIns="18288"/>
                     <a:lstStyle/>
                     <a:p>
                       <a:pPr algn="l">
-                        <a:spcBef>
-                          <a:spcPts val="0"/>
-                        </a:spcBef>
-                        <a:spcAft>
-                          <a:spcPts val="0"/>
-                        </a:spcAft>
+                        <a:lnSpc>
+                          <a:spcPct val="100000"/>
+                        </a:lnSpc>
                       </a:pPr>
                       <a:r>
                         <a:rPr sz="1200" b="1" i="0">
@@ -6517,44 +6610,37 @@
                     <a:solidFill>
                       <a:srgbClr val="F3F6FA"/>
                     </a:solidFill>
-                    <a:lnL w="9525" cap="flat" cmpd="sng">
+                    <a:lnL w="9525">
                       <a:solidFill>
                         <a:srgbClr val="395E89"/>
                       </a:solidFill>
-                      <a:prstDash val="solid"/>
                     </a:lnL>
-                    <a:lnR w="9525" cap="flat" cmpd="sng">
+                    <a:lnR w="9525">
                       <a:solidFill>
                         <a:srgbClr val="395E89"/>
                       </a:solidFill>
-                      <a:prstDash val="solid"/>
                     </a:lnR>
-                    <a:lnT w="9525" cap="flat" cmpd="sng">
+                    <a:lnT w="9525">
                       <a:solidFill>
                         <a:srgbClr val="395E89"/>
                       </a:solidFill>
-                      <a:prstDash val="solid"/>
                     </a:lnT>
-                    <a:lnB w="9525" cap="flat" cmpd="sng">
+                    <a:lnB w="9525">
                       <a:solidFill>
                         <a:srgbClr val="395E89"/>
                       </a:solidFill>
-                      <a:prstDash val="solid"/>
                     </a:lnB>
                   </a:tcPr>
                 </a:tc>
                 <a:tc>
                   <a:txBody>
-                    <a:bodyPr wrap="square" lIns="36576" rIns="36576" tIns="27432" bIns="27432"/>
+                    <a:bodyPr wrap="square" lIns="45720" rIns="45720" tIns="18288" bIns="18288"/>
                     <a:lstStyle/>
                     <a:p>
                       <a:pPr algn="ctr">
-                        <a:spcBef>
-                          <a:spcPts val="0"/>
-                        </a:spcBef>
-                        <a:spcAft>
-                          <a:spcPts val="0"/>
-                        </a:spcAft>
+                        <a:lnSpc>
+                          <a:spcPct val="100000"/>
+                        </a:lnSpc>
                       </a:pPr>
                       <a:r>
                         <a:rPr sz="1200" b="0" i="0">
@@ -6573,44 +6659,37 @@
                     <a:solidFill>
                       <a:srgbClr val="F3F6FA"/>
                     </a:solidFill>
-                    <a:lnL w="9525" cap="flat" cmpd="sng">
+                    <a:lnL w="9525">
                       <a:solidFill>
                         <a:srgbClr val="395E89"/>
                       </a:solidFill>
-                      <a:prstDash val="solid"/>
                     </a:lnL>
-                    <a:lnR w="9525" cap="flat" cmpd="sng">
+                    <a:lnR w="9525">
                       <a:solidFill>
                         <a:srgbClr val="395E89"/>
                       </a:solidFill>
-                      <a:prstDash val="solid"/>
                     </a:lnR>
-                    <a:lnT w="9525" cap="flat" cmpd="sng">
+                    <a:lnT w="9525">
                       <a:solidFill>
                         <a:srgbClr val="395E89"/>
                       </a:solidFill>
-                      <a:prstDash val="solid"/>
                     </a:lnT>
-                    <a:lnB w="9525" cap="flat" cmpd="sng">
+                    <a:lnB w="9525">
                       <a:solidFill>
                         <a:srgbClr val="395E89"/>
                       </a:solidFill>
-                      <a:prstDash val="solid"/>
                     </a:lnB>
                   </a:tcPr>
                 </a:tc>
                 <a:tc>
                   <a:txBody>
-                    <a:bodyPr wrap="square" lIns="36576" rIns="36576" tIns="27432" bIns="27432"/>
+                    <a:bodyPr wrap="square" lIns="45720" rIns="45720" tIns="18288" bIns="18288"/>
                     <a:lstStyle/>
                     <a:p>
                       <a:pPr algn="ctr">
-                        <a:spcBef>
-                          <a:spcPts val="0"/>
-                        </a:spcBef>
-                        <a:spcAft>
-                          <a:spcPts val="0"/>
-                        </a:spcAft>
+                        <a:lnSpc>
+                          <a:spcPct val="100000"/>
+                        </a:lnSpc>
                       </a:pPr>
                       <a:r>
                         <a:rPr sz="1200" b="0" i="0">
@@ -6621,7 +6700,7 @@
                           <a:ea typeface="Arial"/>
                           <a:cs typeface="Arial"/>
                         </a:rPr>
-                        <a:t>Yes, with a certificate</a:t>
+                        <a:t>Yes, with proof</a:t>
                       </a:r>
                     </a:p>
                   </a:txBody>
@@ -6629,46 +6708,39 @@
                     <a:solidFill>
                       <a:srgbClr val="F3F6FA"/>
                     </a:solidFill>
-                    <a:lnL w="9525" cap="flat" cmpd="sng">
+                    <a:lnL w="9525">
                       <a:solidFill>
                         <a:srgbClr val="395E89"/>
                       </a:solidFill>
-                      <a:prstDash val="solid"/>
                     </a:lnL>
-                    <a:lnR w="9525" cap="flat" cmpd="sng">
+                    <a:lnR w="9525">
                       <a:solidFill>
                         <a:srgbClr val="395E89"/>
                       </a:solidFill>
-                      <a:prstDash val="solid"/>
                     </a:lnR>
-                    <a:lnT w="9525" cap="flat" cmpd="sng">
+                    <a:lnT w="9525">
                       <a:solidFill>
                         <a:srgbClr val="395E89"/>
                       </a:solidFill>
-                      <a:prstDash val="solid"/>
                     </a:lnT>
-                    <a:lnB w="9525" cap="flat" cmpd="sng">
+                    <a:lnB w="9525">
                       <a:solidFill>
                         <a:srgbClr val="395E89"/>
                       </a:solidFill>
-                      <a:prstDash val="solid"/>
                     </a:lnB>
                   </a:tcPr>
                 </a:tc>
               </a:tr>
-              <a:tr h="296268">
+              <a:tr h="259689">
                 <a:tc>
                   <a:txBody>
-                    <a:bodyPr wrap="square" lIns="36576" rIns="36576" tIns="27432" bIns="27432"/>
+                    <a:bodyPr wrap="square" lIns="45720" rIns="45720" tIns="18288" bIns="18288"/>
                     <a:lstStyle/>
                     <a:p>
                       <a:pPr algn="l">
-                        <a:spcBef>
-                          <a:spcPts val="0"/>
-                        </a:spcBef>
-                        <a:spcAft>
-                          <a:spcPts val="0"/>
-                        </a:spcAft>
+                        <a:lnSpc>
+                          <a:spcPct val="100000"/>
+                        </a:lnSpc>
                       </a:pPr>
                       <a:r>
                         <a:rPr sz="1200" b="1" i="0">
@@ -6687,44 +6759,37 @@
                     <a:solidFill>
                       <a:srgbClr val="FFFFFF"/>
                     </a:solidFill>
-                    <a:lnL w="9525" cap="flat" cmpd="sng">
+                    <a:lnL w="9525">
                       <a:solidFill>
                         <a:srgbClr val="395E89"/>
                       </a:solidFill>
-                      <a:prstDash val="solid"/>
                     </a:lnL>
-                    <a:lnR w="9525" cap="flat" cmpd="sng">
+                    <a:lnR w="9525">
                       <a:solidFill>
                         <a:srgbClr val="395E89"/>
                       </a:solidFill>
-                      <a:prstDash val="solid"/>
                     </a:lnR>
-                    <a:lnT w="9525" cap="flat" cmpd="sng">
+                    <a:lnT w="9525">
                       <a:solidFill>
                         <a:srgbClr val="395E89"/>
                       </a:solidFill>
-                      <a:prstDash val="solid"/>
                     </a:lnT>
-                    <a:lnB w="9525" cap="flat" cmpd="sng">
+                    <a:lnB w="9525">
                       <a:solidFill>
                         <a:srgbClr val="395E89"/>
                       </a:solidFill>
-                      <a:prstDash val="solid"/>
                     </a:lnB>
                   </a:tcPr>
                 </a:tc>
                 <a:tc>
                   <a:txBody>
-                    <a:bodyPr wrap="square" lIns="36576" rIns="36576" tIns="27432" bIns="27432"/>
+                    <a:bodyPr wrap="square" lIns="45720" rIns="45720" tIns="18288" bIns="18288"/>
                     <a:lstStyle/>
                     <a:p>
                       <a:pPr algn="ctr">
-                        <a:spcBef>
-                          <a:spcPts val="0"/>
-                        </a:spcBef>
-                        <a:spcAft>
-                          <a:spcPts val="0"/>
-                        </a:spcAft>
+                        <a:lnSpc>
+                          <a:spcPct val="100000"/>
+                        </a:lnSpc>
                       </a:pPr>
                       <a:r>
                         <a:rPr sz="1200" b="0" i="0">
@@ -6743,44 +6808,37 @@
                     <a:solidFill>
                       <a:srgbClr val="FFFFFF"/>
                     </a:solidFill>
-                    <a:lnL w="9525" cap="flat" cmpd="sng">
+                    <a:lnL w="9525">
                       <a:solidFill>
                         <a:srgbClr val="395E89"/>
                       </a:solidFill>
-                      <a:prstDash val="solid"/>
                     </a:lnL>
-                    <a:lnR w="9525" cap="flat" cmpd="sng">
+                    <a:lnR w="9525">
                       <a:solidFill>
                         <a:srgbClr val="395E89"/>
                       </a:solidFill>
-                      <a:prstDash val="solid"/>
                     </a:lnR>
-                    <a:lnT w="9525" cap="flat" cmpd="sng">
+                    <a:lnT w="9525">
                       <a:solidFill>
                         <a:srgbClr val="395E89"/>
                       </a:solidFill>
-                      <a:prstDash val="solid"/>
                     </a:lnT>
-                    <a:lnB w="9525" cap="flat" cmpd="sng">
+                    <a:lnB w="9525">
                       <a:solidFill>
                         <a:srgbClr val="395E89"/>
                       </a:solidFill>
-                      <a:prstDash val="solid"/>
                     </a:lnB>
                   </a:tcPr>
                 </a:tc>
                 <a:tc>
                   <a:txBody>
-                    <a:bodyPr wrap="square" lIns="36576" rIns="36576" tIns="27432" bIns="27432"/>
+                    <a:bodyPr wrap="square" lIns="45720" rIns="45720" tIns="18288" bIns="18288"/>
                     <a:lstStyle/>
                     <a:p>
                       <a:pPr algn="ctr">
-                        <a:spcBef>
-                          <a:spcPts val="0"/>
-                        </a:spcBef>
-                        <a:spcAft>
-                          <a:spcPts val="0"/>
-                        </a:spcAft>
+                        <a:lnSpc>
+                          <a:spcPct val="100000"/>
+                        </a:lnSpc>
                       </a:pPr>
                       <a:r>
                         <a:rPr sz="1200" b="0" i="0">
@@ -6799,29 +6857,25 @@
                     <a:solidFill>
                       <a:srgbClr val="FFFFFF"/>
                     </a:solidFill>
-                    <a:lnL w="9525" cap="flat" cmpd="sng">
+                    <a:lnL w="9525">
                       <a:solidFill>
                         <a:srgbClr val="395E89"/>
                       </a:solidFill>
-                      <a:prstDash val="solid"/>
                     </a:lnL>
-                    <a:lnR w="9525" cap="flat" cmpd="sng">
+                    <a:lnR w="9525">
                       <a:solidFill>
                         <a:srgbClr val="395E89"/>
                       </a:solidFill>
-                      <a:prstDash val="solid"/>
                     </a:lnR>
-                    <a:lnT w="9525" cap="flat" cmpd="sng">
+                    <a:lnT w="9525">
                       <a:solidFill>
                         <a:srgbClr val="395E89"/>
                       </a:solidFill>
-                      <a:prstDash val="solid"/>
                     </a:lnT>
-                    <a:lnB w="9525" cap="flat" cmpd="sng">
+                    <a:lnB w="9525">
                       <a:solidFill>
                         <a:srgbClr val="395E89"/>
                       </a:solidFill>
-                      <a:prstDash val="solid"/>
                     </a:lnB>
                   </a:tcPr>
                 </a:tc>
@@ -6832,14 +6886,14 @@
       </p:graphicFrame>
       <p:sp>
         <p:nvSpPr>
-          <p:cNvPr id="50" name="TextBox 49"/>
+          <p:cNvPr id="51" name="TextBox 50"/>
           <p:cNvSpPr txBox="1"/>
           <p:nvPr/>
         </p:nvSpPr>
         <p:spPr>
           <a:xfrm>
-            <a:off x="4937760" y="7278624"/>
-            <a:ext cx="4498848" cy="329184"/>
+            <a:off x="4937760" y="7082536"/>
+            <a:ext cx="4462272" cy="258064"/>
           </a:xfrm>
           <a:prstGeom prst="rect">
             <a:avLst/>
@@ -6847,14 +6901,14 @@
           <a:noFill/>
         </p:spPr>
         <p:txBody>
-          <a:bodyPr wrap="square" lIns="18288" rIns="18288" tIns="18288" bIns="18288" anchor="t">
+          <a:bodyPr wrap="square" lIns="45720" rIns="45720" tIns="27432" bIns="18288" anchor="t">
             <a:noAutofit/>
           </a:bodyPr>
           <a:lstStyle/>
           <a:p>
             <a:pPr algn="l">
               <a:lnSpc>
-                <a:spcPct val="95000"/>
+                <a:spcPct val="112000"/>
               </a:lnSpc>
               <a:spcBef>
                 <a:spcPts val="0"/>
@@ -6872,21 +6926,21 @@
                 <a:ea typeface="Arial"/>
                 <a:cs typeface="Arial"/>
               </a:rPr>
-              <a:t>Table 1. Counting algorithms from [1] implemented in the simulator. One leader, connected network.</a:t>
-            </a:r>
-          </a:p>
-        </p:txBody>
-      </p:sp>
-      <p:sp>
-        <p:nvSpPr>
-          <p:cNvPr id="51" name="TextBox 50"/>
+              <a:t>Table 1. Counting algorithms from [1], stepped in the app.</a:t>
+            </a:r>
+          </a:p>
+        </p:txBody>
+      </p:sp>
+      <p:sp>
+        <p:nvSpPr>
+          <p:cNvPr id="52" name="TextBox 51"/>
           <p:cNvSpPr txBox="1"/>
           <p:nvPr/>
         </p:nvSpPr>
         <p:spPr>
           <a:xfrm>
-            <a:off x="4937760" y="7626096"/>
-            <a:ext cx="4480560" cy="292608"/>
+            <a:off x="4937760" y="7395464"/>
+            <a:ext cx="4462272" cy="292608"/>
           </a:xfrm>
           <a:prstGeom prst="rect">
             <a:avLst/>
@@ -6894,14 +6948,14 @@
           <a:noFill/>
         </p:spPr>
         <p:txBody>
-          <a:bodyPr wrap="square" lIns="18288" rIns="18288" tIns="18288" bIns="18288" anchor="t">
+          <a:bodyPr wrap="square" lIns="0" rIns="0" tIns="27432" bIns="18288" anchor="t">
             <a:noAutofit/>
           </a:bodyPr>
           <a:lstStyle/>
           <a:p>
             <a:pPr algn="l">
               <a:lnSpc>
-                <a:spcPct val="95000"/>
+                <a:spcPct val="112000"/>
               </a:lnSpc>
               <a:spcBef>
                 <a:spcPts val="0"/>
@@ -6911,7 +6965,7 @@
               </a:spcAft>
             </a:pPr>
             <a:r>
-              <a:rPr sz="2000" b="1" i="0">
+              <a:rPr sz="1800" b="1" i="0">
                 <a:solidFill>
                   <a:srgbClr val="000000"/>
                 </a:solidFill>
@@ -6926,19 +6980,19 @@
       </p:sp>
       <p:cxnSp>
         <p:nvCxnSpPr>
-          <p:cNvPr id="52" name="Connector 51"/>
+          <p:cNvPr id="53" name="Connector 52"/>
           <p:cNvCxnSpPr/>
           <p:nvPr/>
         </p:nvCxnSpPr>
         <p:spPr>
           <a:xfrm>
-            <a:off x="4937760" y="7918704"/>
-            <a:ext cx="4480560" cy="0"/>
+            <a:off x="4937760" y="7688072"/>
+            <a:ext cx="4462272" cy="0"/>
           </a:xfrm>
           <a:prstGeom prst="line">
             <a:avLst/>
           </a:prstGeom>
-          <a:ln w="15875">
+          <a:ln w="14604">
             <a:solidFill>
               <a:srgbClr val="000000"/>
             </a:solidFill>
@@ -6961,14 +7015,14 @@
       </p:cxnSp>
       <p:sp>
         <p:nvSpPr>
-          <p:cNvPr id="53" name="TextBox 52"/>
+          <p:cNvPr id="54" name="TextBox 53"/>
           <p:cNvSpPr txBox="1"/>
           <p:nvPr/>
         </p:nvSpPr>
         <p:spPr>
           <a:xfrm>
-            <a:off x="4937760" y="7936992"/>
-            <a:ext cx="4498848" cy="1078992"/>
+            <a:off x="4937760" y="7733792"/>
+            <a:ext cx="4462272" cy="1190752"/>
           </a:xfrm>
           <a:prstGeom prst="rect">
             <a:avLst/>
@@ -6976,14 +7030,14 @@
           <a:noFill/>
         </p:spPr>
         <p:txBody>
-          <a:bodyPr wrap="square" lIns="36576" rIns="36576" tIns="18288" bIns="18288" anchor="t">
+          <a:bodyPr wrap="square" lIns="45720" rIns="45720" tIns="27432" bIns="18288" anchor="t">
             <a:noAutofit/>
           </a:bodyPr>
           <a:lstStyle/>
           <a:p>
             <a:pPr algn="l">
               <a:lnSpc>
-                <a:spcPct val="95000"/>
+                <a:spcPct val="112000"/>
               </a:lnSpc>
               <a:spcBef>
                 <a:spcPts val="0"/>
@@ -7001,13 +7055,13 @@
                 <a:ea typeface="Arial"/>
                 <a:cs typeface="Arial"/>
               </a:rPr>
-              <a:t>•  Middle insert still replays the whole suffix (the 12.5 s case).</a:t>
+              <a:t>•  Middle insert still replays the suffix.</a:t>
             </a:r>
           </a:p>
           <a:p>
             <a:pPr algn="l">
               <a:lnSpc>
-                <a:spcPct val="95000"/>
+                <a:spcPct val="112000"/>
               </a:lnSpc>
               <a:spcBef>
                 <a:spcPts val="0"/>
@@ -7025,13 +7079,13 @@
                 <a:ea typeface="Arial"/>
                 <a:cs typeface="Arial"/>
               </a:rPr>
-              <a:t>•  Very long runs can near the 256 MB WebAssembly memory limit.</a:t>
+              <a:t>•  Long runs can near the 256 MB limit.</a:t>
             </a:r>
           </a:p>
           <a:p>
             <a:pPr algn="l">
               <a:lnSpc>
-                <a:spcPct val="95000"/>
+                <a:spcPct val="112000"/>
               </a:lnSpc>
               <a:spcBef>
                 <a:spcPts val="0"/>
@@ -7049,13 +7103,13 @@
                 <a:ea typeface="Arial"/>
                 <a:cs typeface="Arial"/>
               </a:rPr>
-              <a:t>•  Explain red edges, anonymity, and node colors on the page.</a:t>
+              <a:t>•  Explain colors and red edges on the page.</a:t>
             </a:r>
           </a:p>
           <a:p>
             <a:pPr algn="l">
               <a:lnSpc>
-                <a:spcPct val="95000"/>
+                <a:spcPct val="112000"/>
               </a:lnSpc>
               <a:spcBef>
                 <a:spcPts val="0"/>
@@ -7073,13 +7127,13 @@
                 <a:ea typeface="Arial"/>
                 <a:cs typeface="Arial"/>
               </a:rPr>
-              <a:t>•  Later: multi-leader and directed networks [2].</a:t>
+              <a:t>•  Later: more leaders, directed links [2].</a:t>
             </a:r>
           </a:p>
           <a:p>
             <a:pPr algn="l">
               <a:lnSpc>
-                <a:spcPct val="95000"/>
+                <a:spcPct val="112000"/>
               </a:lnSpc>
               <a:spcBef>
                 <a:spcPts val="0"/>
@@ -7097,21 +7151,21 @@
                 <a:ea typeface="Arial"/>
                 <a:cs typeface="Arial"/>
               </a:rPr>
-              <a:t>•  Fallback: keep the fast append path and state the insert limit.</a:t>
-            </a:r>
-          </a:p>
-        </p:txBody>
-      </p:sp>
-      <p:sp>
-        <p:nvSpPr>
-          <p:cNvPr id="54" name="Rectangle 53"/>
+              <a:t>•  Fallback: keep fast append, state the limit.</a:t>
+            </a:r>
+          </a:p>
+        </p:txBody>
+      </p:sp>
+      <p:sp>
+        <p:nvSpPr>
+          <p:cNvPr id="55" name="Rectangle 54"/>
           <p:cNvSpPr/>
           <p:nvPr/>
         </p:nvSpPr>
         <p:spPr>
           <a:xfrm>
-            <a:off x="4937760" y="9052560"/>
-            <a:ext cx="4498848" cy="1389888"/>
+            <a:off x="4937760" y="8961120"/>
+            <a:ext cx="4462272" cy="1353311"/>
           </a:xfrm>
           <a:prstGeom prst="rect">
             <a:avLst/>
@@ -7150,14 +7204,14 @@
       </p:sp>
       <p:sp>
         <p:nvSpPr>
-          <p:cNvPr id="55" name="TextBox 54"/>
+          <p:cNvPr id="56" name="TextBox 55"/>
           <p:cNvSpPr txBox="1"/>
           <p:nvPr/>
         </p:nvSpPr>
         <p:spPr>
           <a:xfrm>
-            <a:off x="5010912" y="9089136"/>
-            <a:ext cx="4352544" cy="219456"/>
+            <a:off x="4992624" y="8997696"/>
+            <a:ext cx="4352544" cy="1116076"/>
           </a:xfrm>
           <a:prstGeom prst="rect">
             <a:avLst/>
@@ -7165,20 +7219,20 @@
           <a:noFill/>
         </p:spPr>
         <p:txBody>
-          <a:bodyPr wrap="square" lIns="0" rIns="0" tIns="18288" bIns="18288" anchor="t">
+          <a:bodyPr wrap="square" lIns="18288" rIns="18288" tIns="27432" bIns="18288" anchor="t">
             <a:noAutofit/>
           </a:bodyPr>
           <a:lstStyle/>
           <a:p>
             <a:pPr algn="l">
               <a:lnSpc>
-                <a:spcPct val="95000"/>
+                <a:spcPct val="112000"/>
               </a:lnSpc>
               <a:spcBef>
                 <a:spcPts val="0"/>
               </a:spcBef>
               <a:spcAft>
-                <a:spcPts val="0"/>
+                <a:spcPts val="200"/>
               </a:spcAft>
             </a:pPr>
             <a:r>
@@ -7190,1450 +7244,107 @@
                 <a:ea typeface="Arial"/>
                 <a:cs typeface="Arial"/>
               </a:rPr>
-              <a:t>Schedule: Oct 2026 – Jan 2027</a:t>
-            </a:r>
-          </a:p>
-        </p:txBody>
-      </p:sp>
-      <p:graphicFrame>
-        <p:nvGraphicFramePr>
-          <p:cNvPr id="56" name="Table 55"/>
-          <p:cNvGraphicFramePr>
-            <a:graphicFrameLocks noGrp="1"/>
-          </p:cNvGraphicFramePr>
-          <p:nvPr/>
-        </p:nvGraphicFramePr>
-        <p:xfrm>
-          <a:off x="5010912" y="9326880"/>
-          <a:ext cx="4352544" cy="1042415"/>
-        </p:xfrm>
-        <a:graphic>
-          <a:graphicData uri="http://schemas.openxmlformats.org/drawingml/2006/table">
-            <a:tbl>
-              <a:tblPr firstRow="1" bandRow="1">
-                <a:tableStyleId>{5C22544A-7EE6-4342-B048-85BDC9FD1C3A}</a:tableStyleId>
-              </a:tblPr>
-              <a:tblGrid>
-                <a:gridCol w="1572768"/>
-                <a:gridCol w="694944"/>
-                <a:gridCol w="694944"/>
-                <a:gridCol w="694944"/>
-                <a:gridCol w="694944"/>
-              </a:tblGrid>
-              <a:tr h="208483">
-                <a:tc>
-                  <a:txBody>
-                    <a:bodyPr wrap="square" lIns="36576" rIns="36576" tIns="27432" bIns="27432"/>
-                    <a:lstStyle/>
-                    <a:p>
-                      <a:pPr algn="ctr">
-                        <a:spcBef>
-                          <a:spcPts val="0"/>
-                        </a:spcBef>
-                        <a:spcAft>
-                          <a:spcPts val="0"/>
-                        </a:spcAft>
-                      </a:pPr>
-                      <a:r>
-                        <a:rPr sz="1100" b="1" i="0">
-                          <a:solidFill>
-                            <a:srgbClr val="FFFFFF"/>
-                          </a:solidFill>
-                          <a:latin typeface="Arial"/>
-                          <a:ea typeface="Arial"/>
-                          <a:cs typeface="Arial"/>
-                        </a:rPr>
-                        <a:t>Task</a:t>
-                      </a:r>
-                    </a:p>
-                  </a:txBody>
-                  <a:tcPr anchor="ctr">
-                    <a:solidFill>
-                      <a:srgbClr val="1F497D"/>
-                    </a:solidFill>
-                    <a:lnL w="9525" cap="flat" cmpd="sng">
-                      <a:solidFill>
-                        <a:srgbClr val="395E89"/>
-                      </a:solidFill>
-                      <a:prstDash val="solid"/>
-                    </a:lnL>
-                    <a:lnR w="9525" cap="flat" cmpd="sng">
-                      <a:solidFill>
-                        <a:srgbClr val="395E89"/>
-                      </a:solidFill>
-                      <a:prstDash val="solid"/>
-                    </a:lnR>
-                    <a:lnT w="9525" cap="flat" cmpd="sng">
-                      <a:solidFill>
-                        <a:srgbClr val="395E89"/>
-                      </a:solidFill>
-                      <a:prstDash val="solid"/>
-                    </a:lnT>
-                    <a:lnB w="9525" cap="flat" cmpd="sng">
-                      <a:solidFill>
-                        <a:srgbClr val="395E89"/>
-                      </a:solidFill>
-                      <a:prstDash val="solid"/>
-                    </a:lnB>
-                  </a:tcPr>
-                </a:tc>
-                <a:tc>
-                  <a:txBody>
-                    <a:bodyPr wrap="square" lIns="36576" rIns="36576" tIns="27432" bIns="27432"/>
-                    <a:lstStyle/>
-                    <a:p>
-                      <a:pPr algn="ctr">
-                        <a:spcBef>
-                          <a:spcPts val="0"/>
-                        </a:spcBef>
-                        <a:spcAft>
-                          <a:spcPts val="0"/>
-                        </a:spcAft>
-                      </a:pPr>
-                      <a:r>
-                        <a:rPr sz="1100" b="1" i="0">
-                          <a:solidFill>
-                            <a:srgbClr val="FFFFFF"/>
-                          </a:solidFill>
-                          <a:latin typeface="Arial"/>
-                          <a:ea typeface="Arial"/>
-                          <a:cs typeface="Arial"/>
-                        </a:rPr>
-                        <a:t>Oct</a:t>
-                      </a:r>
-                    </a:p>
-                  </a:txBody>
-                  <a:tcPr anchor="ctr">
-                    <a:solidFill>
-                      <a:srgbClr val="1F497D"/>
-                    </a:solidFill>
-                    <a:lnL w="9525" cap="flat" cmpd="sng">
-                      <a:solidFill>
-                        <a:srgbClr val="395E89"/>
-                      </a:solidFill>
-                      <a:prstDash val="solid"/>
-                    </a:lnL>
-                    <a:lnR w="9525" cap="flat" cmpd="sng">
-                      <a:solidFill>
-                        <a:srgbClr val="395E89"/>
-                      </a:solidFill>
-                      <a:prstDash val="solid"/>
-                    </a:lnR>
-                    <a:lnT w="9525" cap="flat" cmpd="sng">
-                      <a:solidFill>
-                        <a:srgbClr val="395E89"/>
-                      </a:solidFill>
-                      <a:prstDash val="solid"/>
-                    </a:lnT>
-                    <a:lnB w="9525" cap="flat" cmpd="sng">
-                      <a:solidFill>
-                        <a:srgbClr val="395E89"/>
-                      </a:solidFill>
-                      <a:prstDash val="solid"/>
-                    </a:lnB>
-                  </a:tcPr>
-                </a:tc>
-                <a:tc>
-                  <a:txBody>
-                    <a:bodyPr wrap="square" lIns="36576" rIns="36576" tIns="27432" bIns="27432"/>
-                    <a:lstStyle/>
-                    <a:p>
-                      <a:pPr algn="ctr">
-                        <a:spcBef>
-                          <a:spcPts val="0"/>
-                        </a:spcBef>
-                        <a:spcAft>
-                          <a:spcPts val="0"/>
-                        </a:spcAft>
-                      </a:pPr>
-                      <a:r>
-                        <a:rPr sz="1100" b="1" i="0">
-                          <a:solidFill>
-                            <a:srgbClr val="FFFFFF"/>
-                          </a:solidFill>
-                          <a:latin typeface="Arial"/>
-                          <a:ea typeface="Arial"/>
-                          <a:cs typeface="Arial"/>
-                        </a:rPr>
-                        <a:t>Nov</a:t>
-                      </a:r>
-                    </a:p>
-                  </a:txBody>
-                  <a:tcPr anchor="ctr">
-                    <a:solidFill>
-                      <a:srgbClr val="1F497D"/>
-                    </a:solidFill>
-                    <a:lnL w="9525" cap="flat" cmpd="sng">
-                      <a:solidFill>
-                        <a:srgbClr val="395E89"/>
-                      </a:solidFill>
-                      <a:prstDash val="solid"/>
-                    </a:lnL>
-                    <a:lnR w="9525" cap="flat" cmpd="sng">
-                      <a:solidFill>
-                        <a:srgbClr val="395E89"/>
-                      </a:solidFill>
-                      <a:prstDash val="solid"/>
-                    </a:lnR>
-                    <a:lnT w="9525" cap="flat" cmpd="sng">
-                      <a:solidFill>
-                        <a:srgbClr val="395E89"/>
-                      </a:solidFill>
-                      <a:prstDash val="solid"/>
-                    </a:lnT>
-                    <a:lnB w="9525" cap="flat" cmpd="sng">
-                      <a:solidFill>
-                        <a:srgbClr val="395E89"/>
-                      </a:solidFill>
-                      <a:prstDash val="solid"/>
-                    </a:lnB>
-                  </a:tcPr>
-                </a:tc>
-                <a:tc>
-                  <a:txBody>
-                    <a:bodyPr wrap="square" lIns="36576" rIns="36576" tIns="27432" bIns="27432"/>
-                    <a:lstStyle/>
-                    <a:p>
-                      <a:pPr algn="ctr">
-                        <a:spcBef>
-                          <a:spcPts val="0"/>
-                        </a:spcBef>
-                        <a:spcAft>
-                          <a:spcPts val="0"/>
-                        </a:spcAft>
-                      </a:pPr>
-                      <a:r>
-                        <a:rPr sz="1100" b="1" i="0">
-                          <a:solidFill>
-                            <a:srgbClr val="FFFFFF"/>
-                          </a:solidFill>
-                          <a:latin typeface="Arial"/>
-                          <a:ea typeface="Arial"/>
-                          <a:cs typeface="Arial"/>
-                        </a:rPr>
-                        <a:t>Dec</a:t>
-                      </a:r>
-                    </a:p>
-                  </a:txBody>
-                  <a:tcPr anchor="ctr">
-                    <a:solidFill>
-                      <a:srgbClr val="1F497D"/>
-                    </a:solidFill>
-                    <a:lnL w="9525" cap="flat" cmpd="sng">
-                      <a:solidFill>
-                        <a:srgbClr val="395E89"/>
-                      </a:solidFill>
-                      <a:prstDash val="solid"/>
-                    </a:lnL>
-                    <a:lnR w="9525" cap="flat" cmpd="sng">
-                      <a:solidFill>
-                        <a:srgbClr val="395E89"/>
-                      </a:solidFill>
-                      <a:prstDash val="solid"/>
-                    </a:lnR>
-                    <a:lnT w="9525" cap="flat" cmpd="sng">
-                      <a:solidFill>
-                        <a:srgbClr val="395E89"/>
-                      </a:solidFill>
-                      <a:prstDash val="solid"/>
-                    </a:lnT>
-                    <a:lnB w="9525" cap="flat" cmpd="sng">
-                      <a:solidFill>
-                        <a:srgbClr val="395E89"/>
-                      </a:solidFill>
-                      <a:prstDash val="solid"/>
-                    </a:lnB>
-                  </a:tcPr>
-                </a:tc>
-                <a:tc>
-                  <a:txBody>
-                    <a:bodyPr wrap="square" lIns="36576" rIns="36576" tIns="27432" bIns="27432"/>
-                    <a:lstStyle/>
-                    <a:p>
-                      <a:pPr algn="ctr">
-                        <a:spcBef>
-                          <a:spcPts val="0"/>
-                        </a:spcBef>
-                        <a:spcAft>
-                          <a:spcPts val="0"/>
-                        </a:spcAft>
-                      </a:pPr>
-                      <a:r>
-                        <a:rPr sz="1100" b="1" i="0">
-                          <a:solidFill>
-                            <a:srgbClr val="FFFFFF"/>
-                          </a:solidFill>
-                          <a:latin typeface="Arial"/>
-                          <a:ea typeface="Arial"/>
-                          <a:cs typeface="Arial"/>
-                        </a:rPr>
-                        <a:t>Jan</a:t>
-                      </a:r>
-                    </a:p>
-                  </a:txBody>
-                  <a:tcPr anchor="ctr">
-                    <a:solidFill>
-                      <a:srgbClr val="1F497D"/>
-                    </a:solidFill>
-                    <a:lnL w="9525" cap="flat" cmpd="sng">
-                      <a:solidFill>
-                        <a:srgbClr val="395E89"/>
-                      </a:solidFill>
-                      <a:prstDash val="solid"/>
-                    </a:lnL>
-                    <a:lnR w="9525" cap="flat" cmpd="sng">
-                      <a:solidFill>
-                        <a:srgbClr val="395E89"/>
-                      </a:solidFill>
-                      <a:prstDash val="solid"/>
-                    </a:lnR>
-                    <a:lnT w="9525" cap="flat" cmpd="sng">
-                      <a:solidFill>
-                        <a:srgbClr val="395E89"/>
-                      </a:solidFill>
-                      <a:prstDash val="solid"/>
-                    </a:lnT>
-                    <a:lnB w="9525" cap="flat" cmpd="sng">
-                      <a:solidFill>
-                        <a:srgbClr val="395E89"/>
-                      </a:solidFill>
-                      <a:prstDash val="solid"/>
-                    </a:lnB>
-                  </a:tcPr>
-                </a:tc>
-              </a:tr>
-              <a:tr h="208483">
-                <a:tc>
-                  <a:txBody>
-                    <a:bodyPr wrap="square" lIns="36576" rIns="36576" tIns="27432" bIns="27432"/>
-                    <a:lstStyle/>
-                    <a:p>
-                      <a:pPr algn="l">
-                        <a:spcBef>
-                          <a:spcPts val="0"/>
-                        </a:spcBef>
-                        <a:spcAft>
-                          <a:spcPts val="0"/>
-                        </a:spcAft>
-                      </a:pPr>
-                      <a:r>
-                        <a:rPr sz="1100" b="1" i="0">
-                          <a:solidFill>
-                            <a:srgbClr val="222222"/>
-                          </a:solidFill>
-                          <a:latin typeface="Arial"/>
-                          <a:ea typeface="Arial"/>
-                          <a:cs typeface="Arial"/>
-                        </a:rPr>
-                        <a:t>Faster middle insert</a:t>
-                      </a:r>
-                    </a:p>
-                  </a:txBody>
-                  <a:tcPr anchor="ctr">
-                    <a:solidFill>
-                      <a:srgbClr val="F3F6FA"/>
-                    </a:solidFill>
-                    <a:lnL w="9525" cap="flat" cmpd="sng">
-                      <a:solidFill>
-                        <a:srgbClr val="395E89"/>
-                      </a:solidFill>
-                      <a:prstDash val="solid"/>
-                    </a:lnL>
-                    <a:lnR w="9525" cap="flat" cmpd="sng">
-                      <a:solidFill>
-                        <a:srgbClr val="395E89"/>
-                      </a:solidFill>
-                      <a:prstDash val="solid"/>
-                    </a:lnR>
-                    <a:lnT w="9525" cap="flat" cmpd="sng">
-                      <a:solidFill>
-                        <a:srgbClr val="395E89"/>
-                      </a:solidFill>
-                      <a:prstDash val="solid"/>
-                    </a:lnT>
-                    <a:lnB w="9525" cap="flat" cmpd="sng">
-                      <a:solidFill>
-                        <a:srgbClr val="395E89"/>
-                      </a:solidFill>
-                      <a:prstDash val="solid"/>
-                    </a:lnB>
-                  </a:tcPr>
-                </a:tc>
-                <a:tc>
-                  <a:txBody>
-                    <a:bodyPr wrap="square" lIns="36576" rIns="36576" tIns="27432" bIns="27432"/>
-                    <a:lstStyle/>
-                    <a:p>
-                      <a:pPr algn="ctr">
-                        <a:spcBef>
-                          <a:spcPts val="0"/>
-                        </a:spcBef>
-                        <a:spcAft>
-                          <a:spcPts val="0"/>
-                        </a:spcAft>
-                      </a:pPr>
-                      <a:r>
-                        <a:rPr sz="1100" b="1" i="0">
-                          <a:solidFill>
-                            <a:srgbClr val="1F497D"/>
-                          </a:solidFill>
-                          <a:latin typeface="Arial"/>
-                          <a:ea typeface="Arial"/>
-                          <a:cs typeface="Arial"/>
-                        </a:rPr>
-                        <a:t>■</a:t>
-                      </a:r>
-                    </a:p>
-                  </a:txBody>
-                  <a:tcPr anchor="ctr">
-                    <a:solidFill>
-                      <a:srgbClr val="F3F6FA"/>
-                    </a:solidFill>
-                    <a:lnL w="9525" cap="flat" cmpd="sng">
-                      <a:solidFill>
-                        <a:srgbClr val="395E89"/>
-                      </a:solidFill>
-                      <a:prstDash val="solid"/>
-                    </a:lnL>
-                    <a:lnR w="9525" cap="flat" cmpd="sng">
-                      <a:solidFill>
-                        <a:srgbClr val="395E89"/>
-                      </a:solidFill>
-                      <a:prstDash val="solid"/>
-                    </a:lnR>
-                    <a:lnT w="9525" cap="flat" cmpd="sng">
-                      <a:solidFill>
-                        <a:srgbClr val="395E89"/>
-                      </a:solidFill>
-                      <a:prstDash val="solid"/>
-                    </a:lnT>
-                    <a:lnB w="9525" cap="flat" cmpd="sng">
-                      <a:solidFill>
-                        <a:srgbClr val="395E89"/>
-                      </a:solidFill>
-                      <a:prstDash val="solid"/>
-                    </a:lnB>
-                  </a:tcPr>
-                </a:tc>
-                <a:tc>
-                  <a:txBody>
-                    <a:bodyPr wrap="square" lIns="36576" rIns="36576" tIns="27432" bIns="27432"/>
-                    <a:lstStyle/>
-                    <a:p>
-                      <a:pPr algn="ctr">
-                        <a:spcBef>
-                          <a:spcPts val="0"/>
-                        </a:spcBef>
-                        <a:spcAft>
-                          <a:spcPts val="0"/>
-                        </a:spcAft>
-                      </a:pPr>
-                      <a:r>
-                        <a:rPr sz="1100" b="0" i="0">
-                          <a:solidFill>
-                            <a:srgbClr val="222222"/>
-                          </a:solidFill>
-                          <a:latin typeface="Arial"/>
-                          <a:ea typeface="Arial"/>
-                          <a:cs typeface="Arial"/>
-                        </a:rPr>
-                        <a:t/>
-                      </a:r>
-                    </a:p>
-                  </a:txBody>
-                  <a:tcPr anchor="ctr">
-                    <a:solidFill>
-                      <a:srgbClr val="F3F6FA"/>
-                    </a:solidFill>
-                    <a:lnL w="9525" cap="flat" cmpd="sng">
-                      <a:solidFill>
-                        <a:srgbClr val="395E89"/>
-                      </a:solidFill>
-                      <a:prstDash val="solid"/>
-                    </a:lnL>
-                    <a:lnR w="9525" cap="flat" cmpd="sng">
-                      <a:solidFill>
-                        <a:srgbClr val="395E89"/>
-                      </a:solidFill>
-                      <a:prstDash val="solid"/>
-                    </a:lnR>
-                    <a:lnT w="9525" cap="flat" cmpd="sng">
-                      <a:solidFill>
-                        <a:srgbClr val="395E89"/>
-                      </a:solidFill>
-                      <a:prstDash val="solid"/>
-                    </a:lnT>
-                    <a:lnB w="9525" cap="flat" cmpd="sng">
-                      <a:solidFill>
-                        <a:srgbClr val="395E89"/>
-                      </a:solidFill>
-                      <a:prstDash val="solid"/>
-                    </a:lnB>
-                  </a:tcPr>
-                </a:tc>
-                <a:tc>
-                  <a:txBody>
-                    <a:bodyPr wrap="square" lIns="36576" rIns="36576" tIns="27432" bIns="27432"/>
-                    <a:lstStyle/>
-                    <a:p>
-                      <a:pPr algn="ctr">
-                        <a:spcBef>
-                          <a:spcPts val="0"/>
-                        </a:spcBef>
-                        <a:spcAft>
-                          <a:spcPts val="0"/>
-                        </a:spcAft>
-                      </a:pPr>
-                      <a:r>
-                        <a:rPr sz="1100" b="0" i="0">
-                          <a:solidFill>
-                            <a:srgbClr val="222222"/>
-                          </a:solidFill>
-                          <a:latin typeface="Arial"/>
-                          <a:ea typeface="Arial"/>
-                          <a:cs typeface="Arial"/>
-                        </a:rPr>
-                        <a:t/>
-                      </a:r>
-                    </a:p>
-                  </a:txBody>
-                  <a:tcPr anchor="ctr">
-                    <a:solidFill>
-                      <a:srgbClr val="F3F6FA"/>
-                    </a:solidFill>
-                    <a:lnL w="9525" cap="flat" cmpd="sng">
-                      <a:solidFill>
-                        <a:srgbClr val="395E89"/>
-                      </a:solidFill>
-                      <a:prstDash val="solid"/>
-                    </a:lnL>
-                    <a:lnR w="9525" cap="flat" cmpd="sng">
-                      <a:solidFill>
-                        <a:srgbClr val="395E89"/>
-                      </a:solidFill>
-                      <a:prstDash val="solid"/>
-                    </a:lnR>
-                    <a:lnT w="9525" cap="flat" cmpd="sng">
-                      <a:solidFill>
-                        <a:srgbClr val="395E89"/>
-                      </a:solidFill>
-                      <a:prstDash val="solid"/>
-                    </a:lnT>
-                    <a:lnB w="9525" cap="flat" cmpd="sng">
-                      <a:solidFill>
-                        <a:srgbClr val="395E89"/>
-                      </a:solidFill>
-                      <a:prstDash val="solid"/>
-                    </a:lnB>
-                  </a:tcPr>
-                </a:tc>
-                <a:tc>
-                  <a:txBody>
-                    <a:bodyPr wrap="square" lIns="36576" rIns="36576" tIns="27432" bIns="27432"/>
-                    <a:lstStyle/>
-                    <a:p>
-                      <a:pPr algn="ctr">
-                        <a:spcBef>
-                          <a:spcPts val="0"/>
-                        </a:spcBef>
-                        <a:spcAft>
-                          <a:spcPts val="0"/>
-                        </a:spcAft>
-                      </a:pPr>
-                      <a:r>
-                        <a:rPr sz="1100" b="0" i="0">
-                          <a:solidFill>
-                            <a:srgbClr val="222222"/>
-                          </a:solidFill>
-                          <a:latin typeface="Arial"/>
-                          <a:ea typeface="Arial"/>
-                          <a:cs typeface="Arial"/>
-                        </a:rPr>
-                        <a:t/>
-                      </a:r>
-                    </a:p>
-                  </a:txBody>
-                  <a:tcPr anchor="ctr">
-                    <a:solidFill>
-                      <a:srgbClr val="F3F6FA"/>
-                    </a:solidFill>
-                    <a:lnL w="9525" cap="flat" cmpd="sng">
-                      <a:solidFill>
-                        <a:srgbClr val="395E89"/>
-                      </a:solidFill>
-                      <a:prstDash val="solid"/>
-                    </a:lnL>
-                    <a:lnR w="9525" cap="flat" cmpd="sng">
-                      <a:solidFill>
-                        <a:srgbClr val="395E89"/>
-                      </a:solidFill>
-                      <a:prstDash val="solid"/>
-                    </a:lnR>
-                    <a:lnT w="9525" cap="flat" cmpd="sng">
-                      <a:solidFill>
-                        <a:srgbClr val="395E89"/>
-                      </a:solidFill>
-                      <a:prstDash val="solid"/>
-                    </a:lnT>
-                    <a:lnB w="9525" cap="flat" cmpd="sng">
-                      <a:solidFill>
-                        <a:srgbClr val="395E89"/>
-                      </a:solidFill>
-                      <a:prstDash val="solid"/>
-                    </a:lnB>
-                  </a:tcPr>
-                </a:tc>
-              </a:tr>
-              <a:tr h="208483">
-                <a:tc>
-                  <a:txBody>
-                    <a:bodyPr wrap="square" lIns="36576" rIns="36576" tIns="27432" bIns="27432"/>
-                    <a:lstStyle/>
-                    <a:p>
-                      <a:pPr algn="l">
-                        <a:spcBef>
-                          <a:spcPts val="0"/>
-                        </a:spcBef>
-                        <a:spcAft>
-                          <a:spcPts val="0"/>
-                        </a:spcAft>
-                      </a:pPr>
-                      <a:r>
-                        <a:rPr sz="1100" b="1" i="0">
-                          <a:solidFill>
-                            <a:srgbClr val="222222"/>
-                          </a:solidFill>
-                          <a:latin typeface="Arial"/>
-                          <a:ea typeface="Arial"/>
-                          <a:cs typeface="Arial"/>
-                        </a:rPr>
-                        <a:t>Memory-safe long runs</a:t>
-                      </a:r>
-                    </a:p>
-                  </a:txBody>
-                  <a:tcPr anchor="ctr">
-                    <a:solidFill>
-                      <a:srgbClr val="FFFFFF"/>
-                    </a:solidFill>
-                    <a:lnL w="9525" cap="flat" cmpd="sng">
-                      <a:solidFill>
-                        <a:srgbClr val="395E89"/>
-                      </a:solidFill>
-                      <a:prstDash val="solid"/>
-                    </a:lnL>
-                    <a:lnR w="9525" cap="flat" cmpd="sng">
-                      <a:solidFill>
-                        <a:srgbClr val="395E89"/>
-                      </a:solidFill>
-                      <a:prstDash val="solid"/>
-                    </a:lnR>
-                    <a:lnT w="9525" cap="flat" cmpd="sng">
-                      <a:solidFill>
-                        <a:srgbClr val="395E89"/>
-                      </a:solidFill>
-                      <a:prstDash val="solid"/>
-                    </a:lnT>
-                    <a:lnB w="9525" cap="flat" cmpd="sng">
-                      <a:solidFill>
-                        <a:srgbClr val="395E89"/>
-                      </a:solidFill>
-                      <a:prstDash val="solid"/>
-                    </a:lnB>
-                  </a:tcPr>
-                </a:tc>
-                <a:tc>
-                  <a:txBody>
-                    <a:bodyPr wrap="square" lIns="36576" rIns="36576" tIns="27432" bIns="27432"/>
-                    <a:lstStyle/>
-                    <a:p>
-                      <a:pPr algn="ctr">
-                        <a:spcBef>
-                          <a:spcPts val="0"/>
-                        </a:spcBef>
-                        <a:spcAft>
-                          <a:spcPts val="0"/>
-                        </a:spcAft>
-                      </a:pPr>
-                      <a:r>
-                        <a:rPr sz="1100" b="0" i="0">
-                          <a:solidFill>
-                            <a:srgbClr val="222222"/>
-                          </a:solidFill>
-                          <a:latin typeface="Arial"/>
-                          <a:ea typeface="Arial"/>
-                          <a:cs typeface="Arial"/>
-                        </a:rPr>
-                        <a:t/>
-                      </a:r>
-                    </a:p>
-                  </a:txBody>
-                  <a:tcPr anchor="ctr">
-                    <a:solidFill>
-                      <a:srgbClr val="FFFFFF"/>
-                    </a:solidFill>
-                    <a:lnL w="9525" cap="flat" cmpd="sng">
-                      <a:solidFill>
-                        <a:srgbClr val="395E89"/>
-                      </a:solidFill>
-                      <a:prstDash val="solid"/>
-                    </a:lnL>
-                    <a:lnR w="9525" cap="flat" cmpd="sng">
-                      <a:solidFill>
-                        <a:srgbClr val="395E89"/>
-                      </a:solidFill>
-                      <a:prstDash val="solid"/>
-                    </a:lnR>
-                    <a:lnT w="9525" cap="flat" cmpd="sng">
-                      <a:solidFill>
-                        <a:srgbClr val="395E89"/>
-                      </a:solidFill>
-                      <a:prstDash val="solid"/>
-                    </a:lnT>
-                    <a:lnB w="9525" cap="flat" cmpd="sng">
-                      <a:solidFill>
-                        <a:srgbClr val="395E89"/>
-                      </a:solidFill>
-                      <a:prstDash val="solid"/>
-                    </a:lnB>
-                  </a:tcPr>
-                </a:tc>
-                <a:tc>
-                  <a:txBody>
-                    <a:bodyPr wrap="square" lIns="36576" rIns="36576" tIns="27432" bIns="27432"/>
-                    <a:lstStyle/>
-                    <a:p>
-                      <a:pPr algn="ctr">
-                        <a:spcBef>
-                          <a:spcPts val="0"/>
-                        </a:spcBef>
-                        <a:spcAft>
-                          <a:spcPts val="0"/>
-                        </a:spcAft>
-                      </a:pPr>
-                      <a:r>
-                        <a:rPr sz="1100" b="1" i="0">
-                          <a:solidFill>
-                            <a:srgbClr val="1F497D"/>
-                          </a:solidFill>
-                          <a:latin typeface="Arial"/>
-                          <a:ea typeface="Arial"/>
-                          <a:cs typeface="Arial"/>
-                        </a:rPr>
-                        <a:t>■</a:t>
-                      </a:r>
-                    </a:p>
-                  </a:txBody>
-                  <a:tcPr anchor="ctr">
-                    <a:solidFill>
-                      <a:srgbClr val="FFFFFF"/>
-                    </a:solidFill>
-                    <a:lnL w="9525" cap="flat" cmpd="sng">
-                      <a:solidFill>
-                        <a:srgbClr val="395E89"/>
-                      </a:solidFill>
-                      <a:prstDash val="solid"/>
-                    </a:lnL>
-                    <a:lnR w="9525" cap="flat" cmpd="sng">
-                      <a:solidFill>
-                        <a:srgbClr val="395E89"/>
-                      </a:solidFill>
-                      <a:prstDash val="solid"/>
-                    </a:lnR>
-                    <a:lnT w="9525" cap="flat" cmpd="sng">
-                      <a:solidFill>
-                        <a:srgbClr val="395E89"/>
-                      </a:solidFill>
-                      <a:prstDash val="solid"/>
-                    </a:lnT>
-                    <a:lnB w="9525" cap="flat" cmpd="sng">
-                      <a:solidFill>
-                        <a:srgbClr val="395E89"/>
-                      </a:solidFill>
-                      <a:prstDash val="solid"/>
-                    </a:lnB>
-                  </a:tcPr>
-                </a:tc>
-                <a:tc>
-                  <a:txBody>
-                    <a:bodyPr wrap="square" lIns="36576" rIns="36576" tIns="27432" bIns="27432"/>
-                    <a:lstStyle/>
-                    <a:p>
-                      <a:pPr algn="ctr">
-                        <a:spcBef>
-                          <a:spcPts val="0"/>
-                        </a:spcBef>
-                        <a:spcAft>
-                          <a:spcPts val="0"/>
-                        </a:spcAft>
-                      </a:pPr>
-                      <a:r>
-                        <a:rPr sz="1100" b="0" i="0">
-                          <a:solidFill>
-                            <a:srgbClr val="222222"/>
-                          </a:solidFill>
-                          <a:latin typeface="Arial"/>
-                          <a:ea typeface="Arial"/>
-                          <a:cs typeface="Arial"/>
-                        </a:rPr>
-                        <a:t/>
-                      </a:r>
-                    </a:p>
-                  </a:txBody>
-                  <a:tcPr anchor="ctr">
-                    <a:solidFill>
-                      <a:srgbClr val="FFFFFF"/>
-                    </a:solidFill>
-                    <a:lnL w="9525" cap="flat" cmpd="sng">
-                      <a:solidFill>
-                        <a:srgbClr val="395E89"/>
-                      </a:solidFill>
-                      <a:prstDash val="solid"/>
-                    </a:lnL>
-                    <a:lnR w="9525" cap="flat" cmpd="sng">
-                      <a:solidFill>
-                        <a:srgbClr val="395E89"/>
-                      </a:solidFill>
-                      <a:prstDash val="solid"/>
-                    </a:lnR>
-                    <a:lnT w="9525" cap="flat" cmpd="sng">
-                      <a:solidFill>
-                        <a:srgbClr val="395E89"/>
-                      </a:solidFill>
-                      <a:prstDash val="solid"/>
-                    </a:lnT>
-                    <a:lnB w="9525" cap="flat" cmpd="sng">
-                      <a:solidFill>
-                        <a:srgbClr val="395E89"/>
-                      </a:solidFill>
-                      <a:prstDash val="solid"/>
-                    </a:lnB>
-                  </a:tcPr>
-                </a:tc>
-                <a:tc>
-                  <a:txBody>
-                    <a:bodyPr wrap="square" lIns="36576" rIns="36576" tIns="27432" bIns="27432"/>
-                    <a:lstStyle/>
-                    <a:p>
-                      <a:pPr algn="ctr">
-                        <a:spcBef>
-                          <a:spcPts val="0"/>
-                        </a:spcBef>
-                        <a:spcAft>
-                          <a:spcPts val="0"/>
-                        </a:spcAft>
-                      </a:pPr>
-                      <a:r>
-                        <a:rPr sz="1100" b="0" i="0">
-                          <a:solidFill>
-                            <a:srgbClr val="222222"/>
-                          </a:solidFill>
-                          <a:latin typeface="Arial"/>
-                          <a:ea typeface="Arial"/>
-                          <a:cs typeface="Arial"/>
-                        </a:rPr>
-                        <a:t/>
-                      </a:r>
-                    </a:p>
-                  </a:txBody>
-                  <a:tcPr anchor="ctr">
-                    <a:solidFill>
-                      <a:srgbClr val="FFFFFF"/>
-                    </a:solidFill>
-                    <a:lnL w="9525" cap="flat" cmpd="sng">
-                      <a:solidFill>
-                        <a:srgbClr val="395E89"/>
-                      </a:solidFill>
-                      <a:prstDash val="solid"/>
-                    </a:lnL>
-                    <a:lnR w="9525" cap="flat" cmpd="sng">
-                      <a:solidFill>
-                        <a:srgbClr val="395E89"/>
-                      </a:solidFill>
-                      <a:prstDash val="solid"/>
-                    </a:lnR>
-                    <a:lnT w="9525" cap="flat" cmpd="sng">
-                      <a:solidFill>
-                        <a:srgbClr val="395E89"/>
-                      </a:solidFill>
-                      <a:prstDash val="solid"/>
-                    </a:lnT>
-                    <a:lnB w="9525" cap="flat" cmpd="sng">
-                      <a:solidFill>
-                        <a:srgbClr val="395E89"/>
-                      </a:solidFill>
-                      <a:prstDash val="solid"/>
-                    </a:lnB>
-                  </a:tcPr>
-                </a:tc>
-              </a:tr>
-              <a:tr h="208483">
-                <a:tc>
-                  <a:txBody>
-                    <a:bodyPr wrap="square" lIns="36576" rIns="36576" tIns="27432" bIns="27432"/>
-                    <a:lstStyle/>
-                    <a:p>
-                      <a:pPr algn="l">
-                        <a:spcBef>
-                          <a:spcPts val="0"/>
-                        </a:spcBef>
-                        <a:spcAft>
-                          <a:spcPts val="0"/>
-                        </a:spcAft>
-                      </a:pPr>
-                      <a:r>
-                        <a:rPr sz="1100" b="1" i="0">
-                          <a:solidFill>
-                            <a:srgbClr val="222222"/>
-                          </a:solidFill>
-                          <a:latin typeface="Arial"/>
-                          <a:ea typeface="Arial"/>
-                          <a:cs typeface="Arial"/>
-                        </a:rPr>
-                        <a:t>On-screen explanations</a:t>
-                      </a:r>
-                    </a:p>
-                  </a:txBody>
-                  <a:tcPr anchor="ctr">
-                    <a:solidFill>
-                      <a:srgbClr val="F3F6FA"/>
-                    </a:solidFill>
-                    <a:lnL w="9525" cap="flat" cmpd="sng">
-                      <a:solidFill>
-                        <a:srgbClr val="395E89"/>
-                      </a:solidFill>
-                      <a:prstDash val="solid"/>
-                    </a:lnL>
-                    <a:lnR w="9525" cap="flat" cmpd="sng">
-                      <a:solidFill>
-                        <a:srgbClr val="395E89"/>
-                      </a:solidFill>
-                      <a:prstDash val="solid"/>
-                    </a:lnR>
-                    <a:lnT w="9525" cap="flat" cmpd="sng">
-                      <a:solidFill>
-                        <a:srgbClr val="395E89"/>
-                      </a:solidFill>
-                      <a:prstDash val="solid"/>
-                    </a:lnT>
-                    <a:lnB w="9525" cap="flat" cmpd="sng">
-                      <a:solidFill>
-                        <a:srgbClr val="395E89"/>
-                      </a:solidFill>
-                      <a:prstDash val="solid"/>
-                    </a:lnB>
-                  </a:tcPr>
-                </a:tc>
-                <a:tc>
-                  <a:txBody>
-                    <a:bodyPr wrap="square" lIns="36576" rIns="36576" tIns="27432" bIns="27432"/>
-                    <a:lstStyle/>
-                    <a:p>
-                      <a:pPr algn="ctr">
-                        <a:spcBef>
-                          <a:spcPts val="0"/>
-                        </a:spcBef>
-                        <a:spcAft>
-                          <a:spcPts val="0"/>
-                        </a:spcAft>
-                      </a:pPr>
-                      <a:r>
-                        <a:rPr sz="1100" b="0" i="0">
-                          <a:solidFill>
-                            <a:srgbClr val="222222"/>
-                          </a:solidFill>
-                          <a:latin typeface="Arial"/>
-                          <a:ea typeface="Arial"/>
-                          <a:cs typeface="Arial"/>
-                        </a:rPr>
-                        <a:t/>
-                      </a:r>
-                    </a:p>
-                  </a:txBody>
-                  <a:tcPr anchor="ctr">
-                    <a:solidFill>
-                      <a:srgbClr val="F3F6FA"/>
-                    </a:solidFill>
-                    <a:lnL w="9525" cap="flat" cmpd="sng">
-                      <a:solidFill>
-                        <a:srgbClr val="395E89"/>
-                      </a:solidFill>
-                      <a:prstDash val="solid"/>
-                    </a:lnL>
-                    <a:lnR w="9525" cap="flat" cmpd="sng">
-                      <a:solidFill>
-                        <a:srgbClr val="395E89"/>
-                      </a:solidFill>
-                      <a:prstDash val="solid"/>
-                    </a:lnR>
-                    <a:lnT w="9525" cap="flat" cmpd="sng">
-                      <a:solidFill>
-                        <a:srgbClr val="395E89"/>
-                      </a:solidFill>
-                      <a:prstDash val="solid"/>
-                    </a:lnT>
-                    <a:lnB w="9525" cap="flat" cmpd="sng">
-                      <a:solidFill>
-                        <a:srgbClr val="395E89"/>
-                      </a:solidFill>
-                      <a:prstDash val="solid"/>
-                    </a:lnB>
-                  </a:tcPr>
-                </a:tc>
-                <a:tc>
-                  <a:txBody>
-                    <a:bodyPr wrap="square" lIns="36576" rIns="36576" tIns="27432" bIns="27432"/>
-                    <a:lstStyle/>
-                    <a:p>
-                      <a:pPr algn="ctr">
-                        <a:spcBef>
-                          <a:spcPts val="0"/>
-                        </a:spcBef>
-                        <a:spcAft>
-                          <a:spcPts val="0"/>
-                        </a:spcAft>
-                      </a:pPr>
-                      <a:r>
-                        <a:rPr sz="1100" b="0" i="0">
-                          <a:solidFill>
-                            <a:srgbClr val="222222"/>
-                          </a:solidFill>
-                          <a:latin typeface="Arial"/>
-                          <a:ea typeface="Arial"/>
-                          <a:cs typeface="Arial"/>
-                        </a:rPr>
-                        <a:t/>
-                      </a:r>
-                    </a:p>
-                  </a:txBody>
-                  <a:tcPr anchor="ctr">
-                    <a:solidFill>
-                      <a:srgbClr val="F3F6FA"/>
-                    </a:solidFill>
-                    <a:lnL w="9525" cap="flat" cmpd="sng">
-                      <a:solidFill>
-                        <a:srgbClr val="395E89"/>
-                      </a:solidFill>
-                      <a:prstDash val="solid"/>
-                    </a:lnL>
-                    <a:lnR w="9525" cap="flat" cmpd="sng">
-                      <a:solidFill>
-                        <a:srgbClr val="395E89"/>
-                      </a:solidFill>
-                      <a:prstDash val="solid"/>
-                    </a:lnR>
-                    <a:lnT w="9525" cap="flat" cmpd="sng">
-                      <a:solidFill>
-                        <a:srgbClr val="395E89"/>
-                      </a:solidFill>
-                      <a:prstDash val="solid"/>
-                    </a:lnT>
-                    <a:lnB w="9525" cap="flat" cmpd="sng">
-                      <a:solidFill>
-                        <a:srgbClr val="395E89"/>
-                      </a:solidFill>
-                      <a:prstDash val="solid"/>
-                    </a:lnB>
-                  </a:tcPr>
-                </a:tc>
-                <a:tc>
-                  <a:txBody>
-                    <a:bodyPr wrap="square" lIns="36576" rIns="36576" tIns="27432" bIns="27432"/>
-                    <a:lstStyle/>
-                    <a:p>
-                      <a:pPr algn="ctr">
-                        <a:spcBef>
-                          <a:spcPts val="0"/>
-                        </a:spcBef>
-                        <a:spcAft>
-                          <a:spcPts val="0"/>
-                        </a:spcAft>
-                      </a:pPr>
-                      <a:r>
-                        <a:rPr sz="1100" b="1" i="0">
-                          <a:solidFill>
-                            <a:srgbClr val="1F497D"/>
-                          </a:solidFill>
-                          <a:latin typeface="Arial"/>
-                          <a:ea typeface="Arial"/>
-                          <a:cs typeface="Arial"/>
-                        </a:rPr>
-                        <a:t>■</a:t>
-                      </a:r>
-                    </a:p>
-                  </a:txBody>
-                  <a:tcPr anchor="ctr">
-                    <a:solidFill>
-                      <a:srgbClr val="F3F6FA"/>
-                    </a:solidFill>
-                    <a:lnL w="9525" cap="flat" cmpd="sng">
-                      <a:solidFill>
-                        <a:srgbClr val="395E89"/>
-                      </a:solidFill>
-                      <a:prstDash val="solid"/>
-                    </a:lnL>
-                    <a:lnR w="9525" cap="flat" cmpd="sng">
-                      <a:solidFill>
-                        <a:srgbClr val="395E89"/>
-                      </a:solidFill>
-                      <a:prstDash val="solid"/>
-                    </a:lnR>
-                    <a:lnT w="9525" cap="flat" cmpd="sng">
-                      <a:solidFill>
-                        <a:srgbClr val="395E89"/>
-                      </a:solidFill>
-                      <a:prstDash val="solid"/>
-                    </a:lnT>
-                    <a:lnB w="9525" cap="flat" cmpd="sng">
-                      <a:solidFill>
-                        <a:srgbClr val="395E89"/>
-                      </a:solidFill>
-                      <a:prstDash val="solid"/>
-                    </a:lnB>
-                  </a:tcPr>
-                </a:tc>
-                <a:tc>
-                  <a:txBody>
-                    <a:bodyPr wrap="square" lIns="36576" rIns="36576" tIns="27432" bIns="27432"/>
-                    <a:lstStyle/>
-                    <a:p>
-                      <a:pPr algn="ctr">
-                        <a:spcBef>
-                          <a:spcPts val="0"/>
-                        </a:spcBef>
-                        <a:spcAft>
-                          <a:spcPts val="0"/>
-                        </a:spcAft>
-                      </a:pPr>
-                      <a:r>
-                        <a:rPr sz="1100" b="0" i="0">
-                          <a:solidFill>
-                            <a:srgbClr val="222222"/>
-                          </a:solidFill>
-                          <a:latin typeface="Arial"/>
-                          <a:ea typeface="Arial"/>
-                          <a:cs typeface="Arial"/>
-                        </a:rPr>
-                        <a:t/>
-                      </a:r>
-                    </a:p>
-                  </a:txBody>
-                  <a:tcPr anchor="ctr">
-                    <a:solidFill>
-                      <a:srgbClr val="F3F6FA"/>
-                    </a:solidFill>
-                    <a:lnL w="9525" cap="flat" cmpd="sng">
-                      <a:solidFill>
-                        <a:srgbClr val="395E89"/>
-                      </a:solidFill>
-                      <a:prstDash val="solid"/>
-                    </a:lnL>
-                    <a:lnR w="9525" cap="flat" cmpd="sng">
-                      <a:solidFill>
-                        <a:srgbClr val="395E89"/>
-                      </a:solidFill>
-                      <a:prstDash val="solid"/>
-                    </a:lnR>
-                    <a:lnT w="9525" cap="flat" cmpd="sng">
-                      <a:solidFill>
-                        <a:srgbClr val="395E89"/>
-                      </a:solidFill>
-                      <a:prstDash val="solid"/>
-                    </a:lnT>
-                    <a:lnB w="9525" cap="flat" cmpd="sng">
-                      <a:solidFill>
-                        <a:srgbClr val="395E89"/>
-                      </a:solidFill>
-                      <a:prstDash val="solid"/>
-                    </a:lnB>
-                  </a:tcPr>
-                </a:tc>
-              </a:tr>
-              <a:tr h="208483">
-                <a:tc>
-                  <a:txBody>
-                    <a:bodyPr wrap="square" lIns="36576" rIns="36576" tIns="27432" bIns="27432"/>
-                    <a:lstStyle/>
-                    <a:p>
-                      <a:pPr algn="l">
-                        <a:spcBef>
-                          <a:spcPts val="0"/>
-                        </a:spcBef>
-                        <a:spcAft>
-                          <a:spcPts val="0"/>
-                        </a:spcAft>
-                      </a:pPr>
-                      <a:r>
-                        <a:rPr sz="1100" b="1" i="0">
-                          <a:solidFill>
-                            <a:srgbClr val="222222"/>
-                          </a:solidFill>
-                          <a:latin typeface="Arial"/>
-                          <a:ea typeface="Arial"/>
-                          <a:cs typeface="Arial"/>
-                        </a:rPr>
-                        <a:t>Thesis draft and demo</a:t>
-                      </a:r>
-                    </a:p>
-                  </a:txBody>
-                  <a:tcPr anchor="ctr">
-                    <a:solidFill>
-                      <a:srgbClr val="FFFFFF"/>
-                    </a:solidFill>
-                    <a:lnL w="9525" cap="flat" cmpd="sng">
-                      <a:solidFill>
-                        <a:srgbClr val="395E89"/>
-                      </a:solidFill>
-                      <a:prstDash val="solid"/>
-                    </a:lnL>
-                    <a:lnR w="9525" cap="flat" cmpd="sng">
-                      <a:solidFill>
-                        <a:srgbClr val="395E89"/>
-                      </a:solidFill>
-                      <a:prstDash val="solid"/>
-                    </a:lnR>
-                    <a:lnT w="9525" cap="flat" cmpd="sng">
-                      <a:solidFill>
-                        <a:srgbClr val="395E89"/>
-                      </a:solidFill>
-                      <a:prstDash val="solid"/>
-                    </a:lnT>
-                    <a:lnB w="9525" cap="flat" cmpd="sng">
-                      <a:solidFill>
-                        <a:srgbClr val="395E89"/>
-                      </a:solidFill>
-                      <a:prstDash val="solid"/>
-                    </a:lnB>
-                  </a:tcPr>
-                </a:tc>
-                <a:tc>
-                  <a:txBody>
-                    <a:bodyPr wrap="square" lIns="36576" rIns="36576" tIns="27432" bIns="27432"/>
-                    <a:lstStyle/>
-                    <a:p>
-                      <a:pPr algn="ctr">
-                        <a:spcBef>
-                          <a:spcPts val="0"/>
-                        </a:spcBef>
-                        <a:spcAft>
-                          <a:spcPts val="0"/>
-                        </a:spcAft>
-                      </a:pPr>
-                      <a:r>
-                        <a:rPr sz="1100" b="0" i="0">
-                          <a:solidFill>
-                            <a:srgbClr val="222222"/>
-                          </a:solidFill>
-                          <a:latin typeface="Arial"/>
-                          <a:ea typeface="Arial"/>
-                          <a:cs typeface="Arial"/>
-                        </a:rPr>
-                        <a:t/>
-                      </a:r>
-                    </a:p>
-                  </a:txBody>
-                  <a:tcPr anchor="ctr">
-                    <a:solidFill>
-                      <a:srgbClr val="FFFFFF"/>
-                    </a:solidFill>
-                    <a:lnL w="9525" cap="flat" cmpd="sng">
-                      <a:solidFill>
-                        <a:srgbClr val="395E89"/>
-                      </a:solidFill>
-                      <a:prstDash val="solid"/>
-                    </a:lnL>
-                    <a:lnR w="9525" cap="flat" cmpd="sng">
-                      <a:solidFill>
-                        <a:srgbClr val="395E89"/>
-                      </a:solidFill>
-                      <a:prstDash val="solid"/>
-                    </a:lnR>
-                    <a:lnT w="9525" cap="flat" cmpd="sng">
-                      <a:solidFill>
-                        <a:srgbClr val="395E89"/>
-                      </a:solidFill>
-                      <a:prstDash val="solid"/>
-                    </a:lnT>
-                    <a:lnB w="9525" cap="flat" cmpd="sng">
-                      <a:solidFill>
-                        <a:srgbClr val="395E89"/>
-                      </a:solidFill>
-                      <a:prstDash val="solid"/>
-                    </a:lnB>
-                  </a:tcPr>
-                </a:tc>
-                <a:tc>
-                  <a:txBody>
-                    <a:bodyPr wrap="square" lIns="36576" rIns="36576" tIns="27432" bIns="27432"/>
-                    <a:lstStyle/>
-                    <a:p>
-                      <a:pPr algn="ctr">
-                        <a:spcBef>
-                          <a:spcPts val="0"/>
-                        </a:spcBef>
-                        <a:spcAft>
-                          <a:spcPts val="0"/>
-                        </a:spcAft>
-                      </a:pPr>
-                      <a:r>
-                        <a:rPr sz="1100" b="0" i="0">
-                          <a:solidFill>
-                            <a:srgbClr val="222222"/>
-                          </a:solidFill>
-                          <a:latin typeface="Arial"/>
-                          <a:ea typeface="Arial"/>
-                          <a:cs typeface="Arial"/>
-                        </a:rPr>
-                        <a:t/>
-                      </a:r>
-                    </a:p>
-                  </a:txBody>
-                  <a:tcPr anchor="ctr">
-                    <a:solidFill>
-                      <a:srgbClr val="FFFFFF"/>
-                    </a:solidFill>
-                    <a:lnL w="9525" cap="flat" cmpd="sng">
-                      <a:solidFill>
-                        <a:srgbClr val="395E89"/>
-                      </a:solidFill>
-                      <a:prstDash val="solid"/>
-                    </a:lnL>
-                    <a:lnR w="9525" cap="flat" cmpd="sng">
-                      <a:solidFill>
-                        <a:srgbClr val="395E89"/>
-                      </a:solidFill>
-                      <a:prstDash val="solid"/>
-                    </a:lnR>
-                    <a:lnT w="9525" cap="flat" cmpd="sng">
-                      <a:solidFill>
-                        <a:srgbClr val="395E89"/>
-                      </a:solidFill>
-                      <a:prstDash val="solid"/>
-                    </a:lnT>
-                    <a:lnB w="9525" cap="flat" cmpd="sng">
-                      <a:solidFill>
-                        <a:srgbClr val="395E89"/>
-                      </a:solidFill>
-                      <a:prstDash val="solid"/>
-                    </a:lnB>
-                  </a:tcPr>
-                </a:tc>
-                <a:tc>
-                  <a:txBody>
-                    <a:bodyPr wrap="square" lIns="36576" rIns="36576" tIns="27432" bIns="27432"/>
-                    <a:lstStyle/>
-                    <a:p>
-                      <a:pPr algn="ctr">
-                        <a:spcBef>
-                          <a:spcPts val="0"/>
-                        </a:spcBef>
-                        <a:spcAft>
-                          <a:spcPts val="0"/>
-                        </a:spcAft>
-                      </a:pPr>
-                      <a:r>
-                        <a:rPr sz="1100" b="0" i="0">
-                          <a:solidFill>
-                            <a:srgbClr val="222222"/>
-                          </a:solidFill>
-                          <a:latin typeface="Arial"/>
-                          <a:ea typeface="Arial"/>
-                          <a:cs typeface="Arial"/>
-                        </a:rPr>
-                        <a:t/>
-                      </a:r>
-                    </a:p>
-                  </a:txBody>
-                  <a:tcPr anchor="ctr">
-                    <a:solidFill>
-                      <a:srgbClr val="FFFFFF"/>
-                    </a:solidFill>
-                    <a:lnL w="9525" cap="flat" cmpd="sng">
-                      <a:solidFill>
-                        <a:srgbClr val="395E89"/>
-                      </a:solidFill>
-                      <a:prstDash val="solid"/>
-                    </a:lnL>
-                    <a:lnR w="9525" cap="flat" cmpd="sng">
-                      <a:solidFill>
-                        <a:srgbClr val="395E89"/>
-                      </a:solidFill>
-                      <a:prstDash val="solid"/>
-                    </a:lnR>
-                    <a:lnT w="9525" cap="flat" cmpd="sng">
-                      <a:solidFill>
-                        <a:srgbClr val="395E89"/>
-                      </a:solidFill>
-                      <a:prstDash val="solid"/>
-                    </a:lnT>
-                    <a:lnB w="9525" cap="flat" cmpd="sng">
-                      <a:solidFill>
-                        <a:srgbClr val="395E89"/>
-                      </a:solidFill>
-                      <a:prstDash val="solid"/>
-                    </a:lnB>
-                  </a:tcPr>
-                </a:tc>
-                <a:tc>
-                  <a:txBody>
-                    <a:bodyPr wrap="square" lIns="36576" rIns="36576" tIns="27432" bIns="27432"/>
-                    <a:lstStyle/>
-                    <a:p>
-                      <a:pPr algn="ctr">
-                        <a:spcBef>
-                          <a:spcPts val="0"/>
-                        </a:spcBef>
-                        <a:spcAft>
-                          <a:spcPts val="0"/>
-                        </a:spcAft>
-                      </a:pPr>
-                      <a:r>
-                        <a:rPr sz="1100" b="1" i="0">
-                          <a:solidFill>
-                            <a:srgbClr val="1F497D"/>
-                          </a:solidFill>
-                          <a:latin typeface="Arial"/>
-                          <a:ea typeface="Arial"/>
-                          <a:cs typeface="Arial"/>
-                        </a:rPr>
-                        <a:t>■</a:t>
-                      </a:r>
-                    </a:p>
-                  </a:txBody>
-                  <a:tcPr anchor="ctr">
-                    <a:solidFill>
-                      <a:srgbClr val="FFFFFF"/>
-                    </a:solidFill>
-                    <a:lnL w="9525" cap="flat" cmpd="sng">
-                      <a:solidFill>
-                        <a:srgbClr val="395E89"/>
-                      </a:solidFill>
-                      <a:prstDash val="solid"/>
-                    </a:lnL>
-                    <a:lnR w="9525" cap="flat" cmpd="sng">
-                      <a:solidFill>
-                        <a:srgbClr val="395E89"/>
-                      </a:solidFill>
-                      <a:prstDash val="solid"/>
-                    </a:lnR>
-                    <a:lnT w="9525" cap="flat" cmpd="sng">
-                      <a:solidFill>
-                        <a:srgbClr val="395E89"/>
-                      </a:solidFill>
-                      <a:prstDash val="solid"/>
-                    </a:lnT>
-                    <a:lnB w="9525" cap="flat" cmpd="sng">
-                      <a:solidFill>
-                        <a:srgbClr val="395E89"/>
-                      </a:solidFill>
-                      <a:prstDash val="solid"/>
-                    </a:lnB>
-                  </a:tcPr>
-                </a:tc>
-              </a:tr>
-            </a:tbl>
-          </a:graphicData>
-        </a:graphic>
-      </p:graphicFrame>
+              <a:t>Schedule, Oct 2026 – Jan 2027</a:t>
+            </a:r>
+          </a:p>
+          <a:p>
+            <a:pPr algn="l">
+              <a:lnSpc>
+                <a:spcPct val="112000"/>
+              </a:lnSpc>
+              <a:spcBef>
+                <a:spcPts val="0"/>
+              </a:spcBef>
+              <a:spcAft>
+                <a:spcPts val="100"/>
+              </a:spcAft>
+            </a:pPr>
+            <a:r>
+              <a:rPr sz="1300" b="0" i="0">
+                <a:solidFill>
+                  <a:srgbClr val="222222"/>
+                </a:solidFill>
+                <a:latin typeface="Arial"/>
+                <a:ea typeface="Arial"/>
+                <a:cs typeface="Arial"/>
+              </a:rPr>
+              <a:t>•  Oct — faster middle insert</a:t>
+            </a:r>
+          </a:p>
+          <a:p>
+            <a:pPr algn="l">
+              <a:lnSpc>
+                <a:spcPct val="112000"/>
+              </a:lnSpc>
+              <a:spcBef>
+                <a:spcPts val="0"/>
+              </a:spcBef>
+              <a:spcAft>
+                <a:spcPts val="100"/>
+              </a:spcAft>
+            </a:pPr>
+            <a:r>
+              <a:rPr sz="1300" b="0" i="0">
+                <a:solidFill>
+                  <a:srgbClr val="222222"/>
+                </a:solidFill>
+                <a:latin typeface="Arial"/>
+                <a:ea typeface="Arial"/>
+                <a:cs typeface="Arial"/>
+              </a:rPr>
+              <a:t>•  Nov — memory-safe long runs</a:t>
+            </a:r>
+          </a:p>
+          <a:p>
+            <a:pPr algn="l">
+              <a:lnSpc>
+                <a:spcPct val="112000"/>
+              </a:lnSpc>
+              <a:spcBef>
+                <a:spcPts val="0"/>
+              </a:spcBef>
+              <a:spcAft>
+                <a:spcPts val="100"/>
+              </a:spcAft>
+            </a:pPr>
+            <a:r>
+              <a:rPr sz="1300" b="0" i="0">
+                <a:solidFill>
+                  <a:srgbClr val="222222"/>
+                </a:solidFill>
+                <a:latin typeface="Arial"/>
+                <a:ea typeface="Arial"/>
+                <a:cs typeface="Arial"/>
+              </a:rPr>
+              <a:t>•  Dec — explanations on the page</a:t>
+            </a:r>
+          </a:p>
+          <a:p>
+            <a:pPr algn="l">
+              <a:lnSpc>
+                <a:spcPct val="112000"/>
+              </a:lnSpc>
+              <a:spcBef>
+                <a:spcPts val="0"/>
+              </a:spcBef>
+              <a:spcAft>
+                <a:spcPts val="0"/>
+              </a:spcAft>
+            </a:pPr>
+            <a:r>
+              <a:rPr sz="1300" b="0" i="0">
+                <a:solidFill>
+                  <a:srgbClr val="222222"/>
+                </a:solidFill>
+                <a:latin typeface="Arial"/>
+                <a:ea typeface="Arial"/>
+                <a:cs typeface="Arial"/>
+              </a:rPr>
+              <a:t>•  Jan — thesis draft and final demo</a:t>
+            </a:r>
+          </a:p>
+        </p:txBody>
+      </p:sp>
       <p:cxnSp>
         <p:nvCxnSpPr>
           <p:cNvPr id="57" name="Connector 56"/>
@@ -8642,8 +7353,8 @@
         </p:nvCxnSpPr>
         <p:spPr>
           <a:xfrm>
-            <a:off x="201168" y="10533888"/>
-            <a:ext cx="9198864" cy="0"/>
+            <a:off x="219456" y="10442448"/>
+            <a:ext cx="9162288" cy="0"/>
           </a:xfrm>
           <a:prstGeom prst="line">
             <a:avLst/>
@@ -8677,8 +7388,8 @@
         </p:nvSpPr>
         <p:spPr>
           <a:xfrm>
-            <a:off x="201168" y="10570464"/>
-            <a:ext cx="9198864" cy="274320"/>
+            <a:off x="219456" y="10497312"/>
+            <a:ext cx="9162288" cy="310896"/>
           </a:xfrm>
           <a:prstGeom prst="rect">
             <a:avLst/>
@@ -8686,14 +7397,14 @@
           <a:noFill/>
         </p:spPr>
         <p:txBody>
-          <a:bodyPr wrap="square" lIns="0" rIns="0" tIns="18288" bIns="18288" anchor="t">
+          <a:bodyPr wrap="square" lIns="0" rIns="0" tIns="27432" bIns="18288" anchor="t">
             <a:noAutofit/>
           </a:bodyPr>
           <a:lstStyle/>
           <a:p>
             <a:pPr algn="l">
               <a:lnSpc>
-                <a:spcPct val="95000"/>
+                <a:spcPct val="112000"/>
               </a:lnSpc>
               <a:spcBef>
                 <a:spcPts val="0"/>
@@ -8703,7 +7414,7 @@
               </a:spcAft>
             </a:pPr>
             <a:r>
-              <a:rPr sz="2000" b="1" i="0">
+              <a:rPr sz="1800" b="1" i="0">
                 <a:solidFill>
                   <a:srgbClr val="000000"/>
                 </a:solidFill>
@@ -8724,8 +7435,8 @@
         </p:nvSpPr>
         <p:spPr>
           <a:xfrm>
-            <a:off x="201168" y="10844784"/>
-            <a:ext cx="9217152" cy="1874519"/>
+            <a:off x="219456" y="10826496"/>
+            <a:ext cx="9162288" cy="1420368"/>
           </a:xfrm>
           <a:prstGeom prst="rect">
             <a:avLst/>
@@ -8733,24 +7444,24 @@
           <a:noFill/>
         </p:spPr>
         <p:txBody>
-          <a:bodyPr wrap="square" lIns="36576" rIns="36576" tIns="18288" bIns="18288" anchor="t">
+          <a:bodyPr wrap="square" lIns="18288" rIns="18288" tIns="27432" bIns="18288" anchor="t">
             <a:noAutofit/>
           </a:bodyPr>
           <a:lstStyle/>
           <a:p>
             <a:pPr algn="l">
               <a:lnSpc>
-                <a:spcPct val="95000"/>
+                <a:spcPct val="112000"/>
               </a:lnSpc>
               <a:spcBef>
                 <a:spcPts val="0"/>
               </a:spcBef>
               <a:spcAft>
-                <a:spcPts val="300"/>
+                <a:spcPts val="400"/>
               </a:spcAft>
             </a:pPr>
             <a:r>
-              <a:rPr sz="1600" b="0" i="0">
+              <a:rPr sz="1400" b="0" i="0">
                 <a:solidFill>
                   <a:srgbClr val="222222"/>
                 </a:solidFill>
@@ -8758,23 +7469,23 @@
                 <a:ea typeface="Arial"/>
                 <a:cs typeface="Arial"/>
               </a:rPr>
-              <a:t>[1]  G. A. Di Luna and G. Viglietta, “Computing in Anonymous Dynamic Networks Is Linear,” Proc. 63rd IEEE FOCS, pp. 1122–1133, 2022.</a:t>
+              <a:t>[1]  G. A. Di Luna and G. Viglietta, “Computing in Anonymous Dynamic Networks Is Linear,” Proc. IEEE FOCS, pp. 1122–1133, 2022.</a:t>
             </a:r>
           </a:p>
           <a:p>
             <a:pPr algn="l">
               <a:lnSpc>
-                <a:spcPct val="95000"/>
+                <a:spcPct val="112000"/>
               </a:lnSpc>
               <a:spcBef>
                 <a:spcPts val="0"/>
               </a:spcBef>
               <a:spcAft>
-                <a:spcPts val="300"/>
+                <a:spcPts val="400"/>
               </a:spcAft>
             </a:pPr>
             <a:r>
-              <a:rPr sz="1600" b="0" i="0">
+              <a:rPr sz="1400" b="0" i="0">
                 <a:solidFill>
                   <a:srgbClr val="222222"/>
                 </a:solidFill>
@@ -8788,17 +7499,17 @@
           <a:p>
             <a:pPr algn="l">
               <a:lnSpc>
-                <a:spcPct val="95000"/>
+                <a:spcPct val="112000"/>
               </a:lnSpc>
               <a:spcBef>
                 <a:spcPts val="0"/>
               </a:spcBef>
               <a:spcAft>
-                <a:spcPts val="300"/>
+                <a:spcPts val="400"/>
               </a:spcAft>
             </a:pPr>
             <a:r>
-              <a:rPr sz="1600" b="0" i="0">
+              <a:rPr sz="1400" b="0" i="0">
                 <a:solidFill>
                   <a:srgbClr val="222222"/>
                 </a:solidFill>
@@ -8806,13 +7517,13 @@
                 <a:ea typeface="Arial"/>
                 <a:cs typeface="Arial"/>
               </a:rPr>
-              <a:t>[3]  N. Santoro, Design and Analysis of Distributed Algorithms, Wiley Series on Parallel and Distributed Computing, Wiley-Interscience, 2007.</a:t>
+              <a:t>[3]  N. Santoro, Design and Analysis of Distributed Algorithms, Wiley-Interscience, 2007.</a:t>
             </a:r>
           </a:p>
           <a:p>
             <a:pPr algn="l">
               <a:lnSpc>
-                <a:spcPct val="95000"/>
+                <a:spcPct val="112000"/>
               </a:lnSpc>
               <a:spcBef>
                 <a:spcPts val="0"/>
@@ -8822,7 +7533,7 @@
               </a:spcAft>
             </a:pPr>
             <a:r>
-              <a:rPr sz="1600" b="0" i="0">
+              <a:rPr sz="1400" b="0" i="0">
                 <a:solidFill>
                   <a:srgbClr val="222222"/>
                 </a:solidFill>
@@ -8830,7 +7541,7 @@
                 <a:ea typeface="Arial"/>
                 <a:cs typeface="Arial"/>
               </a:rPr>
-              <a:t>[4]  K. Hamao, Anonymous Dynamic Network Simulator. https://kazane1225.github.io/Research_NetworkSimulater/</a:t>
+              <a:t>[4]  K. Hamao, Anonymous Dynamic Network Simulator.  https://kazane1225.github.io/Research_NetworkSimulater/</a:t>
             </a:r>
           </a:p>
         </p:txBody>

--- a/poster/STSA_midterm_poster.pptx
+++ b/poster/STSA_midterm_poster.pptx
@@ -256,7 +256,7 @@
             </c:numRef>
           </c:val>
         </c:ser>
-        <c:gapWidth val="80"/>
+        <c:gapWidth val="70"/>
         <c:axId val="-2068027336"/>
         <c:axId val="-2113994440"/>
       </c:barChart>
@@ -275,7 +275,7 @@
           <a:lstStyle/>
           <a:p>
             <a:pPr>
-              <a:defRPr sz="1100">
+              <a:defRPr sz="1000">
                 <a:latin typeface="Arial"/>
               </a:defRPr>
             </a:pPr>
@@ -302,7 +302,7 @@
           <a:lstStyle/>
           <a:p>
             <a:pPr>
-              <a:defRPr sz="1000">
+              <a:defRPr sz="900">
                 <a:latin typeface="Arial"/>
               </a:defRPr>
             </a:pPr>
@@ -319,7 +319,7 @@
         <a:lstStyle/>
         <a:p>
           <a:pPr>
-            <a:defRPr sz="1100">
+            <a:defRPr sz="1000">
               <a:latin typeface="Arial"/>
             </a:defRPr>
           </a:pPr>
@@ -3656,7 +3656,7 @@
         <p:spPr>
           <a:xfrm>
             <a:off x="4773168" y="1499616"/>
-            <a:ext cx="0" cy="8814816"/>
+            <a:ext cx="0" cy="9308592"/>
           </a:xfrm>
           <a:prstGeom prst="line">
             <a:avLst/>
@@ -3773,7 +3773,7 @@
         <p:spPr>
           <a:xfrm>
             <a:off x="219456" y="1837943"/>
-            <a:ext cx="4370832" cy="1642872"/>
+            <a:ext cx="4370832" cy="2845308"/>
           </a:xfrm>
           <a:prstGeom prst="rect">
             <a:avLst/>
@@ -3794,11 +3794,11 @@
                 <a:spcPts val="0"/>
               </a:spcBef>
               <a:spcAft>
-                <a:spcPts val="100"/>
+                <a:spcPts val="300"/>
               </a:spcAft>
             </a:pPr>
             <a:r>
-              <a:rPr sz="1500" b="0" i="0">
+              <a:rPr sz="1300" b="0" i="0">
                 <a:solidFill>
                   <a:srgbClr val="222222"/>
                 </a:solidFill>
@@ -3806,7 +3806,7 @@
                 <a:ea typeface="Arial"/>
                 <a:cs typeface="Arial"/>
               </a:rPr>
-              <a:t>•  No IDs. Every agent runs the same program.</a:t>
+              <a:t>Agents have no names, and every agent runs the same program. Each round, links may appear or disappear. An agent hears a broadcast only from its current neighbors.</a:t>
             </a:r>
           </a:p>
           <a:p>
@@ -3818,11 +3818,11 @@
                 <a:spcPts val="0"/>
               </a:spcBef>
               <a:spcAft>
-                <a:spcPts val="100"/>
+                <a:spcPts val="300"/>
               </a:spcAft>
             </a:pPr>
             <a:r>
-              <a:rPr sz="1500" b="0" i="0">
+              <a:rPr sz="1300" b="0" i="0">
                 <a:solidFill>
                   <a:srgbClr val="222222"/>
                 </a:solidFill>
@@ -3830,7 +3830,7 @@
                 <a:ea typeface="Arial"/>
                 <a:cs typeface="Arial"/>
               </a:rPr>
-              <a:t>•  Broadcast only. Links can change each round.</a:t>
+              <a:t>If two agents have seen the same messages, they cannot be told apart. They cannot count by pointing at neighbors. The task is to infer n, the number of agents [1].</a:t>
             </a:r>
           </a:p>
           <a:p>
@@ -3842,11 +3842,11 @@
                 <a:spcPts val="0"/>
               </a:spcBef>
               <a:spcAft>
-                <a:spcPts val="100"/>
+                <a:spcPts val="300"/>
               </a:spcAft>
             </a:pPr>
             <a:r>
-              <a:rPr sz="1500" b="0" i="0">
+              <a:rPr sz="1300" b="0" i="0">
                 <a:solidFill>
                   <a:srgbClr val="222222"/>
                 </a:solidFill>
@@ -3854,7 +3854,7 @@
                 <a:ea typeface="Arial"/>
                 <a:cs typeface="Arial"/>
               </a:rPr>
-              <a:t>•  History tree: one node per group at round t.</a:t>
+              <a:t>A history tree stores that view. One level is one round. Same-looking agents share a node. A black edge is a split. A red edge is a message. Anonymity 1 means one agent.</a:t>
             </a:r>
           </a:p>
           <a:p>
@@ -3866,11 +3866,11 @@
                 <a:spcPts val="0"/>
               </a:spcBef>
               <a:spcAft>
-                <a:spcPts val="100"/>
+                <a:spcPts val="300"/>
               </a:spcAft>
             </a:pPr>
             <a:r>
-              <a:rPr sz="1500" b="0" i="0">
+              <a:rPr sz="1300" b="0" i="0">
                 <a:solidFill>
                   <a:srgbClr val="222222"/>
                 </a:solidFill>
@@ -3878,7 +3878,7 @@
                 <a:ea typeface="Arial"/>
                 <a:cs typeface="Arial"/>
               </a:rPr>
-              <a:t>•  a(v) is how many agents share that node.</a:t>
+              <a:t>With one leader, stabilizing settles on the correct n by round 2n−2, and may guess wrong first. Terminating stops only after n is proved, by round 3n−2 [1].</a:t>
             </a:r>
           </a:p>
           <a:p>
@@ -3894,7 +3894,7 @@
               </a:spcAft>
             </a:pPr>
             <a:r>
-              <a:rPr sz="1500" b="0" i="0">
+              <a:rPr sz="1300" b="0" i="0">
                 <a:solidFill>
                   <a:srgbClr val="222222"/>
                 </a:solidFill>
@@ -3902,257 +3902,20 @@
                 <a:ea typeface="Arial"/>
                 <a:cs typeface="Arial"/>
               </a:rPr>
-              <a:t>•  One leader: n settles by 2n−2 [1], [2].</a:t>
-            </a:r>
-          </a:p>
-          <a:p>
-            <a:pPr algn="l">
-              <a:lnSpc>
-                <a:spcPct val="112000"/>
-              </a:lnSpc>
-              <a:spcBef>
-                <a:spcPts val="0"/>
-              </a:spcBef>
-              <a:spcAft>
-                <a:spcPts val="100"/>
-              </a:spcAft>
-            </a:pPr>
-            <a:r>
-              <a:rPr sz="1500" b="0" i="0">
-                <a:solidFill>
-                  <a:srgbClr val="222222"/>
-                </a:solidFill>
-                <a:latin typeface="Arial"/>
-                <a:ea typeface="Arial"/>
-                <a:cs typeface="Arial"/>
-              </a:rPr>
-              <a:t>•  A proof of n takes until round 3n−2 [1].</a:t>
-            </a:r>
-          </a:p>
-          <a:p>
-            <a:pPr algn="l">
-              <a:lnSpc>
-                <a:spcPct val="112000"/>
-              </a:lnSpc>
-              <a:spcBef>
-                <a:spcPts val="0"/>
-              </a:spcBef>
-              <a:spcAft>
-                <a:spcPts val="0"/>
-              </a:spcAft>
-            </a:pPr>
-            <a:r>
-              <a:rPr sz="1500" b="0" i="0">
-                <a:solidFill>
-                  <a:srgbClr val="222222"/>
-                </a:solidFill>
-                <a:latin typeface="Arial"/>
-                <a:ea typeface="Arial"/>
-                <a:cs typeface="Arial"/>
-              </a:rPr>
-              <a:t>•  This work draws that tree and stays fast.</a:t>
-            </a:r>
-          </a:p>
-        </p:txBody>
-      </p:sp>
-      <p:sp>
-        <p:nvSpPr>
-          <p:cNvPr id="12" name="Rectangle 11"/>
-          <p:cNvSpPr/>
+              <a:t>Prof. Viglietta uses this simulator in class. Students use the same page. Fig. 2 is its glossary.</a:t>
+            </a:r>
+          </a:p>
+        </p:txBody>
+      </p:sp>
+      <p:sp>
+        <p:nvSpPr>
+          <p:cNvPr id="12" name="TextBox 11"/>
+          <p:cNvSpPr txBox="1"/>
           <p:nvPr/>
         </p:nvSpPr>
         <p:spPr>
           <a:xfrm>
-            <a:off x="219456" y="3553968"/>
-            <a:ext cx="4370832" cy="1258316"/>
-          </a:xfrm>
-          <a:prstGeom prst="rect">
-            <a:avLst/>
-          </a:prstGeom>
-          <a:solidFill>
-            <a:srgbClr val="E7EEF7"/>
-          </a:solidFill>
-          <a:ln w="12700">
-            <a:solidFill>
-              <a:srgbClr val="395E89"/>
-            </a:solidFill>
-          </a:ln>
-          <a:effectLst/>
-        </p:spPr>
-        <p:style>
-          <a:lnRef idx="1">
-            <a:schemeClr val="accent1"/>
-          </a:lnRef>
-          <a:fillRef idx="3">
-            <a:schemeClr val="accent1"/>
-          </a:fillRef>
-          <a:effectRef idx="2">
-            <a:schemeClr val="accent1"/>
-          </a:effectRef>
-          <a:fontRef idx="minor">
-            <a:schemeClr val="lt1"/>
-          </a:fontRef>
-        </p:style>
-        <p:txBody>
-          <a:bodyPr rtlCol="0" anchor="ctr"/>
-          <a:lstStyle/>
-          <a:p>
-            <a:pPr algn="ctr"/>
-          </a:p>
-        </p:txBody>
-      </p:sp>
-      <p:sp>
-        <p:nvSpPr>
-          <p:cNvPr id="13" name="TextBox 12"/>
-          <p:cNvSpPr txBox="1"/>
-          <p:nvPr/>
-        </p:nvSpPr>
-        <p:spPr>
-          <a:xfrm>
-            <a:off x="274320" y="3572256"/>
-            <a:ext cx="4261104" cy="1221740"/>
-          </a:xfrm>
-          <a:prstGeom prst="rect">
-            <a:avLst/>
-          </a:prstGeom>
-          <a:noFill/>
-        </p:spPr>
-        <p:txBody>
-          <a:bodyPr wrap="square" lIns="27432" rIns="27432" tIns="27432" bIns="18288" anchor="t">
-            <a:noAutofit/>
-          </a:bodyPr>
-          <a:lstStyle/>
-          <a:p>
-            <a:pPr algn="l">
-              <a:lnSpc>
-                <a:spcPct val="112000"/>
-              </a:lnSpc>
-              <a:spcBef>
-                <a:spcPts val="0"/>
-              </a:spcBef>
-              <a:spcAft>
-                <a:spcPts val="200"/>
-              </a:spcAft>
-            </a:pPr>
-            <a:r>
-              <a:rPr sz="1500" b="1" i="0">
-                <a:solidFill>
-                  <a:srgbClr val="1F497D"/>
-                </a:solidFill>
-                <a:latin typeface="Arial"/>
-                <a:ea typeface="Arial"/>
-                <a:cs typeface="Arial"/>
-              </a:rPr>
-              <a:t>Reading a history tree</a:t>
-            </a:r>
-          </a:p>
-          <a:p>
-            <a:pPr algn="l">
-              <a:lnSpc>
-                <a:spcPct val="112000"/>
-              </a:lnSpc>
-              <a:spcBef>
-                <a:spcPts val="0"/>
-              </a:spcBef>
-              <a:spcAft>
-                <a:spcPts val="100"/>
-              </a:spcAft>
-            </a:pPr>
-            <a:r>
-              <a:rPr sz="1500" b="0" i="0">
-                <a:solidFill>
-                  <a:srgbClr val="222222"/>
-                </a:solidFill>
-                <a:latin typeface="Arial"/>
-                <a:ea typeface="Arial"/>
-                <a:cs typeface="Arial"/>
-              </a:rPr>
-              <a:t>•  Black edge — a class splits.</a:t>
-            </a:r>
-          </a:p>
-          <a:p>
-            <a:pPr algn="l">
-              <a:lnSpc>
-                <a:spcPct val="112000"/>
-              </a:lnSpc>
-              <a:spcBef>
-                <a:spcPts val="0"/>
-              </a:spcBef>
-              <a:spcAft>
-                <a:spcPts val="100"/>
-              </a:spcAft>
-            </a:pPr>
-            <a:r>
-              <a:rPr sz="1500" b="0" i="0">
-                <a:solidFill>
-                  <a:srgbClr val="222222"/>
-                </a:solidFill>
-                <a:latin typeface="Arial"/>
-                <a:ea typeface="Arial"/>
-                <a:cs typeface="Arial"/>
-              </a:rPr>
-              <a:t>•  Red edge — messages of that round.</a:t>
-            </a:r>
-          </a:p>
-          <a:p>
-            <a:pPr algn="l">
-              <a:lnSpc>
-                <a:spcPct val="112000"/>
-              </a:lnSpc>
-              <a:spcBef>
-                <a:spcPts val="0"/>
-              </a:spcBef>
-              <a:spcAft>
-                <a:spcPts val="100"/>
-              </a:spcAft>
-            </a:pPr>
-            <a:r>
-              <a:rPr sz="1500" b="0" i="0">
-                <a:solidFill>
-                  <a:srgbClr val="222222"/>
-                </a:solidFill>
-                <a:latin typeface="Arial"/>
-                <a:ea typeface="Arial"/>
-                <a:cs typeface="Arial"/>
-              </a:rPr>
-              <a:t>•  Vista — the part one agent can build.</a:t>
-            </a:r>
-          </a:p>
-          <a:p>
-            <a:pPr algn="l">
-              <a:lnSpc>
-                <a:spcPct val="112000"/>
-              </a:lnSpc>
-              <a:spcBef>
-                <a:spcPts val="0"/>
-              </a:spcBef>
-              <a:spcAft>
-                <a:spcPts val="0"/>
-              </a:spcAft>
-            </a:pPr>
-            <a:r>
-              <a:rPr sz="1500" b="0" i="0">
-                <a:solidFill>
-                  <a:srgbClr val="222222"/>
-                </a:solidFill>
-                <a:latin typeface="Arial"/>
-                <a:ea typeface="Arial"/>
-                <a:cs typeface="Arial"/>
-              </a:rPr>
-              <a:t>•  Anonymity 1 — the agent is unique.</a:t>
-            </a:r>
-          </a:p>
-        </p:txBody>
-      </p:sp>
-      <p:sp>
-        <p:nvSpPr>
-          <p:cNvPr id="14" name="TextBox 13"/>
-          <p:cNvSpPr txBox="1"/>
-          <p:nvPr/>
-        </p:nvSpPr>
-        <p:spPr>
-          <a:xfrm>
-            <a:off x="219456" y="4903724"/>
+            <a:off x="219456" y="4710684"/>
             <a:ext cx="4370832" cy="292608"/>
           </a:xfrm>
           <a:prstGeom prst="rect">
@@ -4193,13 +3956,13 @@
       </p:sp>
       <p:cxnSp>
         <p:nvCxnSpPr>
-          <p:cNvPr id="15" name="Connector 14"/>
+          <p:cNvPr id="13" name="Connector 12"/>
           <p:cNvCxnSpPr/>
           <p:nvPr/>
         </p:nvCxnSpPr>
         <p:spPr>
           <a:xfrm>
-            <a:off x="219456" y="5196332"/>
+            <a:off x="219456" y="5003292"/>
             <a:ext cx="4370832" cy="0"/>
           </a:xfrm>
           <a:prstGeom prst="line">
@@ -4228,14 +3991,14 @@
       </p:cxnSp>
       <p:sp>
         <p:nvSpPr>
-          <p:cNvPr id="16" name="TextBox 15"/>
+          <p:cNvPr id="14" name="TextBox 13"/>
           <p:cNvSpPr txBox="1"/>
           <p:nvPr/>
         </p:nvSpPr>
         <p:spPr>
           <a:xfrm>
-            <a:off x="219456" y="5242052"/>
-            <a:ext cx="4370832" cy="3296920"/>
+            <a:off x="219456" y="5049012"/>
+            <a:ext cx="4370832" cy="2497328"/>
           </a:xfrm>
           <a:prstGeom prst="rect">
             <a:avLst/>
@@ -4256,11 +4019,11 @@
                 <a:spcPts val="0"/>
               </a:spcBef>
               <a:spcAft>
-                <a:spcPts val="200"/>
+                <a:spcPts val="100"/>
               </a:spcAft>
             </a:pPr>
             <a:r>
-              <a:rPr sz="1500" b="1" i="0">
+              <a:rPr sz="1500" b="0" i="0">
                 <a:solidFill>
                   <a:srgbClr val="1F497D"/>
                 </a:solidFill>
@@ -4268,7 +4031,7 @@
                 <a:ea typeface="Arial"/>
                 <a:cs typeface="Arial"/>
               </a:rPr>
-              <a:t>2.1 Model — same setting as [1].</a:t>
+              <a:t>2.1 Model. One leader, input 0, no port labels [1].</a:t>
             </a:r>
           </a:p>
           <a:p>
@@ -4280,19 +4043,19 @@
                 <a:spcPts val="0"/>
               </a:spcBef>
               <a:spcAft>
-                <a:spcPts val="100"/>
+                <a:spcPts val="0"/>
               </a:spcAft>
             </a:pPr>
             <a:r>
               <a:rPr sz="1500" b="0" i="0">
                 <a:solidFill>
-                  <a:srgbClr val="222222"/>
+                  <a:srgbClr val="1F497D"/>
                 </a:solidFill>
                 <a:latin typeface="Arial"/>
                 <a:ea typeface="Arial"/>
                 <a:cs typeface="Arial"/>
               </a:rPr>
-              <a:t>•  Undirected dynamic graph, one leader.</a:t>
+              <a:t>2.2 C to WebAssembly. Left: network. Right: tree.</a:t>
             </a:r>
           </a:p>
           <a:p>
@@ -4304,19 +4067,19 @@
                 <a:spcPts val="0"/>
               </a:spcBef>
               <a:spcAft>
-                <a:spcPts val="400"/>
+                <a:spcPts val="200"/>
               </a:spcAft>
             </a:pPr>
             <a:r>
-              <a:rPr sz="1500" b="0" i="0">
-                <a:solidFill>
-                  <a:srgbClr val="222222"/>
+              <a:rPr sz="1200" b="1" i="0">
+                <a:solidFill>
+                  <a:srgbClr val="1F497D"/>
                 </a:solidFill>
                 <a:latin typeface="Arial"/>
                 <a:ea typeface="Arial"/>
                 <a:cs typeface="Arial"/>
               </a:rPr>
-              <a:t>•  Leader input is 0. No port labels.</a:t>
+              <a:t>https://kazane1225.github.io/Research_NetworkSimulater/</a:t>
             </a:r>
           </a:p>
           <a:p>
@@ -4340,7 +4103,7 @@
                 <a:ea typeface="Arial"/>
                 <a:cs typeface="Arial"/>
               </a:rPr>
-              <a:t>2.2 Program.</a:t>
+              <a:t>2.3 Append of the last round: O(R n²) → O(n²).</a:t>
             </a:r>
           </a:p>
           <a:p>
@@ -4352,19 +4115,19 @@
                 <a:spcPts val="0"/>
               </a:spcBef>
               <a:spcAft>
-                <a:spcPts val="100"/>
+                <a:spcPts val="0"/>
               </a:spcAft>
             </a:pPr>
             <a:r>
-              <a:rPr sz="1500" b="0" i="0">
-                <a:solidFill>
-                  <a:srgbClr val="222222"/>
+              <a:rPr sz="1500" b="1" i="0">
+                <a:solidFill>
+                  <a:srgbClr val="1F497D"/>
                 </a:solidFill>
                 <a:latin typeface="Arial"/>
                 <a:ea typeface="Arial"/>
                 <a:cs typeface="Arial"/>
               </a:rPr>
-              <a:t>•  C code, compiled to WebAssembly.</a:t>
+              <a:t>2.4 Professor mode is the class default.</a:t>
             </a:r>
           </a:p>
           <a:p>
@@ -4376,7 +4139,7 @@
                 <a:spcPts val="0"/>
               </a:spcBef>
               <a:spcAft>
-                <a:spcPts val="200"/>
+                <a:spcPts val="0"/>
               </a:spcAft>
             </a:pPr>
             <a:r>
@@ -4388,7 +4151,7 @@
                 <a:ea typeface="Arial"/>
                 <a:cs typeface="Arial"/>
               </a:rPr>
-              <a:t>•  Left: network. Right: colored tree.</a:t>
+              <a:t>Student mode: Glossary, Tour, Learn, Help.</a:t>
             </a:r>
           </a:p>
           <a:p>
@@ -4400,19 +4163,19 @@
                 <a:spcPts val="0"/>
               </a:spcBef>
               <a:spcAft>
-                <a:spcPts val="400"/>
+                <a:spcPts val="200"/>
               </a:spcAft>
             </a:pPr>
             <a:r>
-              <a:rPr sz="1200" b="1" i="0">
-                <a:solidFill>
-                  <a:srgbClr val="1F497D"/>
+              <a:rPr sz="1500" b="0" i="0">
+                <a:solidFill>
+                  <a:srgbClr val="222222"/>
                 </a:solidFill>
                 <a:latin typeface="Arial"/>
                 <a:ea typeface="Arial"/>
                 <a:cs typeface="Arial"/>
               </a:rPr>
-              <a:t>https://kazane1225.github.io/Research_NetworkSimulater/</a:t>
+              <a:t>Legend, live stats, and an EN/JA switch.</a:t>
             </a:r>
           </a:p>
           <a:p>
@@ -4424,7 +4187,7 @@
                 <a:spcPts val="0"/>
               </a:spcBef>
               <a:spcAft>
-                <a:spcPts val="200"/>
+                <a:spcPts val="0"/>
               </a:spcAft>
             </a:pPr>
             <a:r>
@@ -4436,7 +4199,7 @@
                 <a:ea typeface="Arial"/>
                 <a:cs typeface="Arial"/>
               </a:rPr>
-              <a:t>2.3 Speed.</a:t>
+              <a:t>2.5 A worker thread can rebuild while drawing.</a:t>
             </a:r>
           </a:p>
           <a:p>
@@ -4448,7 +4211,7 @@
                 <a:spcPts val="0"/>
               </a:spcBef>
               <a:spcAft>
-                <a:spcPts val="100"/>
+                <a:spcPts val="0"/>
               </a:spcAft>
             </a:pPr>
             <a:r>
@@ -4460,7 +4223,7 @@
                 <a:ea typeface="Arial"/>
                 <a:cs typeface="Arial"/>
               </a:rPr>
-              <a:t>•  Last-round append: O(R n²) → O(n²).</a:t>
+              <a:t>GitHub Pages cannot send the headers it needs.</a:t>
             </a:r>
           </a:p>
           <a:p>
@@ -4472,7 +4235,7 @@
                 <a:spcPts val="0"/>
               </a:spcBef>
               <a:spcAft>
-                <a:spcPts val="100"/>
+                <a:spcPts val="0"/>
               </a:spcAft>
             </a:pPr>
             <a:r>
@@ -4484,7 +4247,7 @@
                 <a:ea typeface="Arial"/>
                 <a:cs typeface="Arial"/>
               </a:rPr>
-              <a:t>•  Merged tree grows by one level only.</a:t>
+              <a:t>The public demo splits that work across frames.</a:t>
             </a:r>
           </a:p>
           <a:p>
@@ -4508,185 +4271,50 @@
                 <a:ea typeface="Arial"/>
                 <a:cs typeface="Arial"/>
               </a:rPr>
-              <a:t>•  A middle edit replays only the suffix.</a:t>
-            </a:r>
-          </a:p>
-          <a:p>
-            <a:pPr algn="l">
-              <a:lnSpc>
-                <a:spcPct val="112000"/>
-              </a:lnSpc>
-              <a:spcBef>
-                <a:spcPts val="0"/>
-              </a:spcBef>
-              <a:spcAft>
-                <a:spcPts val="100"/>
-              </a:spcAft>
-            </a:pPr>
-            <a:r>
-              <a:rPr sz="1500" b="0" i="0">
-                <a:solidFill>
-                  <a:srgbClr val="222222"/>
-                </a:solidFill>
-                <a:latin typeface="Arial"/>
-                <a:ea typeface="Arial"/>
-                <a:cs typeface="Arial"/>
-              </a:rPr>
-              <a:t>•  Hash-map merge skips identical trees.</a:t>
-            </a:r>
-          </a:p>
-          <a:p>
-            <a:pPr algn="l">
-              <a:lnSpc>
-                <a:spcPct val="112000"/>
-              </a:lnSpc>
-              <a:spcBef>
-                <a:spcPts val="0"/>
-              </a:spcBef>
-              <a:spcAft>
-                <a:spcPts val="0"/>
-              </a:spcAft>
-            </a:pPr>
-            <a:r>
-              <a:rPr sz="1500" b="0" i="0">
-                <a:solidFill>
-                  <a:srgbClr val="222222"/>
-                </a:solidFill>
-                <a:latin typeface="Arial"/>
-                <a:ea typeface="Arial"/>
-                <a:cs typeface="Arial"/>
-              </a:rPr>
-              <a:t>•  Recursion crashed near 2,000 rounds;</a:t>
-            </a:r>
-          </a:p>
-          <a:p>
-            <a:pPr algn="l">
-              <a:lnSpc>
-                <a:spcPct val="112000"/>
-              </a:lnSpc>
-              <a:spcBef>
-                <a:spcPts val="0"/>
-              </a:spcBef>
-              <a:spcAft>
-                <a:spcPts val="0"/>
-              </a:spcAft>
-            </a:pPr>
-            <a:r>
-              <a:rPr sz="1500" b="0" i="0">
-                <a:solidFill>
-                  <a:srgbClr val="222222"/>
-                </a:solidFill>
-                <a:latin typeface="Arial"/>
-                <a:ea typeface="Arial"/>
-                <a:cs typeface="Arial"/>
-              </a:rPr>
-              <a:t>   that walk is now a loop.</a:t>
-            </a:r>
-          </a:p>
-        </p:txBody>
-      </p:sp>
-      <p:sp>
-        <p:nvSpPr>
-          <p:cNvPr id="17" name="Rectangle 16"/>
-          <p:cNvSpPr/>
+              <a:t>Computing… stays up until the tree is ready.</a:t>
+            </a:r>
+          </a:p>
+        </p:txBody>
+      </p:sp>
+      <p:pic>
+        <p:nvPicPr>
+          <p:cNvPr id="15" name="Picture 14" descr="glossary_crop.png"/>
+          <p:cNvPicPr>
+            <a:picLocks noChangeAspect="1"/>
+          </p:cNvPicPr>
           <p:nvPr/>
-        </p:nvSpPr>
+        </p:nvPicPr>
+        <p:blipFill>
+          <a:blip r:embed="rId2"/>
+          <a:stretch>
+            <a:fillRect/>
+          </a:stretch>
+        </p:blipFill>
         <p:spPr>
           <a:xfrm>
-            <a:off x="219456" y="8612124"/>
-            <a:ext cx="4370832" cy="1702307"/>
+            <a:off x="219456" y="7573772"/>
+            <a:ext cx="4370832" cy="2754884"/>
           </a:xfrm>
           <a:prstGeom prst="rect">
             <a:avLst/>
           </a:prstGeom>
-          <a:solidFill>
-            <a:srgbClr val="FFFFFF"/>
-          </a:solidFill>
           <a:ln w="12700">
             <a:solidFill>
               <a:srgbClr val="395E89"/>
             </a:solidFill>
           </a:ln>
-          <a:effectLst/>
         </p:spPr>
-        <p:style>
-          <a:lnRef idx="1">
-            <a:schemeClr val="accent1"/>
-          </a:lnRef>
-          <a:fillRef idx="3">
-            <a:schemeClr val="accent1"/>
-          </a:fillRef>
-          <a:effectRef idx="2">
-            <a:schemeClr val="accent1"/>
-          </a:effectRef>
-          <a:fontRef idx="minor">
-            <a:schemeClr val="lt1"/>
-          </a:fontRef>
-        </p:style>
-        <p:txBody>
-          <a:bodyPr rtlCol="0" anchor="ctr"/>
-          <a:lstStyle/>
-          <a:p>
-            <a:pPr algn="ctr"/>
-          </a:p>
-        </p:txBody>
-      </p:sp>
-      <p:sp>
-        <p:nvSpPr>
-          <p:cNvPr id="18" name="Rectangle 17"/>
-          <p:cNvSpPr/>
+      </p:pic>
+      <p:sp>
+        <p:nvSpPr>
+          <p:cNvPr id="16" name="TextBox 15"/>
+          <p:cNvSpPr txBox="1"/>
           <p:nvPr/>
         </p:nvSpPr>
         <p:spPr>
           <a:xfrm>
-            <a:off x="1572768" y="8685276"/>
-            <a:ext cx="1600200" cy="310896"/>
-          </a:xfrm>
-          <a:prstGeom prst="rect">
-            <a:avLst/>
-          </a:prstGeom>
-          <a:solidFill>
-            <a:srgbClr val="E7EEF7"/>
-          </a:solidFill>
-          <a:ln w="14604">
-            <a:solidFill>
-              <a:srgbClr val="1F497D"/>
-            </a:solidFill>
-          </a:ln>
-          <a:effectLst/>
-        </p:spPr>
-        <p:style>
-          <a:lnRef idx="1">
-            <a:schemeClr val="accent1"/>
-          </a:lnRef>
-          <a:fillRef idx="3">
-            <a:schemeClr val="accent1"/>
-          </a:fillRef>
-          <a:effectRef idx="2">
-            <a:schemeClr val="accent1"/>
-          </a:effectRef>
-          <a:fontRef idx="minor">
-            <a:schemeClr val="lt1"/>
-          </a:fontRef>
-        </p:style>
-        <p:txBody>
-          <a:bodyPr rtlCol="0" anchor="ctr"/>
-          <a:lstStyle/>
-          <a:p>
-            <a:pPr algn="ctr"/>
-          </a:p>
-        </p:txBody>
-      </p:sp>
-      <p:sp>
-        <p:nvSpPr>
-          <p:cNvPr id="19" name="TextBox 18"/>
-          <p:cNvSpPr txBox="1"/>
-          <p:nvPr/>
-        </p:nvSpPr>
-        <p:spPr>
-          <a:xfrm>
-            <a:off x="1572768" y="8685276"/>
-            <a:ext cx="1600200" cy="310896"/>
+            <a:off x="219456" y="10356088"/>
+            <a:ext cx="4370832" cy="461264"/>
           </a:xfrm>
           <a:prstGeom prst="rect">
             <a:avLst/>
@@ -4694,1009 +4322,7 @@
           <a:noFill/>
         </p:spPr>
         <p:txBody>
-          <a:bodyPr wrap="square" lIns="18288" rIns="18288" tIns="27432" bIns="18288" anchor="ctr">
-            <a:noAutofit/>
-          </a:bodyPr>
-          <a:lstStyle/>
-          <a:p>
-            <a:pPr algn="ctr">
-              <a:lnSpc>
-                <a:spcPct val="112000"/>
-              </a:lnSpc>
-              <a:spcBef>
-                <a:spcPts val="0"/>
-              </a:spcBef>
-              <a:spcAft>
-                <a:spcPts val="0"/>
-              </a:spcAft>
-            </a:pPr>
-            <a:r>
-              <a:rPr sz="1200" b="1" i="0">
-                <a:solidFill>
-                  <a:srgbClr val="000000"/>
-                </a:solidFill>
-                <a:latin typeface="Arial"/>
-                <a:ea typeface="Arial"/>
-                <a:cs typeface="Arial"/>
-              </a:rPr>
-              <a:t>r    all agents</a:t>
-            </a:r>
-          </a:p>
-        </p:txBody>
-      </p:sp>
-      <p:sp>
-        <p:nvSpPr>
-          <p:cNvPr id="20" name="Rectangle 19"/>
-          <p:cNvSpPr/>
-          <p:nvPr/>
-        </p:nvSpPr>
-        <p:spPr>
-          <a:xfrm>
-            <a:off x="365760" y="9037137"/>
-            <a:ext cx="1691640" cy="310896"/>
-          </a:xfrm>
-          <a:prstGeom prst="rect">
-            <a:avLst/>
-          </a:prstGeom>
-          <a:solidFill>
-            <a:srgbClr val="E7EEF7"/>
-          </a:solidFill>
-          <a:ln w="14604">
-            <a:solidFill>
-              <a:srgbClr val="1F497D"/>
-            </a:solidFill>
-          </a:ln>
-          <a:effectLst/>
-        </p:spPr>
-        <p:style>
-          <a:lnRef idx="1">
-            <a:schemeClr val="accent1"/>
-          </a:lnRef>
-          <a:fillRef idx="3">
-            <a:schemeClr val="accent1"/>
-          </a:fillRef>
-          <a:effectRef idx="2">
-            <a:schemeClr val="accent1"/>
-          </a:effectRef>
-          <a:fontRef idx="minor">
-            <a:schemeClr val="lt1"/>
-          </a:fontRef>
-        </p:style>
-        <p:txBody>
-          <a:bodyPr rtlCol="0" anchor="ctr"/>
-          <a:lstStyle/>
-          <a:p>
-            <a:pPr algn="ctr"/>
-          </a:p>
-        </p:txBody>
-      </p:sp>
-      <p:sp>
-        <p:nvSpPr>
-          <p:cNvPr id="21" name="TextBox 20"/>
-          <p:cNvSpPr txBox="1"/>
-          <p:nvPr/>
-        </p:nvSpPr>
-        <p:spPr>
-          <a:xfrm>
-            <a:off x="365760" y="9037137"/>
-            <a:ext cx="1691640" cy="310896"/>
-          </a:xfrm>
-          <a:prstGeom prst="rect">
-            <a:avLst/>
-          </a:prstGeom>
-          <a:noFill/>
-        </p:spPr>
-        <p:txBody>
-          <a:bodyPr wrap="square" lIns="18288" rIns="18288" tIns="27432" bIns="18288" anchor="ctr">
-            <a:noAutofit/>
-          </a:bodyPr>
-          <a:lstStyle/>
-          <a:p>
-            <a:pPr algn="ctr">
-              <a:lnSpc>
-                <a:spcPct val="112000"/>
-              </a:lnSpc>
-              <a:spcBef>
-                <a:spcPts val="0"/>
-              </a:spcBef>
-              <a:spcAft>
-                <a:spcPts val="0"/>
-              </a:spcAft>
-            </a:pPr>
-            <a:r>
-              <a:rPr sz="1200" b="1" i="0">
-                <a:solidFill>
-                  <a:srgbClr val="000000"/>
-                </a:solidFill>
-                <a:latin typeface="Arial"/>
-                <a:ea typeface="Arial"/>
-                <a:cs typeface="Arial"/>
-              </a:rPr>
-              <a:t>leader    a = 1</a:t>
-            </a:r>
-          </a:p>
-        </p:txBody>
-      </p:sp>
-      <p:sp>
-        <p:nvSpPr>
-          <p:cNvPr id="22" name="Rectangle 21"/>
-          <p:cNvSpPr/>
-          <p:nvPr/>
-        </p:nvSpPr>
-        <p:spPr>
-          <a:xfrm>
-            <a:off x="2697480" y="9037137"/>
-            <a:ext cx="1737360" cy="310896"/>
-          </a:xfrm>
-          <a:prstGeom prst="rect">
-            <a:avLst/>
-          </a:prstGeom>
-          <a:solidFill>
-            <a:srgbClr val="E7EEF7"/>
-          </a:solidFill>
-          <a:ln w="14604">
-            <a:solidFill>
-              <a:srgbClr val="1F497D"/>
-            </a:solidFill>
-          </a:ln>
-          <a:effectLst/>
-        </p:spPr>
-        <p:style>
-          <a:lnRef idx="1">
-            <a:schemeClr val="accent1"/>
-          </a:lnRef>
-          <a:fillRef idx="3">
-            <a:schemeClr val="accent1"/>
-          </a:fillRef>
-          <a:effectRef idx="2">
-            <a:schemeClr val="accent1"/>
-          </a:effectRef>
-          <a:fontRef idx="minor">
-            <a:schemeClr val="lt1"/>
-          </a:fontRef>
-        </p:style>
-        <p:txBody>
-          <a:bodyPr rtlCol="0" anchor="ctr"/>
-          <a:lstStyle/>
-          <a:p>
-            <a:pPr algn="ctr"/>
-          </a:p>
-        </p:txBody>
-      </p:sp>
-      <p:sp>
-        <p:nvSpPr>
-          <p:cNvPr id="23" name="TextBox 22"/>
-          <p:cNvSpPr txBox="1"/>
-          <p:nvPr/>
-        </p:nvSpPr>
-        <p:spPr>
-          <a:xfrm>
-            <a:off x="2697480" y="9037137"/>
-            <a:ext cx="1737360" cy="310896"/>
-          </a:xfrm>
-          <a:prstGeom prst="rect">
-            <a:avLst/>
-          </a:prstGeom>
-          <a:noFill/>
-        </p:spPr>
-        <p:txBody>
-          <a:bodyPr wrap="square" lIns="18288" rIns="18288" tIns="27432" bIns="18288" anchor="ctr">
-            <a:noAutofit/>
-          </a:bodyPr>
-          <a:lstStyle/>
-          <a:p>
-            <a:pPr algn="ctr">
-              <a:lnSpc>
-                <a:spcPct val="112000"/>
-              </a:lnSpc>
-              <a:spcBef>
-                <a:spcPts val="0"/>
-              </a:spcBef>
-              <a:spcAft>
-                <a:spcPts val="0"/>
-              </a:spcAft>
-            </a:pPr>
-            <a:r>
-              <a:rPr sz="1200" b="1" i="0">
-                <a:solidFill>
-                  <a:srgbClr val="000000"/>
-                </a:solidFill>
-                <a:latin typeface="Arial"/>
-                <a:ea typeface="Arial"/>
-                <a:cs typeface="Arial"/>
-              </a:rPr>
-              <a:t>others   a = n−1</a:t>
-            </a:r>
-          </a:p>
-        </p:txBody>
-      </p:sp>
-      <p:sp>
-        <p:nvSpPr>
-          <p:cNvPr id="24" name="Rectangle 23"/>
-          <p:cNvSpPr/>
-          <p:nvPr/>
-        </p:nvSpPr>
-        <p:spPr>
-          <a:xfrm>
-            <a:off x="566928" y="9418319"/>
-            <a:ext cx="1280160" cy="310896"/>
-          </a:xfrm>
-          <a:prstGeom prst="rect">
-            <a:avLst/>
-          </a:prstGeom>
-          <a:solidFill>
-            <a:srgbClr val="C6EFCE"/>
-          </a:solidFill>
-          <a:ln w="14604">
-            <a:solidFill>
-              <a:srgbClr val="1F497D"/>
-            </a:solidFill>
-          </a:ln>
-          <a:effectLst/>
-        </p:spPr>
-        <p:style>
-          <a:lnRef idx="1">
-            <a:schemeClr val="accent1"/>
-          </a:lnRef>
-          <a:fillRef idx="3">
-            <a:schemeClr val="accent1"/>
-          </a:fillRef>
-          <a:effectRef idx="2">
-            <a:schemeClr val="accent1"/>
-          </a:effectRef>
-          <a:fontRef idx="minor">
-            <a:schemeClr val="lt1"/>
-          </a:fontRef>
-        </p:style>
-        <p:txBody>
-          <a:bodyPr rtlCol="0" anchor="ctr"/>
-          <a:lstStyle/>
-          <a:p>
-            <a:pPr algn="ctr"/>
-          </a:p>
-        </p:txBody>
-      </p:sp>
-      <p:sp>
-        <p:nvSpPr>
-          <p:cNvPr id="25" name="TextBox 24"/>
-          <p:cNvSpPr txBox="1"/>
-          <p:nvPr/>
-        </p:nvSpPr>
-        <p:spPr>
-          <a:xfrm>
-            <a:off x="566928" y="9418319"/>
-            <a:ext cx="1280160" cy="310896"/>
-          </a:xfrm>
-          <a:prstGeom prst="rect">
-            <a:avLst/>
-          </a:prstGeom>
-          <a:noFill/>
-        </p:spPr>
-        <p:txBody>
-          <a:bodyPr wrap="square" lIns="18288" rIns="18288" tIns="27432" bIns="18288" anchor="ctr">
-            <a:noAutofit/>
-          </a:bodyPr>
-          <a:lstStyle/>
-          <a:p>
-            <a:pPr algn="ctr">
-              <a:lnSpc>
-                <a:spcPct val="112000"/>
-              </a:lnSpc>
-              <a:spcBef>
-                <a:spcPts val="0"/>
-              </a:spcBef>
-              <a:spcAft>
-                <a:spcPts val="0"/>
-              </a:spcAft>
-            </a:pPr>
-            <a:r>
-              <a:rPr sz="1200" b="1" i="0">
-                <a:solidFill>
-                  <a:srgbClr val="000000"/>
-                </a:solidFill>
-                <a:latin typeface="Arial"/>
-                <a:ea typeface="Arial"/>
-                <a:cs typeface="Arial"/>
-              </a:rPr>
-              <a:t>leader</a:t>
-            </a:r>
-          </a:p>
-        </p:txBody>
-      </p:sp>
-      <p:sp>
-        <p:nvSpPr>
-          <p:cNvPr id="26" name="Rectangle 25"/>
-          <p:cNvSpPr/>
-          <p:nvPr/>
-        </p:nvSpPr>
-        <p:spPr>
-          <a:xfrm>
-            <a:off x="2606040" y="9418319"/>
-            <a:ext cx="822960" cy="310896"/>
-          </a:xfrm>
-          <a:prstGeom prst="rect">
-            <a:avLst/>
-          </a:prstGeom>
-          <a:solidFill>
-            <a:srgbClr val="FFF2CC"/>
-          </a:solidFill>
-          <a:ln w="14604">
-            <a:solidFill>
-              <a:srgbClr val="1F497D"/>
-            </a:solidFill>
-          </a:ln>
-          <a:effectLst/>
-        </p:spPr>
-        <p:style>
-          <a:lnRef idx="1">
-            <a:schemeClr val="accent1"/>
-          </a:lnRef>
-          <a:fillRef idx="3">
-            <a:schemeClr val="accent1"/>
-          </a:fillRef>
-          <a:effectRef idx="2">
-            <a:schemeClr val="accent1"/>
-          </a:effectRef>
-          <a:fontRef idx="minor">
-            <a:schemeClr val="lt1"/>
-          </a:fontRef>
-        </p:style>
-        <p:txBody>
-          <a:bodyPr rtlCol="0" anchor="ctr"/>
-          <a:lstStyle/>
-          <a:p>
-            <a:pPr algn="ctr"/>
-          </a:p>
-        </p:txBody>
-      </p:sp>
-      <p:sp>
-        <p:nvSpPr>
-          <p:cNvPr id="27" name="TextBox 26"/>
-          <p:cNvSpPr txBox="1"/>
-          <p:nvPr/>
-        </p:nvSpPr>
-        <p:spPr>
-          <a:xfrm>
-            <a:off x="2606040" y="9418319"/>
-            <a:ext cx="822960" cy="310896"/>
-          </a:xfrm>
-          <a:prstGeom prst="rect">
-            <a:avLst/>
-          </a:prstGeom>
-          <a:noFill/>
-        </p:spPr>
-        <p:txBody>
-          <a:bodyPr wrap="square" lIns="18288" rIns="18288" tIns="27432" bIns="18288" anchor="ctr">
-            <a:noAutofit/>
-          </a:bodyPr>
-          <a:lstStyle/>
-          <a:p>
-            <a:pPr algn="ctr">
-              <a:lnSpc>
-                <a:spcPct val="112000"/>
-              </a:lnSpc>
-              <a:spcBef>
-                <a:spcPts val="0"/>
-              </a:spcBef>
-              <a:spcAft>
-                <a:spcPts val="0"/>
-              </a:spcAft>
-            </a:pPr>
-            <a:r>
-              <a:rPr sz="1200" b="1" i="0">
-                <a:solidFill>
-                  <a:srgbClr val="000000"/>
-                </a:solidFill>
-                <a:latin typeface="Arial"/>
-                <a:ea typeface="Arial"/>
-                <a:cs typeface="Arial"/>
-              </a:rPr>
-              <a:t>A</a:t>
-            </a:r>
-          </a:p>
-        </p:txBody>
-      </p:sp>
-      <p:sp>
-        <p:nvSpPr>
-          <p:cNvPr id="28" name="Rectangle 27"/>
-          <p:cNvSpPr/>
-          <p:nvPr/>
-        </p:nvSpPr>
-        <p:spPr>
-          <a:xfrm>
-            <a:off x="3566160" y="9418319"/>
-            <a:ext cx="822960" cy="310896"/>
-          </a:xfrm>
-          <a:prstGeom prst="rect">
-            <a:avLst/>
-          </a:prstGeom>
-          <a:solidFill>
-            <a:srgbClr val="FFF2CC"/>
-          </a:solidFill>
-          <a:ln w="14604">
-            <a:solidFill>
-              <a:srgbClr val="1F497D"/>
-            </a:solidFill>
-          </a:ln>
-          <a:effectLst/>
-        </p:spPr>
-        <p:style>
-          <a:lnRef idx="1">
-            <a:schemeClr val="accent1"/>
-          </a:lnRef>
-          <a:fillRef idx="3">
-            <a:schemeClr val="accent1"/>
-          </a:fillRef>
-          <a:effectRef idx="2">
-            <a:schemeClr val="accent1"/>
-          </a:effectRef>
-          <a:fontRef idx="minor">
-            <a:schemeClr val="lt1"/>
-          </a:fontRef>
-        </p:style>
-        <p:txBody>
-          <a:bodyPr rtlCol="0" anchor="ctr"/>
-          <a:lstStyle/>
-          <a:p>
-            <a:pPr algn="ctr"/>
-          </a:p>
-        </p:txBody>
-      </p:sp>
-      <p:sp>
-        <p:nvSpPr>
-          <p:cNvPr id="29" name="TextBox 28"/>
-          <p:cNvSpPr txBox="1"/>
-          <p:nvPr/>
-        </p:nvSpPr>
-        <p:spPr>
-          <a:xfrm>
-            <a:off x="3566160" y="9418319"/>
-            <a:ext cx="822960" cy="310896"/>
-          </a:xfrm>
-          <a:prstGeom prst="rect">
-            <a:avLst/>
-          </a:prstGeom>
-          <a:noFill/>
-        </p:spPr>
-        <p:txBody>
-          <a:bodyPr wrap="square" lIns="18288" rIns="18288" tIns="27432" bIns="18288" anchor="ctr">
-            <a:noAutofit/>
-          </a:bodyPr>
-          <a:lstStyle/>
-          <a:p>
-            <a:pPr algn="ctr">
-              <a:lnSpc>
-                <a:spcPct val="112000"/>
-              </a:lnSpc>
-              <a:spcBef>
-                <a:spcPts val="0"/>
-              </a:spcBef>
-              <a:spcAft>
-                <a:spcPts val="0"/>
-              </a:spcAft>
-            </a:pPr>
-            <a:r>
-              <a:rPr sz="1200" b="1" i="0">
-                <a:solidFill>
-                  <a:srgbClr val="000000"/>
-                </a:solidFill>
-                <a:latin typeface="Arial"/>
-                <a:ea typeface="Arial"/>
-                <a:cs typeface="Arial"/>
-              </a:rPr>
-              <a:t>B</a:t>
-            </a:r>
-          </a:p>
-        </p:txBody>
-      </p:sp>
-      <p:cxnSp>
-        <p:nvCxnSpPr>
-          <p:cNvPr id="30" name="Connector 29"/>
-          <p:cNvCxnSpPr/>
-          <p:nvPr/>
-        </p:nvCxnSpPr>
-        <p:spPr>
-          <a:xfrm>
-            <a:off x="2377440" y="9014460"/>
-            <a:ext cx="0" cy="2194"/>
-          </a:xfrm>
-          <a:prstGeom prst="line">
-            <a:avLst/>
-          </a:prstGeom>
-          <a:ln w="15875">
-            <a:solidFill>
-              <a:srgbClr val="000000"/>
-            </a:solidFill>
-          </a:ln>
-        </p:spPr>
-        <p:style>
-          <a:lnRef idx="2">
-            <a:schemeClr val="accent1"/>
-          </a:lnRef>
-          <a:fillRef idx="0">
-            <a:schemeClr val="accent1"/>
-          </a:fillRef>
-          <a:effectRef idx="1">
-            <a:schemeClr val="accent1"/>
-          </a:effectRef>
-          <a:fontRef idx="minor">
-            <a:schemeClr val="tx1"/>
-          </a:fontRef>
-        </p:style>
-      </p:cxnSp>
-      <p:cxnSp>
-        <p:nvCxnSpPr>
-          <p:cNvPr id="31" name="Connector 30"/>
-          <p:cNvCxnSpPr/>
-          <p:nvPr/>
-        </p:nvCxnSpPr>
-        <p:spPr>
-          <a:xfrm>
-            <a:off x="1207008" y="9016654"/>
-            <a:ext cx="1170432" cy="0"/>
-          </a:xfrm>
-          <a:prstGeom prst="line">
-            <a:avLst/>
-          </a:prstGeom>
-          <a:ln w="15875">
-            <a:solidFill>
-              <a:srgbClr val="000000"/>
-            </a:solidFill>
-          </a:ln>
-        </p:spPr>
-        <p:style>
-          <a:lnRef idx="2">
-            <a:schemeClr val="accent1"/>
-          </a:lnRef>
-          <a:fillRef idx="0">
-            <a:schemeClr val="accent1"/>
-          </a:fillRef>
-          <a:effectRef idx="1">
-            <a:schemeClr val="accent1"/>
-          </a:effectRef>
-          <a:fontRef idx="minor">
-            <a:schemeClr val="tx1"/>
-          </a:fontRef>
-        </p:style>
-      </p:cxnSp>
-      <p:cxnSp>
-        <p:nvCxnSpPr>
-          <p:cNvPr id="32" name="Connector 31"/>
-          <p:cNvCxnSpPr/>
-          <p:nvPr/>
-        </p:nvCxnSpPr>
-        <p:spPr>
-          <a:xfrm>
-            <a:off x="1207008" y="9016654"/>
-            <a:ext cx="0" cy="2195"/>
-          </a:xfrm>
-          <a:prstGeom prst="line">
-            <a:avLst/>
-          </a:prstGeom>
-          <a:ln w="15875">
-            <a:solidFill>
-              <a:srgbClr val="000000"/>
-            </a:solidFill>
-          </a:ln>
-        </p:spPr>
-        <p:style>
-          <a:lnRef idx="2">
-            <a:schemeClr val="accent1"/>
-          </a:lnRef>
-          <a:fillRef idx="0">
-            <a:schemeClr val="accent1"/>
-          </a:fillRef>
-          <a:effectRef idx="1">
-            <a:schemeClr val="accent1"/>
-          </a:effectRef>
-          <a:fontRef idx="minor">
-            <a:schemeClr val="tx1"/>
-          </a:fontRef>
-        </p:style>
-      </p:cxnSp>
-      <p:cxnSp>
-        <p:nvCxnSpPr>
-          <p:cNvPr id="33" name="Connector 32"/>
-          <p:cNvCxnSpPr/>
-          <p:nvPr/>
-        </p:nvCxnSpPr>
-        <p:spPr>
-          <a:xfrm flipH="1">
-            <a:off x="2377440" y="9016654"/>
-            <a:ext cx="1188720" cy="0"/>
-          </a:xfrm>
-          <a:prstGeom prst="line">
-            <a:avLst/>
-          </a:prstGeom>
-          <a:ln w="15875">
-            <a:solidFill>
-              <a:srgbClr val="000000"/>
-            </a:solidFill>
-          </a:ln>
-        </p:spPr>
-        <p:style>
-          <a:lnRef idx="2">
-            <a:schemeClr val="accent1"/>
-          </a:lnRef>
-          <a:fillRef idx="0">
-            <a:schemeClr val="accent1"/>
-          </a:fillRef>
-          <a:effectRef idx="1">
-            <a:schemeClr val="accent1"/>
-          </a:effectRef>
-          <a:fontRef idx="minor">
-            <a:schemeClr val="tx1"/>
-          </a:fontRef>
-        </p:style>
-      </p:cxnSp>
-      <p:cxnSp>
-        <p:nvCxnSpPr>
-          <p:cNvPr id="34" name="Connector 33"/>
-          <p:cNvCxnSpPr/>
-          <p:nvPr/>
-        </p:nvCxnSpPr>
-        <p:spPr>
-          <a:xfrm>
-            <a:off x="3566160" y="9016654"/>
-            <a:ext cx="0" cy="2195"/>
-          </a:xfrm>
-          <a:prstGeom prst="line">
-            <a:avLst/>
-          </a:prstGeom>
-          <a:ln w="15875">
-            <a:solidFill>
-              <a:srgbClr val="000000"/>
-            </a:solidFill>
-          </a:ln>
-        </p:spPr>
-        <p:style>
-          <a:lnRef idx="2">
-            <a:schemeClr val="accent1"/>
-          </a:lnRef>
-          <a:fillRef idx="0">
-            <a:schemeClr val="accent1"/>
-          </a:fillRef>
-          <a:effectRef idx="1">
-            <a:schemeClr val="accent1"/>
-          </a:effectRef>
-          <a:fontRef idx="minor">
-            <a:schemeClr val="tx1"/>
-          </a:fontRef>
-        </p:style>
-      </p:cxnSp>
-      <p:cxnSp>
-        <p:nvCxnSpPr>
-          <p:cNvPr id="35" name="Connector 34"/>
-          <p:cNvCxnSpPr/>
-          <p:nvPr/>
-        </p:nvCxnSpPr>
-        <p:spPr>
-          <a:xfrm>
-            <a:off x="1207008" y="9366321"/>
-            <a:ext cx="0" cy="33711"/>
-          </a:xfrm>
-          <a:prstGeom prst="line">
-            <a:avLst/>
-          </a:prstGeom>
-          <a:ln w="15875">
-            <a:solidFill>
-              <a:srgbClr val="000000"/>
-            </a:solidFill>
-          </a:ln>
-        </p:spPr>
-        <p:style>
-          <a:lnRef idx="2">
-            <a:schemeClr val="accent1"/>
-          </a:lnRef>
-          <a:fillRef idx="0">
-            <a:schemeClr val="accent1"/>
-          </a:fillRef>
-          <a:effectRef idx="1">
-            <a:schemeClr val="accent1"/>
-          </a:effectRef>
-          <a:fontRef idx="minor">
-            <a:schemeClr val="tx1"/>
-          </a:fontRef>
-        </p:style>
-      </p:cxnSp>
-      <p:cxnSp>
-        <p:nvCxnSpPr>
-          <p:cNvPr id="36" name="Connector 35"/>
-          <p:cNvCxnSpPr/>
-          <p:nvPr/>
-        </p:nvCxnSpPr>
-        <p:spPr>
-          <a:xfrm>
-            <a:off x="3566160" y="9366321"/>
-            <a:ext cx="0" cy="16855"/>
-          </a:xfrm>
-          <a:prstGeom prst="line">
-            <a:avLst/>
-          </a:prstGeom>
-          <a:ln w="15875">
-            <a:solidFill>
-              <a:srgbClr val="000000"/>
-            </a:solidFill>
-          </a:ln>
-        </p:spPr>
-        <p:style>
-          <a:lnRef idx="2">
-            <a:schemeClr val="accent1"/>
-          </a:lnRef>
-          <a:fillRef idx="0">
-            <a:schemeClr val="accent1"/>
-          </a:fillRef>
-          <a:effectRef idx="1">
-            <a:schemeClr val="accent1"/>
-          </a:effectRef>
-          <a:fontRef idx="minor">
-            <a:schemeClr val="tx1"/>
-          </a:fontRef>
-        </p:style>
-      </p:cxnSp>
-      <p:cxnSp>
-        <p:nvCxnSpPr>
-          <p:cNvPr id="37" name="Connector 36"/>
-          <p:cNvCxnSpPr/>
-          <p:nvPr/>
-        </p:nvCxnSpPr>
-        <p:spPr>
-          <a:xfrm>
-            <a:off x="3017520" y="9383176"/>
-            <a:ext cx="548640" cy="0"/>
-          </a:xfrm>
-          <a:prstGeom prst="line">
-            <a:avLst/>
-          </a:prstGeom>
-          <a:ln w="15875">
-            <a:solidFill>
-              <a:srgbClr val="000000"/>
-            </a:solidFill>
-          </a:ln>
-        </p:spPr>
-        <p:style>
-          <a:lnRef idx="2">
-            <a:schemeClr val="accent1"/>
-          </a:lnRef>
-          <a:fillRef idx="0">
-            <a:schemeClr val="accent1"/>
-          </a:fillRef>
-          <a:effectRef idx="1">
-            <a:schemeClr val="accent1"/>
-          </a:effectRef>
-          <a:fontRef idx="minor">
-            <a:schemeClr val="tx1"/>
-          </a:fontRef>
-        </p:style>
-      </p:cxnSp>
-      <p:cxnSp>
-        <p:nvCxnSpPr>
-          <p:cNvPr id="38" name="Connector 37"/>
-          <p:cNvCxnSpPr/>
-          <p:nvPr/>
-        </p:nvCxnSpPr>
-        <p:spPr>
-          <a:xfrm>
-            <a:off x="3017520" y="9383176"/>
-            <a:ext cx="0" cy="16856"/>
-          </a:xfrm>
-          <a:prstGeom prst="line">
-            <a:avLst/>
-          </a:prstGeom>
-          <a:ln w="15875">
-            <a:solidFill>
-              <a:srgbClr val="000000"/>
-            </a:solidFill>
-          </a:ln>
-        </p:spPr>
-        <p:style>
-          <a:lnRef idx="2">
-            <a:schemeClr val="accent1"/>
-          </a:lnRef>
-          <a:fillRef idx="0">
-            <a:schemeClr val="accent1"/>
-          </a:fillRef>
-          <a:effectRef idx="1">
-            <a:schemeClr val="accent1"/>
-          </a:effectRef>
-          <a:fontRef idx="minor">
-            <a:schemeClr val="tx1"/>
-          </a:fontRef>
-        </p:style>
-      </p:cxnSp>
-      <p:cxnSp>
-        <p:nvCxnSpPr>
-          <p:cNvPr id="39" name="Connector 38"/>
-          <p:cNvCxnSpPr/>
-          <p:nvPr/>
-        </p:nvCxnSpPr>
-        <p:spPr>
-          <a:xfrm flipH="1">
-            <a:off x="3566160" y="9383176"/>
-            <a:ext cx="411479" cy="0"/>
-          </a:xfrm>
-          <a:prstGeom prst="line">
-            <a:avLst/>
-          </a:prstGeom>
-          <a:ln w="15875">
-            <a:solidFill>
-              <a:srgbClr val="000000"/>
-            </a:solidFill>
-          </a:ln>
-        </p:spPr>
-        <p:style>
-          <a:lnRef idx="2">
-            <a:schemeClr val="accent1"/>
-          </a:lnRef>
-          <a:fillRef idx="0">
-            <a:schemeClr val="accent1"/>
-          </a:fillRef>
-          <a:effectRef idx="1">
-            <a:schemeClr val="accent1"/>
-          </a:effectRef>
-          <a:fontRef idx="minor">
-            <a:schemeClr val="tx1"/>
-          </a:fontRef>
-        </p:style>
-      </p:cxnSp>
-      <p:cxnSp>
-        <p:nvCxnSpPr>
-          <p:cNvPr id="40" name="Connector 39"/>
-          <p:cNvCxnSpPr/>
-          <p:nvPr/>
-        </p:nvCxnSpPr>
-        <p:spPr>
-          <a:xfrm>
-            <a:off x="3977639" y="9383176"/>
-            <a:ext cx="0" cy="16856"/>
-          </a:xfrm>
-          <a:prstGeom prst="line">
-            <a:avLst/>
-          </a:prstGeom>
-          <a:ln w="15875">
-            <a:solidFill>
-              <a:srgbClr val="000000"/>
-            </a:solidFill>
-          </a:ln>
-        </p:spPr>
-        <p:style>
-          <a:lnRef idx="2">
-            <a:schemeClr val="accent1"/>
-          </a:lnRef>
-          <a:fillRef idx="0">
-            <a:schemeClr val="accent1"/>
-          </a:fillRef>
-          <a:effectRef idx="1">
-            <a:schemeClr val="accent1"/>
-          </a:effectRef>
-          <a:fontRef idx="minor">
-            <a:schemeClr val="tx1"/>
-          </a:fontRef>
-        </p:style>
-      </p:cxnSp>
-      <p:cxnSp>
-        <p:nvCxnSpPr>
-          <p:cNvPr id="41" name="Connector 40"/>
-          <p:cNvCxnSpPr/>
-          <p:nvPr/>
-        </p:nvCxnSpPr>
-        <p:spPr>
-          <a:xfrm>
-            <a:off x="2057400" y="9192585"/>
-            <a:ext cx="210312" cy="0"/>
-          </a:xfrm>
-          <a:prstGeom prst="line">
-            <a:avLst/>
-          </a:prstGeom>
-          <a:ln w="22225">
-            <a:solidFill>
-              <a:srgbClr val="C0504D"/>
-            </a:solidFill>
-          </a:ln>
-        </p:spPr>
-        <p:style>
-          <a:lnRef idx="2">
-            <a:schemeClr val="accent1"/>
-          </a:lnRef>
-          <a:fillRef idx="0">
-            <a:schemeClr val="accent1"/>
-          </a:fillRef>
-          <a:effectRef idx="1">
-            <a:schemeClr val="accent1"/>
-          </a:effectRef>
-          <a:fontRef idx="minor">
-            <a:schemeClr val="tx1"/>
-          </a:fontRef>
-        </p:style>
-      </p:cxnSp>
-      <p:cxnSp>
-        <p:nvCxnSpPr>
-          <p:cNvPr id="42" name="Connector 41"/>
-          <p:cNvCxnSpPr/>
-          <p:nvPr/>
-        </p:nvCxnSpPr>
-        <p:spPr>
-          <a:xfrm>
-            <a:off x="2267712" y="9192585"/>
-            <a:ext cx="0" cy="381182"/>
-          </a:xfrm>
-          <a:prstGeom prst="line">
-            <a:avLst/>
-          </a:prstGeom>
-          <a:ln w="22225">
-            <a:solidFill>
-              <a:srgbClr val="C0504D"/>
-            </a:solidFill>
-          </a:ln>
-        </p:spPr>
-        <p:style>
-          <a:lnRef idx="2">
-            <a:schemeClr val="accent1"/>
-          </a:lnRef>
-          <a:fillRef idx="0">
-            <a:schemeClr val="accent1"/>
-          </a:fillRef>
-          <a:effectRef idx="1">
-            <a:schemeClr val="accent1"/>
-          </a:effectRef>
-          <a:fontRef idx="minor">
-            <a:schemeClr val="tx1"/>
-          </a:fontRef>
-        </p:style>
-      </p:cxnSp>
-      <p:cxnSp>
-        <p:nvCxnSpPr>
-          <p:cNvPr id="43" name="Connector 42"/>
-          <p:cNvCxnSpPr/>
-          <p:nvPr/>
-        </p:nvCxnSpPr>
-        <p:spPr>
-          <a:xfrm>
-            <a:off x="2267712" y="9573767"/>
-            <a:ext cx="219456" cy="0"/>
-          </a:xfrm>
-          <a:prstGeom prst="line">
-            <a:avLst/>
-          </a:prstGeom>
-          <a:ln w="22225">
-            <a:solidFill>
-              <a:srgbClr val="C0504D"/>
-            </a:solidFill>
-          </a:ln>
-        </p:spPr>
-        <p:style>
-          <a:lnRef idx="2">
-            <a:schemeClr val="accent1"/>
-          </a:lnRef>
-          <a:fillRef idx="0">
-            <a:schemeClr val="accent1"/>
-          </a:fillRef>
-          <a:effectRef idx="1">
-            <a:schemeClr val="accent1"/>
-          </a:effectRef>
-          <a:fontRef idx="minor">
-            <a:schemeClr val="tx1"/>
-          </a:fontRef>
-        </p:style>
-      </p:cxnSp>
-      <p:sp>
-        <p:nvSpPr>
-          <p:cNvPr id="44" name="TextBox 43"/>
-          <p:cNvSpPr txBox="1"/>
-          <p:nvPr/>
-        </p:nvSpPr>
-        <p:spPr>
-          <a:xfrm>
-            <a:off x="292608" y="9784080"/>
-            <a:ext cx="4224528" cy="493775"/>
-          </a:xfrm>
-          <a:prstGeom prst="rect">
-            <a:avLst/>
-          </a:prstGeom>
-          <a:noFill/>
-        </p:spPr>
-        <p:txBody>
-          <a:bodyPr wrap="square" lIns="18288" rIns="18288" tIns="27432" bIns="18288" anchor="t">
+          <a:bodyPr wrap="square" lIns="45720" rIns="45720" tIns="27432" bIns="18288" anchor="t">
             <a:noAutofit/>
           </a:bodyPr>
           <a:lstStyle/>
@@ -5721,14 +4347,14 @@
                 <a:ea typeface="Arial"/>
                 <a:cs typeface="Arial"/>
               </a:rPr>
-              <a:t>Fig. 2. Black edges split classes. The red edge is a message.</a:t>
-            </a:r>
-          </a:p>
-        </p:txBody>
-      </p:sp>
-      <p:sp>
-        <p:nvSpPr>
-          <p:cNvPr id="45" name="TextBox 44"/>
+              <a:t>Fig. 2. Glossary in Student mode. Left canvas: the network. Right canvas: the history tree.</a:t>
+            </a:r>
+          </a:p>
+        </p:txBody>
+      </p:sp>
+      <p:sp>
+        <p:nvSpPr>
+          <p:cNvPr id="17" name="TextBox 16"/>
           <p:cNvSpPr txBox="1"/>
           <p:nvPr/>
         </p:nvSpPr>
@@ -5775,7 +4401,7 @@
       </p:sp>
       <p:cxnSp>
         <p:nvCxnSpPr>
-          <p:cNvPr id="46" name="Connector 45"/>
+          <p:cNvPr id="18" name="Connector 17"/>
           <p:cNvCxnSpPr/>
           <p:nvPr/>
         </p:nvCxnSpPr>
@@ -5810,14 +4436,14 @@
       </p:cxnSp>
       <p:sp>
         <p:nvSpPr>
-          <p:cNvPr id="47" name="TextBox 46"/>
+          <p:cNvPr id="19" name="TextBox 18"/>
           <p:cNvSpPr txBox="1"/>
           <p:nvPr/>
         </p:nvSpPr>
         <p:spPr>
           <a:xfrm>
             <a:off x="4937760" y="1837943"/>
-            <a:ext cx="4462272" cy="2094992"/>
+            <a:ext cx="4462272" cy="2125980"/>
           </a:xfrm>
           <a:prstGeom prst="rect">
             <a:avLst/>
@@ -6030,7 +4656,7 @@
                 <a:spcPts val="0"/>
               </a:spcBef>
               <a:spcAft>
-                <a:spcPts val="0"/>
+                <a:spcPts val="100"/>
               </a:spcAft>
             </a:pPr>
             <a:r>
@@ -6049,32 +4675,32 @@
       </p:sp>
       <p:graphicFrame>
         <p:nvGraphicFramePr>
-          <p:cNvPr id="48" name="Chart 47"/>
+          <p:cNvPr id="20" name="Chart 19"/>
           <p:cNvGraphicFramePr>
             <a:graphicFrameLocks noGrp="1"/>
           </p:cNvGraphicFramePr>
           <p:nvPr/>
         </p:nvGraphicFramePr>
         <p:xfrm>
-          <a:off x="4937760" y="3969512"/>
-          <a:ext cx="4462272" cy="1261872"/>
+          <a:off x="4937760" y="4000500"/>
+          <a:ext cx="4462272" cy="1554480"/>
         </p:xfrm>
         <a:graphic>
           <a:graphicData uri="http://schemas.openxmlformats.org/drawingml/2006/chart">
-            <c:chart xmlns:c="http://schemas.openxmlformats.org/drawingml/2006/chart" r:id="rId2"/>
+            <c:chart xmlns:c="http://schemas.openxmlformats.org/drawingml/2006/chart" r:id="rId3"/>
           </a:graphicData>
         </a:graphic>
       </p:graphicFrame>
       <p:sp>
         <p:nvSpPr>
-          <p:cNvPr id="49" name="TextBox 48"/>
+          <p:cNvPr id="21" name="TextBox 20"/>
           <p:cNvSpPr txBox="1"/>
           <p:nvPr/>
         </p:nvSpPr>
         <p:spPr>
           <a:xfrm>
-            <a:off x="4937760" y="5258816"/>
-            <a:ext cx="4462272" cy="442976"/>
+            <a:off x="4937760" y="5573268"/>
+            <a:ext cx="4462272" cy="461264"/>
           </a:xfrm>
           <a:prstGeom prst="rect">
             <a:avLst/>
@@ -6114,14 +4740,14 @@
       </p:sp>
       <p:graphicFrame>
         <p:nvGraphicFramePr>
-          <p:cNvPr id="50" name="Table 49"/>
+          <p:cNvPr id="22" name="Table 21"/>
           <p:cNvGraphicFramePr>
             <a:graphicFrameLocks noGrp="1"/>
           </p:cNvGraphicFramePr>
           <p:nvPr/>
         </p:nvGraphicFramePr>
         <p:xfrm>
-          <a:off x="4937760" y="5756656"/>
+          <a:off x="4937760" y="6080252"/>
           <a:ext cx="4462272" cy="1298445"/>
         </p:xfrm>
         <a:graphic>
@@ -6131,14 +4757,14 @@
                 <a:tableStyleId>{5C22544A-7EE6-4342-B048-85BDC9FD1C3A}</a:tableStyleId>
               </a:tblPr>
               <a:tblGrid>
-                <a:gridCol w="1325880"/>
-                <a:gridCol w="1554480"/>
-                <a:gridCol w="1581912"/>
+                <a:gridCol w="1417320"/>
+                <a:gridCol w="1517904"/>
+                <a:gridCol w="1527048"/>
               </a:tblGrid>
               <a:tr h="259689">
                 <a:tc>
                   <a:txBody>
-                    <a:bodyPr wrap="square" lIns="45720" rIns="45720" tIns="18288" bIns="18288"/>
+                    <a:bodyPr wrap="square" lIns="36576" rIns="36576" tIns="18288" bIns="18288"/>
                     <a:lstStyle/>
                     <a:p>
                       <a:pPr algn="ctr">
@@ -6187,7 +4813,7 @@
                 </a:tc>
                 <a:tc>
                   <a:txBody>
-                    <a:bodyPr wrap="square" lIns="45720" rIns="45720" tIns="18288" bIns="18288"/>
+                    <a:bodyPr wrap="square" lIns="36576" rIns="36576" tIns="18288" bIns="18288"/>
                     <a:lstStyle/>
                     <a:p>
                       <a:pPr algn="ctr">
@@ -6236,7 +4862,7 @@
                 </a:tc>
                 <a:tc>
                   <a:txBody>
-                    <a:bodyPr wrap="square" lIns="45720" rIns="45720" tIns="18288" bIns="18288"/>
+                    <a:bodyPr wrap="square" lIns="36576" rIns="36576" tIns="18288" bIns="18288"/>
                     <a:lstStyle/>
                     <a:p>
                       <a:pPr algn="ctr">
@@ -6287,7 +4913,7 @@
               <a:tr h="259689">
                 <a:tc>
                   <a:txBody>
-                    <a:bodyPr wrap="square" lIns="45720" rIns="45720" tIns="18288" bIns="18288"/>
+                    <a:bodyPr wrap="square" lIns="36576" rIns="36576" tIns="18288" bIns="18288"/>
                     <a:lstStyle/>
                     <a:p>
                       <a:pPr algn="l">
@@ -6336,7 +4962,7 @@
                 </a:tc>
                 <a:tc>
                   <a:txBody>
-                    <a:bodyPr wrap="square" lIns="45720" rIns="45720" tIns="18288" bIns="18288"/>
+                    <a:bodyPr wrap="square" lIns="36576" rIns="36576" tIns="18288" bIns="18288"/>
                     <a:lstStyle/>
                     <a:p>
                       <a:pPr algn="ctr">
@@ -6385,7 +5011,7 @@
                 </a:tc>
                 <a:tc>
                   <a:txBody>
-                    <a:bodyPr wrap="square" lIns="45720" rIns="45720" tIns="18288" bIns="18288"/>
+                    <a:bodyPr wrap="square" lIns="36576" rIns="36576" tIns="18288" bIns="18288"/>
                     <a:lstStyle/>
                     <a:p>
                       <a:pPr algn="ctr">
@@ -6436,7 +5062,7 @@
               <a:tr h="259689">
                 <a:tc>
                   <a:txBody>
-                    <a:bodyPr wrap="square" lIns="45720" rIns="45720" tIns="18288" bIns="18288"/>
+                    <a:bodyPr wrap="square" lIns="36576" rIns="36576" tIns="18288" bIns="18288"/>
                     <a:lstStyle/>
                     <a:p>
                       <a:pPr algn="l">
@@ -6485,7 +5111,7 @@
                 </a:tc>
                 <a:tc>
                   <a:txBody>
-                    <a:bodyPr wrap="square" lIns="45720" rIns="45720" tIns="18288" bIns="18288"/>
+                    <a:bodyPr wrap="square" lIns="36576" rIns="36576" tIns="18288" bIns="18288"/>
                     <a:lstStyle/>
                     <a:p>
                       <a:pPr algn="ctr">
@@ -6534,7 +5160,7 @@
                 </a:tc>
                 <a:tc>
                   <a:txBody>
-                    <a:bodyPr wrap="square" lIns="45720" rIns="45720" tIns="18288" bIns="18288"/>
+                    <a:bodyPr wrap="square" lIns="36576" rIns="36576" tIns="18288" bIns="18288"/>
                     <a:lstStyle/>
                     <a:p>
                       <a:pPr algn="ctr">
@@ -6585,7 +5211,7 @@
               <a:tr h="259689">
                 <a:tc>
                   <a:txBody>
-                    <a:bodyPr wrap="square" lIns="45720" rIns="45720" tIns="18288" bIns="18288"/>
+                    <a:bodyPr wrap="square" lIns="36576" rIns="36576" tIns="18288" bIns="18288"/>
                     <a:lstStyle/>
                     <a:p>
                       <a:pPr algn="l">
@@ -6634,7 +5260,7 @@
                 </a:tc>
                 <a:tc>
                   <a:txBody>
-                    <a:bodyPr wrap="square" lIns="45720" rIns="45720" tIns="18288" bIns="18288"/>
+                    <a:bodyPr wrap="square" lIns="36576" rIns="36576" tIns="18288" bIns="18288"/>
                     <a:lstStyle/>
                     <a:p>
                       <a:pPr algn="ctr">
@@ -6683,7 +5309,7 @@
                 </a:tc>
                 <a:tc>
                   <a:txBody>
-                    <a:bodyPr wrap="square" lIns="45720" rIns="45720" tIns="18288" bIns="18288"/>
+                    <a:bodyPr wrap="square" lIns="36576" rIns="36576" tIns="18288" bIns="18288"/>
                     <a:lstStyle/>
                     <a:p>
                       <a:pPr algn="ctr">
@@ -6734,7 +5360,7 @@
               <a:tr h="259689">
                 <a:tc>
                   <a:txBody>
-                    <a:bodyPr wrap="square" lIns="45720" rIns="45720" tIns="18288" bIns="18288"/>
+                    <a:bodyPr wrap="square" lIns="36576" rIns="36576" tIns="18288" bIns="18288"/>
                     <a:lstStyle/>
                     <a:p>
                       <a:pPr algn="l">
@@ -6783,7 +5409,7 @@
                 </a:tc>
                 <a:tc>
                   <a:txBody>
-                    <a:bodyPr wrap="square" lIns="45720" rIns="45720" tIns="18288" bIns="18288"/>
+                    <a:bodyPr wrap="square" lIns="36576" rIns="36576" tIns="18288" bIns="18288"/>
                     <a:lstStyle/>
                     <a:p>
                       <a:pPr algn="ctr">
@@ -6832,7 +5458,7 @@
                 </a:tc>
                 <a:tc>
                   <a:txBody>
-                    <a:bodyPr wrap="square" lIns="45720" rIns="45720" tIns="18288" bIns="18288"/>
+                    <a:bodyPr wrap="square" lIns="36576" rIns="36576" tIns="18288" bIns="18288"/>
                     <a:lstStyle/>
                     <a:p>
                       <a:pPr algn="ctr">
@@ -6886,14 +5512,14 @@
       </p:graphicFrame>
       <p:sp>
         <p:nvSpPr>
-          <p:cNvPr id="51" name="TextBox 50"/>
+          <p:cNvPr id="23" name="TextBox 22"/>
           <p:cNvSpPr txBox="1"/>
           <p:nvPr/>
         </p:nvSpPr>
         <p:spPr>
           <a:xfrm>
-            <a:off x="4937760" y="7082536"/>
-            <a:ext cx="4462272" cy="258064"/>
+            <a:off x="4937760" y="7406132"/>
+            <a:ext cx="4462272" cy="276352"/>
           </a:xfrm>
           <a:prstGeom prst="rect">
             <a:avLst/>
@@ -6933,13 +5559,13 @@
       </p:sp>
       <p:sp>
         <p:nvSpPr>
-          <p:cNvPr id="52" name="TextBox 51"/>
+          <p:cNvPr id="24" name="TextBox 23"/>
           <p:cNvSpPr txBox="1"/>
           <p:nvPr/>
         </p:nvSpPr>
         <p:spPr>
           <a:xfrm>
-            <a:off x="4937760" y="7395464"/>
+            <a:off x="4937760" y="7737347"/>
             <a:ext cx="4462272" cy="292608"/>
           </a:xfrm>
           <a:prstGeom prst="rect">
@@ -6980,13 +5606,13 @@
       </p:sp>
       <p:cxnSp>
         <p:nvCxnSpPr>
-          <p:cNvPr id="53" name="Connector 52"/>
+          <p:cNvPr id="25" name="Connector 24"/>
           <p:cNvCxnSpPr/>
           <p:nvPr/>
         </p:nvCxnSpPr>
         <p:spPr>
           <a:xfrm>
-            <a:off x="4937760" y="7688072"/>
+            <a:off x="4937760" y="8029956"/>
             <a:ext cx="4462272" cy="0"/>
           </a:xfrm>
           <a:prstGeom prst="line">
@@ -7015,14 +5641,14 @@
       </p:cxnSp>
       <p:sp>
         <p:nvSpPr>
-          <p:cNvPr id="54" name="TextBox 53"/>
+          <p:cNvPr id="26" name="TextBox 25"/>
           <p:cNvSpPr txBox="1"/>
           <p:nvPr/>
         </p:nvSpPr>
         <p:spPr>
           <a:xfrm>
-            <a:off x="4937760" y="7733792"/>
-            <a:ext cx="4462272" cy="1190752"/>
+            <a:off x="4937760" y="8075675"/>
+            <a:ext cx="4462272" cy="1447800"/>
           </a:xfrm>
           <a:prstGeom prst="rect">
             <a:avLst/>
@@ -7103,7 +5729,7 @@
                 <a:ea typeface="Arial"/>
                 <a:cs typeface="Arial"/>
               </a:rPr>
-              <a:t>•  Explain colors and red edges on the page.</a:t>
+              <a:t>•  Public page has no worker thread.</a:t>
             </a:r>
           </a:p>
           <a:p>
@@ -7127,7 +5753,7 @@
                 <a:ea typeface="Arial"/>
                 <a:cs typeface="Arial"/>
               </a:rPr>
-              <a:t>•  Later: more leaders, directed links [2].</a:t>
+              <a:t>•  Last-round edits stay on the main thread.</a:t>
             </a:r>
           </a:p>
           <a:p>
@@ -7139,7 +5765,7 @@
                 <a:spcPts val="0"/>
               </a:spcBef>
               <a:spcAft>
-                <a:spcPts val="0"/>
+                <a:spcPts val="100"/>
               </a:spcAft>
             </a:pPr>
             <a:r>
@@ -7151,21 +5777,45 @@
                 <a:ea typeface="Arial"/>
                 <a:cs typeface="Arial"/>
               </a:rPr>
-              <a:t>•  Fallback: keep fast append, state the limit.</a:t>
-            </a:r>
-          </a:p>
-        </p:txBody>
-      </p:sp>
-      <p:sp>
-        <p:nvSpPr>
-          <p:cNvPr id="55" name="Rectangle 54"/>
+              <a:t>•  Later: more leaders, directed links [2].</a:t>
+            </a:r>
+          </a:p>
+          <a:p>
+            <a:pPr algn="l">
+              <a:lnSpc>
+                <a:spcPct val="112000"/>
+              </a:lnSpc>
+              <a:spcBef>
+                <a:spcPts val="0"/>
+              </a:spcBef>
+              <a:spcAft>
+                <a:spcPts val="100"/>
+              </a:spcAft>
+            </a:pPr>
+            <a:r>
+              <a:rPr sz="1500" b="0" i="0">
+                <a:solidFill>
+                  <a:srgbClr val="222222"/>
+                </a:solidFill>
+                <a:latin typeface="Arial"/>
+                <a:ea typeface="Arial"/>
+                <a:cs typeface="Arial"/>
+              </a:rPr>
+              <a:t>•  Fallback: keep the fast last-round edit.</a:t>
+            </a:r>
+          </a:p>
+        </p:txBody>
+      </p:sp>
+      <p:sp>
+        <p:nvSpPr>
+          <p:cNvPr id="27" name="Rectangle 26"/>
           <p:cNvSpPr/>
           <p:nvPr/>
         </p:nvSpPr>
         <p:spPr>
           <a:xfrm>
-            <a:off x="4937760" y="8961120"/>
-            <a:ext cx="4462272" cy="1353311"/>
+            <a:off x="4937760" y="9569195"/>
+            <a:ext cx="4462272" cy="1239012"/>
           </a:xfrm>
           <a:prstGeom prst="rect">
             <a:avLst/>
@@ -7204,14 +5854,14 @@
       </p:sp>
       <p:sp>
         <p:nvSpPr>
-          <p:cNvPr id="56" name="TextBox 55"/>
+          <p:cNvPr id="28" name="TextBox 27"/>
           <p:cNvSpPr txBox="1"/>
           <p:nvPr/>
         </p:nvSpPr>
         <p:spPr>
           <a:xfrm>
-            <a:off x="4992624" y="8997696"/>
-            <a:ext cx="4352544" cy="1116076"/>
+            <a:off x="4992624" y="9605771"/>
+            <a:ext cx="4352544" cy="1079500"/>
           </a:xfrm>
           <a:prstGeom prst="rect">
             <a:avLst/>
@@ -7316,7 +5966,7 @@
                 <a:ea typeface="Arial"/>
                 <a:cs typeface="Arial"/>
               </a:rPr>
-              <a:t>•  Dec — explanations on the page</a:t>
+              <a:t>•  Dec — thesis text on the UI and threads</a:t>
             </a:r>
           </a:p>
           <a:p>
@@ -7347,13 +5997,13 @@
       </p:sp>
       <p:cxnSp>
         <p:nvCxnSpPr>
-          <p:cNvPr id="57" name="Connector 56"/>
+          <p:cNvPr id="29" name="Connector 28"/>
           <p:cNvCxnSpPr/>
           <p:nvPr/>
         </p:nvCxnSpPr>
         <p:spPr>
           <a:xfrm>
-            <a:off x="219456" y="10442448"/>
+            <a:off x="219456" y="10936224"/>
             <a:ext cx="9162288" cy="0"/>
           </a:xfrm>
           <a:prstGeom prst="line">
@@ -7382,14 +6032,14 @@
       </p:cxnSp>
       <p:sp>
         <p:nvSpPr>
-          <p:cNvPr id="58" name="TextBox 57"/>
+          <p:cNvPr id="30" name="TextBox 29"/>
           <p:cNvSpPr txBox="1"/>
           <p:nvPr/>
         </p:nvSpPr>
         <p:spPr>
           <a:xfrm>
-            <a:off x="219456" y="10497312"/>
-            <a:ext cx="9162288" cy="310896"/>
+            <a:off x="219456" y="10991088"/>
+            <a:ext cx="9162288" cy="292608"/>
           </a:xfrm>
           <a:prstGeom prst="rect">
             <a:avLst/>
@@ -7429,14 +6079,14 @@
       </p:sp>
       <p:sp>
         <p:nvSpPr>
-          <p:cNvPr id="59" name="TextBox 58"/>
+          <p:cNvPr id="31" name="TextBox 30"/>
           <p:cNvSpPr txBox="1"/>
           <p:nvPr/>
         </p:nvSpPr>
         <p:spPr>
           <a:xfrm>
-            <a:off x="219456" y="10826496"/>
-            <a:ext cx="9162288" cy="1420368"/>
+            <a:off x="219456" y="11301984"/>
+            <a:ext cx="9162288" cy="1400556"/>
           </a:xfrm>
           <a:prstGeom prst="rect">
             <a:avLst/>
@@ -7457,7 +6107,7 @@
                 <a:spcPts val="0"/>
               </a:spcBef>
               <a:spcAft>
-                <a:spcPts val="400"/>
+                <a:spcPts val="300"/>
               </a:spcAft>
             </a:pPr>
             <a:r>
@@ -7481,7 +6131,7 @@
                 <a:spcPts val="0"/>
               </a:spcBef>
               <a:spcAft>
-                <a:spcPts val="400"/>
+                <a:spcPts val="300"/>
               </a:spcAft>
             </a:pPr>
             <a:r>
@@ -7505,7 +6155,7 @@
                 <a:spcPts val="0"/>
               </a:spcBef>
               <a:spcAft>
-                <a:spcPts val="400"/>
+                <a:spcPts val="300"/>
               </a:spcAft>
             </a:pPr>
             <a:r>
